--- a/51Careers_AI_Investor_Presentation.pptx
+++ b/51Careers_AI_Investor_Presentation.pptx
@@ -1583,200 +1583,6 @@
         <a:defRPr sz="1800"/>
       </a:pPr>
       <a:endParaRPr/>
-    </a:p>
-  </c:txPr>
-  <c:externalData r:id="rId1">
-    <c:autoUpdate val="0"/>
-  </c:externalData>
-</c:chartSpace>
-</file>
-
-<file path=ppt/charts/chart8.xml><?xml version="1.0" encoding="utf-8"?>
-<c:chartSpace xmlns:c="http://schemas.openxmlformats.org/drawingml/2006/chart" xmlns:a="http://schemas.openxmlformats.org/drawingml/2006/main" xmlns:r="http://schemas.openxmlformats.org/officeDocument/2006/relationships">
-  <c:date1904 val="0"/>
-  <c:chart>
-    <c:autoTitleDeleted val="0"/>
-    <c:plotArea>
-      <c:barChart>
-        <c:barDir val="bar"/>
-        <c:grouping val="clustered"/>
-        <c:ser>
-          <c:idx val="0"/>
-          <c:order val="0"/>
-          <c:tx>
-            <c:strRef>
-              <c:f>Sheet1!$B$1</c:f>
-              <c:strCache>
-                <c:ptCount val="1"/>
-                <c:pt idx="0">
-                  <c:v>Relative presence</c:v>
-                </c:pt>
-              </c:strCache>
-            </c:strRef>
-          </c:tx>
-          <c:spPr>
-            <a:solidFill>
-              <a:srgbClr val="0A6B63"/>
-            </a:solidFill>
-            <a:ln>
-              <a:solidFill>
-                <a:srgbClr val="0A6B63"/>
-              </a:solidFill>
-            </a:ln>
-          </c:spPr>
-          <c:cat>
-            <c:strRef>
-              <c:f>Sheet1!$A$2:$A$8</c:f>
-              <c:strCache>
-                <c:ptCount val="7"/>
-                <c:pt idx="0">
-                  <c:v>New York</c:v>
-                </c:pt>
-                <c:pt idx="1">
-                  <c:v>Shanghai</c:v>
-                </c:pt>
-                <c:pt idx="2">
-                  <c:v>London</c:v>
-                </c:pt>
-                <c:pt idx="3">
-                  <c:v>Singapore</c:v>
-                </c:pt>
-                <c:pt idx="4">
-                  <c:v>Seoul</c:v>
-                </c:pt>
-                <c:pt idx="5">
-                  <c:v>Toronto</c:v>
-                </c:pt>
-                <c:pt idx="6">
-                  <c:v>Delhi</c:v>
-                </c:pt>
-              </c:strCache>
-            </c:strRef>
-          </c:cat>
-          <c:val>
-            <c:numRef>
-              <c:f>Sheet1!$B$2:$B$8</c:f>
-              <c:numCache>
-                <c:formatCode>General</c:formatCode>
-                <c:ptCount val="7"/>
-                <c:pt idx="0">
-                  <c:v>100</c:v>
-                </c:pt>
-                <c:pt idx="1">
-                  <c:v>95</c:v>
-                </c:pt>
-                <c:pt idx="2">
-                  <c:v>55</c:v>
-                </c:pt>
-                <c:pt idx="3">
-                  <c:v>50</c:v>
-                </c:pt>
-                <c:pt idx="4">
-                  <c:v>45</c:v>
-                </c:pt>
-                <c:pt idx="5">
-                  <c:v>40</c:v>
-                </c:pt>
-                <c:pt idx="6">
-                  <c:v>40</c:v>
-                </c:pt>
-              </c:numCache>
-            </c:numRef>
-          </c:val>
-        </c:ser>
-        <c:axId val="-2068027336"/>
-        <c:axId val="-2113994440"/>
-      </c:barChart>
-      <c:catAx>
-        <c:axId val="-2068027336"/>
-        <c:scaling>
-          <c:orientation val="minMax"/>
-        </c:scaling>
-        <c:delete val="0"/>
-        <c:axPos val="l"/>
-        <c:majorTickMark val="out"/>
-        <c:minorTickMark val="none"/>
-        <c:tickLblPos val="nextTo"/>
-        <c:spPr>
-          <a:ln>
-            <a:solidFill>
-              <a:srgbClr val="D4DEE8"/>
-            </a:solidFill>
-          </a:ln>
-        </c:spPr>
-        <c:txPr>
-          <a:bodyPr/>
-          <a:lstStyle/>
-          <a:p>
-            <a:pPr>
-              <a:defRPr sz="900">
-                <a:solidFill>
-                  <a:srgbClr val="5E6E80"/>
-                </a:solidFill>
-                <a:latin typeface="Segoe UI"/>
-              </a:defRPr>
-            </a:pPr>
-          </a:p>
-        </c:txPr>
-        <c:crossAx val="-2113994440"/>
-        <c:crosses val="autoZero"/>
-        <c:auto val="1"/>
-        <c:lblAlgn val="ctr"/>
-        <c:lblOffset val="100"/>
-        <c:noMultiLvlLbl val="0"/>
-      </c:catAx>
-      <c:valAx>
-        <c:axId val="-2113994440"/>
-        <c:scaling/>
-        <c:delete val="0"/>
-        <c:axPos val="b"/>
-        <c:majorGridlines>
-          <c:spPr>
-            <a:ln>
-              <a:solidFill>
-                <a:srgbClr val="D4DEE8"/>
-              </a:solidFill>
-            </a:ln>
-          </c:spPr>
-        </c:majorGridlines>
-        <c:majorTickMark val="out"/>
-        <c:minorTickMark val="none"/>
-        <c:tickLblPos val="nextTo"/>
-        <c:spPr>
-          <a:ln>
-            <a:solidFill>
-              <a:srgbClr val="D4DEE8"/>
-            </a:solidFill>
-          </a:ln>
-        </c:spPr>
-        <c:txPr>
-          <a:bodyPr/>
-          <a:lstStyle/>
-          <a:p>
-            <a:pPr>
-              <a:defRPr sz="900">
-                <a:solidFill>
-                  <a:srgbClr val="5E6E80"/>
-                </a:solidFill>
-                <a:latin typeface="Segoe UI"/>
-              </a:defRPr>
-            </a:pPr>
-          </a:p>
-        </c:txPr>
-        <c:crossAx val="-2068027336"/>
-        <c:crosses val="autoZero"/>
-      </c:valAx>
-    </c:plotArea>
-    <c:dispBlanksAs val="gap"/>
-  </c:chart>
-  <c:txPr>
-    <a:bodyPr/>
-    <a:lstStyle/>
-    <a:p>
-      <a:pPr>
-        <a:defRPr sz="1800"/>
-      </a:pPr>
-      <a:endParaRPr lang="en-US"/>
     </a:p>
   </c:txPr>
   <c:externalData r:id="rId1">
@@ -10279,7 +10085,7 @@
                 </a:solidFill>
                 <a:latin typeface="Georgia"/>
               </a:rPr>
-              <a:t>Founder-Led, Globally Distributed</a:t>
+              <a:t>Executive Leadership Team</a:t>
             </a:r>
           </a:p>
         </p:txBody>
@@ -10292,8 +10098,8 @@
         </p:nvSpPr>
         <p:spPr>
           <a:xfrm>
-            <a:off x="502920" y="1188720"/>
-            <a:ext cx="6858000" cy="3200400"/>
+            <a:off x="502920" y="1170432"/>
+            <a:ext cx="3657600" cy="2148840"/>
           </a:xfrm>
           <a:prstGeom prst="roundRect">
             <a:avLst>
@@ -10339,8 +10145,8 @@
         </p:nvSpPr>
         <p:spPr>
           <a:xfrm>
-            <a:off x="502920" y="1188720"/>
-            <a:ext cx="91440" cy="3200400"/>
+            <a:off x="502920" y="1170432"/>
+            <a:ext cx="73152" cy="2148840"/>
           </a:xfrm>
           <a:prstGeom prst="rect">
             <a:avLst/>
@@ -10382,21 +10188,21 @@
         </p:nvSpPr>
         <p:spPr>
           <a:xfrm>
-            <a:off x="822960" y="1371600"/>
-            <a:ext cx="6309360" cy="411480"/>
-          </a:xfrm>
-          <a:prstGeom prst="rect">
-            <a:avLst/>
-          </a:prstGeom>
-          <a:noFill/>
-        </p:spPr>
-        <p:txBody>
-          <a:bodyPr wrap="square" anchor="t"/>
-          <a:lstStyle/>
-          <a:p>
-            <a:pPr algn="l"/>
-            <a:r>
-              <a:rPr sz="2600" b="1" i="0">
+            <a:off x="704088" y="1298448"/>
+            <a:ext cx="3337560" cy="320040"/>
+          </a:xfrm>
+          <a:prstGeom prst="rect">
+            <a:avLst/>
+          </a:prstGeom>
+          <a:noFill/>
+        </p:spPr>
+        <p:txBody>
+          <a:bodyPr wrap="square" anchor="t"/>
+          <a:lstStyle/>
+          <a:p>
+            <a:pPr algn="l"/>
+            <a:r>
+              <a:rPr sz="1500" b="1" i="0">
                 <a:solidFill>
                   <a:srgbClr val="0B1F33"/>
                 </a:solidFill>
@@ -10415,27 +10221,27 @@
         </p:nvSpPr>
         <p:spPr>
           <a:xfrm>
-            <a:off x="822960" y="1874519"/>
-            <a:ext cx="6309360" cy="274320"/>
-          </a:xfrm>
-          <a:prstGeom prst="rect">
-            <a:avLst/>
-          </a:prstGeom>
-          <a:noFill/>
-        </p:spPr>
-        <p:txBody>
-          <a:bodyPr wrap="square" anchor="t"/>
-          <a:lstStyle/>
-          <a:p>
-            <a:pPr algn="l"/>
-            <a:r>
-              <a:rPr sz="1100" b="1" i="0">
+            <a:off x="704088" y="1609344"/>
+            <a:ext cx="3337560" cy="256032"/>
+          </a:xfrm>
+          <a:prstGeom prst="rect">
+            <a:avLst/>
+          </a:prstGeom>
+          <a:noFill/>
+        </p:spPr>
+        <p:txBody>
+          <a:bodyPr wrap="square" anchor="t"/>
+          <a:lstStyle/>
+          <a:p>
+            <a:pPr algn="l"/>
+            <a:r>
+              <a:rPr sz="1000" b="1" i="0">
                 <a:solidFill>
                   <a:srgbClr val="0A6B63"/>
                 </a:solidFill>
                 <a:latin typeface="Segoe UI"/>
               </a:rPr>
-              <a:t>FOUNDER &amp; CHIEF EXECUTIVE OFFICER</a:t>
+              <a:t>FOUNDER</a:t>
             </a:r>
           </a:p>
         </p:txBody>
@@ -10448,27 +10254,27 @@
         </p:nvSpPr>
         <p:spPr>
           <a:xfrm>
-            <a:off x="822960" y="2286000"/>
-            <a:ext cx="6309360" cy="1371600"/>
-          </a:xfrm>
-          <a:prstGeom prst="rect">
-            <a:avLst/>
-          </a:prstGeom>
-          <a:noFill/>
-        </p:spPr>
-        <p:txBody>
-          <a:bodyPr wrap="square" anchor="t"/>
-          <a:lstStyle/>
-          <a:p>
-            <a:pPr algn="l"/>
-            <a:r>
-              <a:rPr sz="1200" b="0" i="0">
+            <a:off x="704088" y="1947672"/>
+            <a:ext cx="3310128" cy="594360"/>
+          </a:xfrm>
+          <a:prstGeom prst="rect">
+            <a:avLst/>
+          </a:prstGeom>
+          <a:noFill/>
+        </p:spPr>
+        <p:txBody>
+          <a:bodyPr wrap="square" anchor="t"/>
+          <a:lstStyle/>
+          <a:p>
+            <a:pPr algn="l"/>
+            <a:r>
+              <a:rPr sz="1000" b="0" i="0">
                 <a:solidFill>
                   <a:srgbClr val="2C3A4B"/>
                 </a:solidFill>
                 <a:latin typeface="Segoe UI"/>
               </a:rPr>
-              <a:t>Founded 51 Careers in New York in 2016 and built it from a boutique consultancy into a multi-market career-services and technology business. Architect of the Company’s AI-first strategy, including the 2025 strategic partnership with Alibaba Cloud AI, and of its expansion across North America, Europe, and Asia.</a:t>
+              <a:t>▸  Founder of 51 Careers and 51Careers.AI; investor &amp; Managing Director at publicly listed Helio</a:t>
             </a:r>
           </a:p>
         </p:txBody>
@@ -10481,27 +10287,27 @@
         </p:nvSpPr>
         <p:spPr>
           <a:xfrm>
-            <a:off x="822960" y="3749039"/>
-            <a:ext cx="6309360" cy="457200"/>
-          </a:xfrm>
-          <a:prstGeom prst="rect">
-            <a:avLst/>
-          </a:prstGeom>
-          <a:noFill/>
-        </p:spPr>
-        <p:txBody>
-          <a:bodyPr wrap="square" anchor="t"/>
-          <a:lstStyle/>
-          <a:p>
-            <a:pPr algn="l"/>
-            <a:r>
-              <a:rPr sz="1100" b="0" i="0">
-                <a:solidFill>
-                  <a:srgbClr val="5E6E80"/>
-                </a:solidFill>
-                <a:latin typeface="Segoe UI"/>
-              </a:rPr>
-              <a:t>Supporting bench — Senior partners across business development, coaching operations, and engineering, supported by a mentor network of practitioners at leading global employers.</a:t>
+            <a:off x="704088" y="2569464"/>
+            <a:ext cx="3310128" cy="594360"/>
+          </a:xfrm>
+          <a:prstGeom prst="rect">
+            <a:avLst/>
+          </a:prstGeom>
+          <a:noFill/>
+        </p:spPr>
+        <p:txBody>
+          <a:bodyPr wrap="square" anchor="t"/>
+          <a:lstStyle/>
+          <a:p>
+            <a:pPr algn="l"/>
+            <a:r>
+              <a:rPr sz="1000" b="0" i="0">
+                <a:solidFill>
+                  <a:srgbClr val="2C3A4B"/>
+                </a:solidFill>
+                <a:latin typeface="Segoe UI"/>
+              </a:rPr>
+              <a:t>▸  Decade of international business, capital markets, and global resource integration across AI, education, and related industries</a:t>
             </a:r>
           </a:p>
         </p:txBody>
@@ -10514,284 +10320,8 @@
         </p:nvSpPr>
         <p:spPr>
           <a:xfrm>
-            <a:off x="7589520" y="1188720"/>
-            <a:ext cx="4114800" cy="3200400"/>
-          </a:xfrm>
-          <a:prstGeom prst="roundRect">
-            <a:avLst>
-              <a:gd name="adj" fmla="val 8000"/>
-            </a:avLst>
-          </a:prstGeom>
-          <a:solidFill>
-            <a:srgbClr val="0B1F33"/>
-          </a:solidFill>
-          <a:ln>
-            <a:noFill/>
-          </a:ln>
-        </p:spPr>
-        <p:style>
-          <a:lnRef idx="1">
-            <a:schemeClr val="accent1"/>
-          </a:lnRef>
-          <a:fillRef idx="3">
-            <a:schemeClr val="accent1"/>
-          </a:fillRef>
-          <a:effectRef idx="2">
-            <a:schemeClr val="accent1"/>
-          </a:effectRef>
-          <a:fontRef idx="minor">
-            <a:schemeClr val="lt1"/>
-          </a:fontRef>
-        </p:style>
-        <p:txBody>
-          <a:bodyPr rtlCol="0" anchor="ctr"/>
-          <a:lstStyle/>
-          <a:p>
-            <a:pPr algn="ctr"/>
-          </a:p>
-        </p:txBody>
-      </p:sp>
-      <p:sp>
-        <p:nvSpPr>
-          <p:cNvPr id="12" name="TextBox 11"/>
-          <p:cNvSpPr txBox="1"/>
-          <p:nvPr/>
-        </p:nvSpPr>
-        <p:spPr>
-          <a:xfrm>
-            <a:off x="7818120" y="1371600"/>
-            <a:ext cx="3657600" cy="274320"/>
-          </a:xfrm>
-          <a:prstGeom prst="rect">
-            <a:avLst/>
-          </a:prstGeom>
-          <a:noFill/>
-        </p:spPr>
-        <p:txBody>
-          <a:bodyPr wrap="square" anchor="t"/>
-          <a:lstStyle/>
-          <a:p>
-            <a:pPr algn="l"/>
-            <a:r>
-              <a:rPr sz="1100" b="1" i="0">
-                <a:solidFill>
-                  <a:srgbClr val="0A6B63"/>
-                </a:solidFill>
-                <a:latin typeface="Segoe UI"/>
-              </a:rPr>
-              <a:t>GLOBAL ORGANIZATION</a:t>
-            </a:r>
-          </a:p>
-        </p:txBody>
-      </p:sp>
-      <p:sp>
-        <p:nvSpPr>
-          <p:cNvPr id="13" name="TextBox 12"/>
-          <p:cNvSpPr txBox="1"/>
-          <p:nvPr/>
-        </p:nvSpPr>
-        <p:spPr>
-          <a:xfrm>
-            <a:off x="7818120" y="1783080"/>
-            <a:ext cx="3657600" cy="411480"/>
-          </a:xfrm>
-          <a:prstGeom prst="rect">
-            <a:avLst/>
-          </a:prstGeom>
-          <a:noFill/>
-        </p:spPr>
-        <p:txBody>
-          <a:bodyPr wrap="square" anchor="t"/>
-          <a:lstStyle/>
-          <a:p>
-            <a:pPr algn="l"/>
-            <a:r>
-              <a:rPr sz="2000" b="1" i="0">
-                <a:solidFill>
-                  <a:srgbClr val="FFFFFF"/>
-                </a:solidFill>
-                <a:latin typeface="Georgia"/>
-              </a:rPr>
-              <a:t>≈50 professionals</a:t>
-            </a:r>
-          </a:p>
-        </p:txBody>
-      </p:sp>
-      <p:sp>
-        <p:nvSpPr>
-          <p:cNvPr id="14" name="TextBox 13"/>
-          <p:cNvSpPr txBox="1"/>
-          <p:nvPr/>
-        </p:nvSpPr>
-        <p:spPr>
-          <a:xfrm>
-            <a:off x="7818120" y="2240280"/>
-            <a:ext cx="3657600" cy="274320"/>
-          </a:xfrm>
-          <a:prstGeom prst="rect">
-            <a:avLst/>
-          </a:prstGeom>
-          <a:noFill/>
-        </p:spPr>
-        <p:txBody>
-          <a:bodyPr wrap="square" anchor="t"/>
-          <a:lstStyle/>
-          <a:p>
-            <a:pPr algn="l"/>
-            <a:r>
-              <a:rPr sz="1100" b="0" i="0">
-                <a:solidFill>
-                  <a:srgbClr val="C5D5E0"/>
-                </a:solidFill>
-                <a:latin typeface="Segoe UI"/>
-              </a:rPr>
-              <a:t>Distributed across four continents†</a:t>
-            </a:r>
-          </a:p>
-        </p:txBody>
-      </p:sp>
-      <p:sp>
-        <p:nvSpPr>
-          <p:cNvPr id="15" name="TextBox 14"/>
-          <p:cNvSpPr txBox="1"/>
-          <p:nvPr/>
-        </p:nvSpPr>
-        <p:spPr>
-          <a:xfrm>
-            <a:off x="7818120" y="2743200"/>
-            <a:ext cx="3657600" cy="274320"/>
-          </a:xfrm>
-          <a:prstGeom prst="rect">
-            <a:avLst/>
-          </a:prstGeom>
-          <a:noFill/>
-        </p:spPr>
-        <p:txBody>
-          <a:bodyPr wrap="square" anchor="t"/>
-          <a:lstStyle/>
-          <a:p>
-            <a:pPr algn="l"/>
-            <a:r>
-              <a:rPr sz="1200" b="1" i="0">
-                <a:solidFill>
-                  <a:srgbClr val="0A6B63"/>
-                </a:solidFill>
-                <a:latin typeface="Segoe UI"/>
-              </a:rPr>
-              <a:t>Hubs</a:t>
-            </a:r>
-          </a:p>
-        </p:txBody>
-      </p:sp>
-      <p:sp>
-        <p:nvSpPr>
-          <p:cNvPr id="16" name="TextBox 15"/>
-          <p:cNvSpPr txBox="1"/>
-          <p:nvPr/>
-        </p:nvSpPr>
-        <p:spPr>
-          <a:xfrm>
-            <a:off x="7818120" y="3017520"/>
-            <a:ext cx="3657600" cy="502920"/>
-          </a:xfrm>
-          <a:prstGeom prst="rect">
-            <a:avLst/>
-          </a:prstGeom>
-          <a:noFill/>
-        </p:spPr>
-        <p:txBody>
-          <a:bodyPr wrap="square" anchor="t"/>
-          <a:lstStyle/>
-          <a:p>
-            <a:pPr algn="l"/>
-            <a:r>
-              <a:rPr sz="1100" b="0" i="0">
-                <a:solidFill>
-                  <a:srgbClr val="FFFFFF"/>
-                </a:solidFill>
-                <a:latin typeface="Segoe UI"/>
-              </a:rPr>
-              <a:t>New York &amp; Shanghai; presence in London, Singapore, Seoul, Toronto, and Delhi</a:t>
-            </a:r>
-          </a:p>
-        </p:txBody>
-      </p:sp>
-      <p:sp>
-        <p:nvSpPr>
-          <p:cNvPr id="17" name="TextBox 16"/>
-          <p:cNvSpPr txBox="1"/>
-          <p:nvPr/>
-        </p:nvSpPr>
-        <p:spPr>
-          <a:xfrm>
-            <a:off x="7818120" y="3657600"/>
-            <a:ext cx="3657600" cy="274320"/>
-          </a:xfrm>
-          <a:prstGeom prst="rect">
-            <a:avLst/>
-          </a:prstGeom>
-          <a:noFill/>
-        </p:spPr>
-        <p:txBody>
-          <a:bodyPr wrap="square" anchor="t"/>
-          <a:lstStyle/>
-          <a:p>
-            <a:pPr algn="l"/>
-            <a:r>
-              <a:rPr sz="1200" b="1" i="0">
-                <a:solidFill>
-                  <a:srgbClr val="0A6B63"/>
-                </a:solidFill>
-                <a:latin typeface="Segoe UI"/>
-              </a:rPr>
-              <a:t>Functions</a:t>
-            </a:r>
-          </a:p>
-        </p:txBody>
-      </p:sp>
-      <p:sp>
-        <p:nvSpPr>
-          <p:cNvPr id="18" name="TextBox 17"/>
-          <p:cNvSpPr txBox="1"/>
-          <p:nvPr/>
-        </p:nvSpPr>
-        <p:spPr>
-          <a:xfrm>
-            <a:off x="7818120" y="3931920"/>
-            <a:ext cx="3657600" cy="365760"/>
-          </a:xfrm>
-          <a:prstGeom prst="rect">
-            <a:avLst/>
-          </a:prstGeom>
-          <a:noFill/>
-        </p:spPr>
-        <p:txBody>
-          <a:bodyPr wrap="square" anchor="t"/>
-          <a:lstStyle/>
-          <a:p>
-            <a:pPr algn="l"/>
-            <a:r>
-              <a:rPr sz="1100" b="0" i="0">
-                <a:solidFill>
-                  <a:srgbClr val="FFFFFF"/>
-                </a:solidFill>
-                <a:latin typeface="Segoe UI"/>
-              </a:rPr>
-              <a:t>AI &amp; engineering · coaching &amp; mentor network · placement · employer partnerships</a:t>
-            </a:r>
-          </a:p>
-        </p:txBody>
-      </p:sp>
-      <p:sp>
-        <p:nvSpPr>
-          <p:cNvPr id="19" name="Rounded Rectangle 18"/>
-          <p:cNvSpPr/>
-          <p:nvPr/>
-        </p:nvSpPr>
-        <p:spPr>
-          <a:xfrm>
-            <a:off x="502920" y="4572000"/>
-            <a:ext cx="11201400" cy="1234440"/>
+            <a:off x="4343400" y="1170432"/>
+            <a:ext cx="3657600" cy="2148840"/>
           </a:xfrm>
           <a:prstGeom prst="roundRect">
             <a:avLst>
@@ -10831,91 +10361,1103 @@
       </p:sp>
       <p:sp>
         <p:nvSpPr>
+          <p:cNvPr id="12" name="Rectangle 11"/>
+          <p:cNvSpPr/>
+          <p:nvPr/>
+        </p:nvSpPr>
+        <p:spPr>
+          <a:xfrm>
+            <a:off x="4343400" y="1170432"/>
+            <a:ext cx="73152" cy="2148840"/>
+          </a:xfrm>
+          <a:prstGeom prst="rect">
+            <a:avLst/>
+          </a:prstGeom>
+          <a:solidFill>
+            <a:srgbClr val="2F5D8A"/>
+          </a:solidFill>
+          <a:ln>
+            <a:noFill/>
+          </a:ln>
+        </p:spPr>
+        <p:style>
+          <a:lnRef idx="1">
+            <a:schemeClr val="accent1"/>
+          </a:lnRef>
+          <a:fillRef idx="3">
+            <a:schemeClr val="accent1"/>
+          </a:fillRef>
+          <a:effectRef idx="2">
+            <a:schemeClr val="accent1"/>
+          </a:effectRef>
+          <a:fontRef idx="minor">
+            <a:schemeClr val="lt1"/>
+          </a:fontRef>
+        </p:style>
+        <p:txBody>
+          <a:bodyPr rtlCol="0" anchor="ctr"/>
+          <a:lstStyle/>
+          <a:p>
+            <a:pPr algn="ctr"/>
+          </a:p>
+        </p:txBody>
+      </p:sp>
+      <p:sp>
+        <p:nvSpPr>
+          <p:cNvPr id="13" name="TextBox 12"/>
+          <p:cNvSpPr txBox="1"/>
+          <p:nvPr/>
+        </p:nvSpPr>
+        <p:spPr>
+          <a:xfrm>
+            <a:off x="4544568" y="1298448"/>
+            <a:ext cx="3337560" cy="320040"/>
+          </a:xfrm>
+          <a:prstGeom prst="rect">
+            <a:avLst/>
+          </a:prstGeom>
+          <a:noFill/>
+        </p:spPr>
+        <p:txBody>
+          <a:bodyPr wrap="square" anchor="t"/>
+          <a:lstStyle/>
+          <a:p>
+            <a:pPr algn="l"/>
+            <a:r>
+              <a:rPr sz="1500" b="1" i="0">
+                <a:solidFill>
+                  <a:srgbClr val="0B1F33"/>
+                </a:solidFill>
+                <a:latin typeface="Georgia"/>
+              </a:rPr>
+              <a:t>Stephanie Li</a:t>
+            </a:r>
+          </a:p>
+        </p:txBody>
+      </p:sp>
+      <p:sp>
+        <p:nvSpPr>
+          <p:cNvPr id="14" name="TextBox 13"/>
+          <p:cNvSpPr txBox="1"/>
+          <p:nvPr/>
+        </p:nvSpPr>
+        <p:spPr>
+          <a:xfrm>
+            <a:off x="4544568" y="1609344"/>
+            <a:ext cx="3337560" cy="256032"/>
+          </a:xfrm>
+          <a:prstGeom prst="rect">
+            <a:avLst/>
+          </a:prstGeom>
+          <a:noFill/>
+        </p:spPr>
+        <p:txBody>
+          <a:bodyPr wrap="square" anchor="t"/>
+          <a:lstStyle/>
+          <a:p>
+            <a:pPr algn="l"/>
+            <a:r>
+              <a:rPr sz="1000" b="1" i="0">
+                <a:solidFill>
+                  <a:srgbClr val="0A6B63"/>
+                </a:solidFill>
+                <a:latin typeface="Segoe UI"/>
+              </a:rPr>
+              <a:t>CO-FOUNDER &amp; CFO</a:t>
+            </a:r>
+          </a:p>
+        </p:txBody>
+      </p:sp>
+      <p:sp>
+        <p:nvSpPr>
+          <p:cNvPr id="15" name="TextBox 14"/>
+          <p:cNvSpPr txBox="1"/>
+          <p:nvPr/>
+        </p:nvSpPr>
+        <p:spPr>
+          <a:xfrm>
+            <a:off x="4544568" y="1947672"/>
+            <a:ext cx="3310128" cy="594360"/>
+          </a:xfrm>
+          <a:prstGeom prst="rect">
+            <a:avLst/>
+          </a:prstGeom>
+          <a:noFill/>
+        </p:spPr>
+        <p:txBody>
+          <a:bodyPr wrap="square" anchor="t"/>
+          <a:lstStyle/>
+          <a:p>
+            <a:pPr algn="l"/>
+            <a:r>
+              <a:rPr sz="1000" b="0" i="0">
+                <a:solidFill>
+                  <a:srgbClr val="2C3A4B"/>
+                </a:solidFill>
+                <a:latin typeface="Segoe UI"/>
+              </a:rPr>
+              <a:t>▸  Co-Founder since 2016; U.S. CPA — M.S. Accounting (Pace); B.A. Accounting (Dongbei University of Finance and Economics)</a:t>
+            </a:r>
+          </a:p>
+        </p:txBody>
+      </p:sp>
+      <p:sp>
+        <p:nvSpPr>
+          <p:cNvPr id="16" name="TextBox 15"/>
+          <p:cNvSpPr txBox="1"/>
+          <p:nvPr/>
+        </p:nvSpPr>
+        <p:spPr>
+          <a:xfrm>
+            <a:off x="4544568" y="2569464"/>
+            <a:ext cx="3310128" cy="594360"/>
+          </a:xfrm>
+          <a:prstGeom prst="rect">
+            <a:avLst/>
+          </a:prstGeom>
+          <a:noFill/>
+        </p:spPr>
+        <p:txBody>
+          <a:bodyPr wrap="square" anchor="t"/>
+          <a:lstStyle/>
+          <a:p>
+            <a:pPr algn="l"/>
+            <a:r>
+              <a:rPr sz="1000" b="0" i="0">
+                <a:solidFill>
+                  <a:srgbClr val="2C3A4B"/>
+                </a:solidFill>
+                <a:latin typeface="Segoe UI"/>
+              </a:rPr>
+              <a:t>▸  Oversees financial strategy, corporate governance, and sustainable growth; prior senior finance leadership in U.S. industry</a:t>
+            </a:r>
+          </a:p>
+        </p:txBody>
+      </p:sp>
+      <p:sp>
+        <p:nvSpPr>
+          <p:cNvPr id="17" name="Rounded Rectangle 16"/>
+          <p:cNvSpPr/>
+          <p:nvPr/>
+        </p:nvSpPr>
+        <p:spPr>
+          <a:xfrm>
+            <a:off x="8183880" y="1170432"/>
+            <a:ext cx="3657600" cy="2148840"/>
+          </a:xfrm>
+          <a:prstGeom prst="roundRect">
+            <a:avLst>
+              <a:gd name="adj" fmla="val 8000"/>
+            </a:avLst>
+          </a:prstGeom>
+          <a:solidFill>
+            <a:srgbClr val="FFFFFF"/>
+          </a:solidFill>
+          <a:ln w="12700">
+            <a:solidFill>
+              <a:srgbClr val="D4DEE8"/>
+            </a:solidFill>
+          </a:ln>
+        </p:spPr>
+        <p:style>
+          <a:lnRef idx="1">
+            <a:schemeClr val="accent1"/>
+          </a:lnRef>
+          <a:fillRef idx="3">
+            <a:schemeClr val="accent1"/>
+          </a:fillRef>
+          <a:effectRef idx="2">
+            <a:schemeClr val="accent1"/>
+          </a:effectRef>
+          <a:fontRef idx="minor">
+            <a:schemeClr val="lt1"/>
+          </a:fontRef>
+        </p:style>
+        <p:txBody>
+          <a:bodyPr rtlCol="0" anchor="ctr"/>
+          <a:lstStyle/>
+          <a:p>
+            <a:pPr algn="ctr"/>
+          </a:p>
+        </p:txBody>
+      </p:sp>
+      <p:sp>
+        <p:nvSpPr>
+          <p:cNvPr id="18" name="Rectangle 17"/>
+          <p:cNvSpPr/>
+          <p:nvPr/>
+        </p:nvSpPr>
+        <p:spPr>
+          <a:xfrm>
+            <a:off x="8183880" y="1170432"/>
+            <a:ext cx="73152" cy="2148840"/>
+          </a:xfrm>
+          <a:prstGeom prst="rect">
+            <a:avLst/>
+          </a:prstGeom>
+          <a:solidFill>
+            <a:srgbClr val="8A6D3B"/>
+          </a:solidFill>
+          <a:ln>
+            <a:noFill/>
+          </a:ln>
+        </p:spPr>
+        <p:style>
+          <a:lnRef idx="1">
+            <a:schemeClr val="accent1"/>
+          </a:lnRef>
+          <a:fillRef idx="3">
+            <a:schemeClr val="accent1"/>
+          </a:fillRef>
+          <a:effectRef idx="2">
+            <a:schemeClr val="accent1"/>
+          </a:effectRef>
+          <a:fontRef idx="minor">
+            <a:schemeClr val="lt1"/>
+          </a:fontRef>
+        </p:style>
+        <p:txBody>
+          <a:bodyPr rtlCol="0" anchor="ctr"/>
+          <a:lstStyle/>
+          <a:p>
+            <a:pPr algn="ctr"/>
+          </a:p>
+        </p:txBody>
+      </p:sp>
+      <p:sp>
+        <p:nvSpPr>
+          <p:cNvPr id="19" name="TextBox 18"/>
+          <p:cNvSpPr txBox="1"/>
+          <p:nvPr/>
+        </p:nvSpPr>
+        <p:spPr>
+          <a:xfrm>
+            <a:off x="8385048" y="1298448"/>
+            <a:ext cx="3337560" cy="320040"/>
+          </a:xfrm>
+          <a:prstGeom prst="rect">
+            <a:avLst/>
+          </a:prstGeom>
+          <a:noFill/>
+        </p:spPr>
+        <p:txBody>
+          <a:bodyPr wrap="square" anchor="t"/>
+          <a:lstStyle/>
+          <a:p>
+            <a:pPr algn="l"/>
+            <a:r>
+              <a:rPr sz="1500" b="1" i="0">
+                <a:solidFill>
+                  <a:srgbClr val="0B1F33"/>
+                </a:solidFill>
+                <a:latin typeface="Georgia"/>
+              </a:rPr>
+              <a:t>Gavin Ding</a:t>
+            </a:r>
+          </a:p>
+        </p:txBody>
+      </p:sp>
+      <p:sp>
+        <p:nvSpPr>
           <p:cNvPr id="20" name="TextBox 19"/>
           <p:cNvSpPr txBox="1"/>
           <p:nvPr/>
         </p:nvSpPr>
         <p:spPr>
           <a:xfrm>
-            <a:off x="685800" y="4663440"/>
-            <a:ext cx="3657600" cy="256032"/>
-          </a:xfrm>
-          <a:prstGeom prst="rect">
-            <a:avLst/>
-          </a:prstGeom>
-          <a:noFill/>
-        </p:spPr>
-        <p:txBody>
-          <a:bodyPr wrap="square" anchor="t"/>
-          <a:lstStyle/>
-          <a:p>
-            <a:pPr algn="l"/>
-            <a:r>
-              <a:rPr sz="1100" b="1" i="0">
+            <a:off x="8385048" y="1609344"/>
+            <a:ext cx="3337560" cy="256032"/>
+          </a:xfrm>
+          <a:prstGeom prst="rect">
+            <a:avLst/>
+          </a:prstGeom>
+          <a:noFill/>
+        </p:spPr>
+        <p:txBody>
+          <a:bodyPr wrap="square" anchor="t"/>
+          <a:lstStyle/>
+          <a:p>
+            <a:pPr algn="l"/>
+            <a:r>
+              <a:rPr sz="1000" b="1" i="0">
+                <a:solidFill>
+                  <a:srgbClr val="0A6B63"/>
+                </a:solidFill>
+                <a:latin typeface="Segoe UI"/>
+              </a:rPr>
+              <a:t>CO-FOUNDER, CTO &amp; COO</a:t>
+            </a:r>
+          </a:p>
+        </p:txBody>
+      </p:sp>
+      <p:sp>
+        <p:nvSpPr>
+          <p:cNvPr id="21" name="TextBox 20"/>
+          <p:cNvSpPr txBox="1"/>
+          <p:nvPr/>
+        </p:nvSpPr>
+        <p:spPr>
+          <a:xfrm>
+            <a:off x="8385048" y="1947672"/>
+            <a:ext cx="3310128" cy="594360"/>
+          </a:xfrm>
+          <a:prstGeom prst="rect">
+            <a:avLst/>
+          </a:prstGeom>
+          <a:noFill/>
+        </p:spPr>
+        <p:txBody>
+          <a:bodyPr wrap="square" anchor="t"/>
+          <a:lstStyle/>
+          <a:p>
+            <a:pPr algn="l"/>
+            <a:r>
+              <a:rPr sz="1000" b="0" i="0">
+                <a:solidFill>
+                  <a:srgbClr val="2C3A4B"/>
+                </a:solidFill>
+                <a:latin typeface="Segoe UI"/>
+              </a:rPr>
+              <a:t>▸  Serial entrepreneur (10+ yrs) across SaaS, AI, and digital business; B.S. Computer Science, ECUST</a:t>
+            </a:r>
+          </a:p>
+        </p:txBody>
+      </p:sp>
+      <p:sp>
+        <p:nvSpPr>
+          <p:cNvPr id="22" name="TextBox 21"/>
+          <p:cNvSpPr txBox="1"/>
+          <p:nvPr/>
+        </p:nvSpPr>
+        <p:spPr>
+          <a:xfrm>
+            <a:off x="8385048" y="2569464"/>
+            <a:ext cx="3310128" cy="594360"/>
+          </a:xfrm>
+          <a:prstGeom prst="rect">
+            <a:avLst/>
+          </a:prstGeom>
+          <a:noFill/>
+        </p:spPr>
+        <p:txBody>
+          <a:bodyPr wrap="square" anchor="t"/>
+          <a:lstStyle/>
+          <a:p>
+            <a:pPr algn="l"/>
+            <a:r>
+              <a:rPr sz="1000" b="0" i="0">
+                <a:solidFill>
+                  <a:srgbClr val="2C3A4B"/>
+                </a:solidFill>
+                <a:latin typeface="Segoe UI"/>
+              </a:rPr>
+              <a:t>▸  Prior CTO roles (Youpindao, Roubeibei) and multiple co-founded ventures; leads technology, operations, and AI strategy</a:t>
+            </a:r>
+          </a:p>
+        </p:txBody>
+      </p:sp>
+      <p:sp>
+        <p:nvSpPr>
+          <p:cNvPr id="23" name="Rounded Rectangle 22"/>
+          <p:cNvSpPr/>
+          <p:nvPr/>
+        </p:nvSpPr>
+        <p:spPr>
+          <a:xfrm>
+            <a:off x="502920" y="3483864"/>
+            <a:ext cx="3657600" cy="2148840"/>
+          </a:xfrm>
+          <a:prstGeom prst="roundRect">
+            <a:avLst>
+              <a:gd name="adj" fmla="val 8000"/>
+            </a:avLst>
+          </a:prstGeom>
+          <a:solidFill>
+            <a:srgbClr val="FFFFFF"/>
+          </a:solidFill>
+          <a:ln w="12700">
+            <a:solidFill>
+              <a:srgbClr val="D4DEE8"/>
+            </a:solidFill>
+          </a:ln>
+        </p:spPr>
+        <p:style>
+          <a:lnRef idx="1">
+            <a:schemeClr val="accent1"/>
+          </a:lnRef>
+          <a:fillRef idx="3">
+            <a:schemeClr val="accent1"/>
+          </a:fillRef>
+          <a:effectRef idx="2">
+            <a:schemeClr val="accent1"/>
+          </a:effectRef>
+          <a:fontRef idx="minor">
+            <a:schemeClr val="lt1"/>
+          </a:fontRef>
+        </p:style>
+        <p:txBody>
+          <a:bodyPr rtlCol="0" anchor="ctr"/>
+          <a:lstStyle/>
+          <a:p>
+            <a:pPr algn="ctr"/>
+          </a:p>
+        </p:txBody>
+      </p:sp>
+      <p:sp>
+        <p:nvSpPr>
+          <p:cNvPr id="24" name="Rectangle 23"/>
+          <p:cNvSpPr/>
+          <p:nvPr/>
+        </p:nvSpPr>
+        <p:spPr>
+          <a:xfrm>
+            <a:off x="502920" y="3483864"/>
+            <a:ext cx="73152" cy="2148840"/>
+          </a:xfrm>
+          <a:prstGeom prst="rect">
+            <a:avLst/>
+          </a:prstGeom>
+          <a:solidFill>
+            <a:srgbClr val="0A6B63"/>
+          </a:solidFill>
+          <a:ln>
+            <a:noFill/>
+          </a:ln>
+        </p:spPr>
+        <p:style>
+          <a:lnRef idx="1">
+            <a:schemeClr val="accent1"/>
+          </a:lnRef>
+          <a:fillRef idx="3">
+            <a:schemeClr val="accent1"/>
+          </a:fillRef>
+          <a:effectRef idx="2">
+            <a:schemeClr val="accent1"/>
+          </a:effectRef>
+          <a:fontRef idx="minor">
+            <a:schemeClr val="lt1"/>
+          </a:fontRef>
+        </p:style>
+        <p:txBody>
+          <a:bodyPr rtlCol="0" anchor="ctr"/>
+          <a:lstStyle/>
+          <a:p>
+            <a:pPr algn="ctr"/>
+          </a:p>
+        </p:txBody>
+      </p:sp>
+      <p:sp>
+        <p:nvSpPr>
+          <p:cNvPr id="25" name="TextBox 24"/>
+          <p:cNvSpPr txBox="1"/>
+          <p:nvPr/>
+        </p:nvSpPr>
+        <p:spPr>
+          <a:xfrm>
+            <a:off x="704088" y="3611880"/>
+            <a:ext cx="3337560" cy="320040"/>
+          </a:xfrm>
+          <a:prstGeom prst="rect">
+            <a:avLst/>
+          </a:prstGeom>
+          <a:noFill/>
+        </p:spPr>
+        <p:txBody>
+          <a:bodyPr wrap="square" anchor="t"/>
+          <a:lstStyle/>
+          <a:p>
+            <a:pPr algn="l"/>
+            <a:r>
+              <a:rPr sz="1500" b="1" i="0">
                 <a:solidFill>
                   <a:srgbClr val="0B1F33"/>
                 </a:solidFill>
-                <a:latin typeface="Segoe UI"/>
-              </a:rPr>
-              <a:t>Illustrative hub presence</a:t>
-            </a:r>
-          </a:p>
-        </p:txBody>
-      </p:sp>
-      <p:graphicFrame>
-        <p:nvGraphicFramePr>
-          <p:cNvPr id="21" name="Chart 20"/>
-          <p:cNvGraphicFramePr>
-            <a:graphicFrameLocks noGrp="1"/>
-          </p:cNvGraphicFramePr>
-          <p:nvPr/>
-        </p:nvGraphicFramePr>
-        <p:xfrm>
-          <a:off x="4114800" y="4572000"/>
-          <a:ext cx="7406640" cy="1188720"/>
-        </p:xfrm>
-        <a:graphic>
-          <a:graphicData uri="http://schemas.openxmlformats.org/drawingml/2006/chart">
-            <c:chart xmlns:c="http://schemas.openxmlformats.org/drawingml/2006/chart" r:id="rId2"/>
-          </a:graphicData>
-        </a:graphic>
-      </p:graphicFrame>
-      <p:sp>
-        <p:nvSpPr>
-          <p:cNvPr id="22" name="TextBox 21"/>
-          <p:cNvSpPr txBox="1"/>
-          <p:nvPr/>
-        </p:nvSpPr>
-        <p:spPr>
-          <a:xfrm>
-            <a:off x="502920" y="5852160"/>
-            <a:ext cx="10972800" cy="228600"/>
-          </a:xfrm>
-          <a:prstGeom prst="rect">
-            <a:avLst/>
-          </a:prstGeom>
-          <a:noFill/>
-        </p:spPr>
-        <p:txBody>
-          <a:bodyPr wrap="square" anchor="t"/>
-          <a:lstStyle/>
-          <a:p>
-            <a:pPr algn="l"/>
-            <a:r>
-              <a:rPr sz="800" b="0" i="0">
+                <a:latin typeface="Georgia"/>
+              </a:rPr>
+              <a:t>Robin Zhu</a:t>
+            </a:r>
+          </a:p>
+        </p:txBody>
+      </p:sp>
+      <p:sp>
+        <p:nvSpPr>
+          <p:cNvPr id="26" name="TextBox 25"/>
+          <p:cNvSpPr txBox="1"/>
+          <p:nvPr/>
+        </p:nvSpPr>
+        <p:spPr>
+          <a:xfrm>
+            <a:off x="704088" y="3922776"/>
+            <a:ext cx="3337560" cy="256032"/>
+          </a:xfrm>
+          <a:prstGeom prst="rect">
+            <a:avLst/>
+          </a:prstGeom>
+          <a:noFill/>
+        </p:spPr>
+        <p:txBody>
+          <a:bodyPr wrap="square" anchor="t"/>
+          <a:lstStyle/>
+          <a:p>
+            <a:pPr algn="l"/>
+            <a:r>
+              <a:rPr sz="1000" b="1" i="0">
+                <a:solidFill>
+                  <a:srgbClr val="0A6B63"/>
+                </a:solidFill>
+                <a:latin typeface="Segoe UI"/>
+              </a:rPr>
+              <a:t>HEAD OF PRODUCT</a:t>
+            </a:r>
+          </a:p>
+        </p:txBody>
+      </p:sp>
+      <p:sp>
+        <p:nvSpPr>
+          <p:cNvPr id="27" name="TextBox 26"/>
+          <p:cNvSpPr txBox="1"/>
+          <p:nvPr/>
+        </p:nvSpPr>
+        <p:spPr>
+          <a:xfrm>
+            <a:off x="704088" y="4261104"/>
+            <a:ext cx="3310128" cy="594360"/>
+          </a:xfrm>
+          <a:prstGeom prst="rect">
+            <a:avLst/>
+          </a:prstGeom>
+          <a:noFill/>
+        </p:spPr>
+        <p:txBody>
+          <a:bodyPr wrap="square" anchor="t"/>
+          <a:lstStyle/>
+          <a:p>
+            <a:pPr algn="l"/>
+            <a:r>
+              <a:rPr sz="1000" b="0" i="0">
+                <a:solidFill>
+                  <a:srgbClr val="2C3A4B"/>
+                </a:solidFill>
+                <a:latin typeface="Segoe UI"/>
+              </a:rPr>
+              <a:t>▸  Leads product strategy, architecture, and development of the AI-powered platform</a:t>
+            </a:r>
+          </a:p>
+        </p:txBody>
+      </p:sp>
+      <p:sp>
+        <p:nvSpPr>
+          <p:cNvPr id="28" name="TextBox 27"/>
+          <p:cNvSpPr txBox="1"/>
+          <p:nvPr/>
+        </p:nvSpPr>
+        <p:spPr>
+          <a:xfrm>
+            <a:off x="704088" y="4882896"/>
+            <a:ext cx="3310128" cy="594360"/>
+          </a:xfrm>
+          <a:prstGeom prst="rect">
+            <a:avLst/>
+          </a:prstGeom>
+          <a:noFill/>
+        </p:spPr>
+        <p:txBody>
+          <a:bodyPr wrap="square" anchor="t"/>
+          <a:lstStyle/>
+          <a:p>
+            <a:pPr algn="l"/>
+            <a:r>
+              <a:rPr sz="1000" b="0" i="0">
+                <a:solidFill>
+                  <a:srgbClr val="2C3A4B"/>
+                </a:solidFill>
+                <a:latin typeface="Segoe UI"/>
+              </a:rPr>
+              <a:t>▸  Former CTO &amp; Director of Product, Ci Finance; senior product/tech roles at CPIC, Allinpay, Noah Holdings, and Tianrang Intelligence</a:t>
+            </a:r>
+          </a:p>
+        </p:txBody>
+      </p:sp>
+      <p:sp>
+        <p:nvSpPr>
+          <p:cNvPr id="29" name="Rounded Rectangle 28"/>
+          <p:cNvSpPr/>
+          <p:nvPr/>
+        </p:nvSpPr>
+        <p:spPr>
+          <a:xfrm>
+            <a:off x="4343400" y="3483864"/>
+            <a:ext cx="3657600" cy="2148840"/>
+          </a:xfrm>
+          <a:prstGeom prst="roundRect">
+            <a:avLst>
+              <a:gd name="adj" fmla="val 8000"/>
+            </a:avLst>
+          </a:prstGeom>
+          <a:solidFill>
+            <a:srgbClr val="FFFFFF"/>
+          </a:solidFill>
+          <a:ln w="12700">
+            <a:solidFill>
+              <a:srgbClr val="D4DEE8"/>
+            </a:solidFill>
+          </a:ln>
+        </p:spPr>
+        <p:style>
+          <a:lnRef idx="1">
+            <a:schemeClr val="accent1"/>
+          </a:lnRef>
+          <a:fillRef idx="3">
+            <a:schemeClr val="accent1"/>
+          </a:fillRef>
+          <a:effectRef idx="2">
+            <a:schemeClr val="accent1"/>
+          </a:effectRef>
+          <a:fontRef idx="minor">
+            <a:schemeClr val="lt1"/>
+          </a:fontRef>
+        </p:style>
+        <p:txBody>
+          <a:bodyPr rtlCol="0" anchor="ctr"/>
+          <a:lstStyle/>
+          <a:p>
+            <a:pPr algn="ctr"/>
+          </a:p>
+        </p:txBody>
+      </p:sp>
+      <p:sp>
+        <p:nvSpPr>
+          <p:cNvPr id="30" name="Rectangle 29"/>
+          <p:cNvSpPr/>
+          <p:nvPr/>
+        </p:nvSpPr>
+        <p:spPr>
+          <a:xfrm>
+            <a:off x="4343400" y="3483864"/>
+            <a:ext cx="73152" cy="2148840"/>
+          </a:xfrm>
+          <a:prstGeom prst="rect">
+            <a:avLst/>
+          </a:prstGeom>
+          <a:solidFill>
+            <a:srgbClr val="2F5D8A"/>
+          </a:solidFill>
+          <a:ln>
+            <a:noFill/>
+          </a:ln>
+        </p:spPr>
+        <p:style>
+          <a:lnRef idx="1">
+            <a:schemeClr val="accent1"/>
+          </a:lnRef>
+          <a:fillRef idx="3">
+            <a:schemeClr val="accent1"/>
+          </a:fillRef>
+          <a:effectRef idx="2">
+            <a:schemeClr val="accent1"/>
+          </a:effectRef>
+          <a:fontRef idx="minor">
+            <a:schemeClr val="lt1"/>
+          </a:fontRef>
+        </p:style>
+        <p:txBody>
+          <a:bodyPr rtlCol="0" anchor="ctr"/>
+          <a:lstStyle/>
+          <a:p>
+            <a:pPr algn="ctr"/>
+          </a:p>
+        </p:txBody>
+      </p:sp>
+      <p:sp>
+        <p:nvSpPr>
+          <p:cNvPr id="31" name="TextBox 30"/>
+          <p:cNvSpPr txBox="1"/>
+          <p:nvPr/>
+        </p:nvSpPr>
+        <p:spPr>
+          <a:xfrm>
+            <a:off x="4544568" y="3611880"/>
+            <a:ext cx="3337560" cy="320040"/>
+          </a:xfrm>
+          <a:prstGeom prst="rect">
+            <a:avLst/>
+          </a:prstGeom>
+          <a:noFill/>
+        </p:spPr>
+        <p:txBody>
+          <a:bodyPr wrap="square" anchor="t"/>
+          <a:lstStyle/>
+          <a:p>
+            <a:pPr algn="l"/>
+            <a:r>
+              <a:rPr sz="1500" b="1" i="0">
+                <a:solidFill>
+                  <a:srgbClr val="0B1F33"/>
+                </a:solidFill>
+                <a:latin typeface="Georgia"/>
+              </a:rPr>
+              <a:t>Chris Lin</a:t>
+            </a:r>
+          </a:p>
+        </p:txBody>
+      </p:sp>
+      <p:sp>
+        <p:nvSpPr>
+          <p:cNvPr id="32" name="TextBox 31"/>
+          <p:cNvSpPr txBox="1"/>
+          <p:nvPr/>
+        </p:nvSpPr>
+        <p:spPr>
+          <a:xfrm>
+            <a:off x="4544568" y="3922776"/>
+            <a:ext cx="3337560" cy="256032"/>
+          </a:xfrm>
+          <a:prstGeom prst="rect">
+            <a:avLst/>
+          </a:prstGeom>
+          <a:noFill/>
+        </p:spPr>
+        <p:txBody>
+          <a:bodyPr wrap="square" anchor="t"/>
+          <a:lstStyle/>
+          <a:p>
+            <a:pPr algn="l"/>
+            <a:r>
+              <a:rPr sz="1000" b="1" i="0">
+                <a:solidFill>
+                  <a:srgbClr val="0A6B63"/>
+                </a:solidFill>
+                <a:latin typeface="Segoe UI"/>
+              </a:rPr>
+              <a:t>NORTH AMERICAN PARTNER</a:t>
+            </a:r>
+          </a:p>
+        </p:txBody>
+      </p:sp>
+      <p:sp>
+        <p:nvSpPr>
+          <p:cNvPr id="33" name="TextBox 32"/>
+          <p:cNvSpPr txBox="1"/>
+          <p:nvPr/>
+        </p:nvSpPr>
+        <p:spPr>
+          <a:xfrm>
+            <a:off x="4544568" y="4261104"/>
+            <a:ext cx="3310128" cy="594360"/>
+          </a:xfrm>
+          <a:prstGeom prst="rect">
+            <a:avLst/>
+          </a:prstGeom>
+          <a:noFill/>
+        </p:spPr>
+        <p:txBody>
+          <a:bodyPr wrap="square" anchor="t"/>
+          <a:lstStyle/>
+          <a:p>
+            <a:pPr algn="l"/>
+            <a:r>
+              <a:rPr sz="1000" b="0" i="0">
+                <a:solidFill>
+                  <a:srgbClr val="2C3A4B"/>
+                </a:solidFill>
+                <a:latin typeface="Segoe UI"/>
+              </a:rPr>
+              <a:t>▸  Full-stack engineer; previously at Amazon Web Services (AWS) on mission-critical systems</a:t>
+            </a:r>
+          </a:p>
+        </p:txBody>
+      </p:sp>
+      <p:sp>
+        <p:nvSpPr>
+          <p:cNvPr id="34" name="TextBox 33"/>
+          <p:cNvSpPr txBox="1"/>
+          <p:nvPr/>
+        </p:nvSpPr>
+        <p:spPr>
+          <a:xfrm>
+            <a:off x="4544568" y="4882896"/>
+            <a:ext cx="3310128" cy="594360"/>
+          </a:xfrm>
+          <a:prstGeom prst="rect">
+            <a:avLst/>
+          </a:prstGeom>
+          <a:noFill/>
+        </p:spPr>
+        <p:txBody>
+          <a:bodyPr wrap="square" anchor="t"/>
+          <a:lstStyle/>
+          <a:p>
+            <a:pPr algn="l"/>
+            <a:r>
+              <a:rPr sz="1000" b="0" i="0">
+                <a:solidFill>
+                  <a:srgbClr val="2C3A4B"/>
+                </a:solidFill>
+                <a:latin typeface="Segoe UI"/>
+              </a:rPr>
+              <a:t>▸  B.S. Mechanical Engineering (Northwestern), M.S. Robotics; extensive hiring-panel experience and career mentorship</a:t>
+            </a:r>
+          </a:p>
+        </p:txBody>
+      </p:sp>
+      <p:sp>
+        <p:nvSpPr>
+          <p:cNvPr id="35" name="Rounded Rectangle 34"/>
+          <p:cNvSpPr/>
+          <p:nvPr/>
+        </p:nvSpPr>
+        <p:spPr>
+          <a:xfrm>
+            <a:off x="8183880" y="3483864"/>
+            <a:ext cx="3657600" cy="2148840"/>
+          </a:xfrm>
+          <a:prstGeom prst="roundRect">
+            <a:avLst>
+              <a:gd name="adj" fmla="val 8000"/>
+            </a:avLst>
+          </a:prstGeom>
+          <a:solidFill>
+            <a:srgbClr val="FFFFFF"/>
+          </a:solidFill>
+          <a:ln w="12700">
+            <a:solidFill>
+              <a:srgbClr val="D4DEE8"/>
+            </a:solidFill>
+          </a:ln>
+        </p:spPr>
+        <p:style>
+          <a:lnRef idx="1">
+            <a:schemeClr val="accent1"/>
+          </a:lnRef>
+          <a:fillRef idx="3">
+            <a:schemeClr val="accent1"/>
+          </a:fillRef>
+          <a:effectRef idx="2">
+            <a:schemeClr val="accent1"/>
+          </a:effectRef>
+          <a:fontRef idx="minor">
+            <a:schemeClr val="lt1"/>
+          </a:fontRef>
+        </p:style>
+        <p:txBody>
+          <a:bodyPr rtlCol="0" anchor="ctr"/>
+          <a:lstStyle/>
+          <a:p>
+            <a:pPr algn="ctr"/>
+          </a:p>
+        </p:txBody>
+      </p:sp>
+      <p:sp>
+        <p:nvSpPr>
+          <p:cNvPr id="36" name="Rectangle 35"/>
+          <p:cNvSpPr/>
+          <p:nvPr/>
+        </p:nvSpPr>
+        <p:spPr>
+          <a:xfrm>
+            <a:off x="8183880" y="3483864"/>
+            <a:ext cx="73152" cy="2148840"/>
+          </a:xfrm>
+          <a:prstGeom prst="rect">
+            <a:avLst/>
+          </a:prstGeom>
+          <a:solidFill>
+            <a:srgbClr val="8A6D3B"/>
+          </a:solidFill>
+          <a:ln>
+            <a:noFill/>
+          </a:ln>
+        </p:spPr>
+        <p:style>
+          <a:lnRef idx="1">
+            <a:schemeClr val="accent1"/>
+          </a:lnRef>
+          <a:fillRef idx="3">
+            <a:schemeClr val="accent1"/>
+          </a:fillRef>
+          <a:effectRef idx="2">
+            <a:schemeClr val="accent1"/>
+          </a:effectRef>
+          <a:fontRef idx="minor">
+            <a:schemeClr val="lt1"/>
+          </a:fontRef>
+        </p:style>
+        <p:txBody>
+          <a:bodyPr rtlCol="0" anchor="ctr"/>
+          <a:lstStyle/>
+          <a:p>
+            <a:pPr algn="ctr"/>
+          </a:p>
+        </p:txBody>
+      </p:sp>
+      <p:sp>
+        <p:nvSpPr>
+          <p:cNvPr id="37" name="TextBox 36"/>
+          <p:cNvSpPr txBox="1"/>
+          <p:nvPr/>
+        </p:nvSpPr>
+        <p:spPr>
+          <a:xfrm>
+            <a:off x="8385048" y="3611880"/>
+            <a:ext cx="3337560" cy="320040"/>
+          </a:xfrm>
+          <a:prstGeom prst="rect">
+            <a:avLst/>
+          </a:prstGeom>
+          <a:noFill/>
+        </p:spPr>
+        <p:txBody>
+          <a:bodyPr wrap="square" anchor="t"/>
+          <a:lstStyle/>
+          <a:p>
+            <a:pPr algn="l"/>
+            <a:r>
+              <a:rPr sz="1500" b="1" i="0">
+                <a:solidFill>
+                  <a:srgbClr val="0B1F33"/>
+                </a:solidFill>
+                <a:latin typeface="Georgia"/>
+              </a:rPr>
+              <a:t>Jon Serbin</a:t>
+            </a:r>
+          </a:p>
+        </p:txBody>
+      </p:sp>
+      <p:sp>
+        <p:nvSpPr>
+          <p:cNvPr id="38" name="TextBox 37"/>
+          <p:cNvSpPr txBox="1"/>
+          <p:nvPr/>
+        </p:nvSpPr>
+        <p:spPr>
+          <a:xfrm>
+            <a:off x="8385048" y="3922776"/>
+            <a:ext cx="3337560" cy="256032"/>
+          </a:xfrm>
+          <a:prstGeom prst="rect">
+            <a:avLst/>
+          </a:prstGeom>
+          <a:noFill/>
+        </p:spPr>
+        <p:txBody>
+          <a:bodyPr wrap="square" anchor="t"/>
+          <a:lstStyle/>
+          <a:p>
+            <a:pPr algn="l"/>
+            <a:r>
+              <a:rPr sz="1000" b="1" i="0">
+                <a:solidFill>
+                  <a:srgbClr val="0A6B63"/>
+                </a:solidFill>
+                <a:latin typeface="Segoe UI"/>
+              </a:rPr>
+              <a:t>SENIOR ADVISOR</a:t>
+            </a:r>
+          </a:p>
+        </p:txBody>
+      </p:sp>
+      <p:sp>
+        <p:nvSpPr>
+          <p:cNvPr id="39" name="TextBox 38"/>
+          <p:cNvSpPr txBox="1"/>
+          <p:nvPr/>
+        </p:nvSpPr>
+        <p:spPr>
+          <a:xfrm>
+            <a:off x="8385048" y="4261104"/>
+            <a:ext cx="3310128" cy="594360"/>
+          </a:xfrm>
+          <a:prstGeom prst="rect">
+            <a:avLst/>
+          </a:prstGeom>
+          <a:noFill/>
+        </p:spPr>
+        <p:txBody>
+          <a:bodyPr wrap="square" anchor="t"/>
+          <a:lstStyle/>
+          <a:p>
+            <a:pPr algn="l"/>
+            <a:r>
+              <a:rPr sz="1000" b="0" i="0">
+                <a:solidFill>
+                  <a:srgbClr val="2C3A4B"/>
+                </a:solidFill>
+                <a:latin typeface="Segoe UI"/>
+              </a:rPr>
+              <a:t>▸  Harvard &amp; MIT; former senior executive at Morgan Stanley; founder of Cedar (Wall Street investment banking)</a:t>
+            </a:r>
+          </a:p>
+        </p:txBody>
+      </p:sp>
+      <p:sp>
+        <p:nvSpPr>
+          <p:cNvPr id="40" name="TextBox 39"/>
+          <p:cNvSpPr txBox="1"/>
+          <p:nvPr/>
+        </p:nvSpPr>
+        <p:spPr>
+          <a:xfrm>
+            <a:off x="8385048" y="4882896"/>
+            <a:ext cx="3310128" cy="594360"/>
+          </a:xfrm>
+          <a:prstGeom prst="rect">
+            <a:avLst/>
+          </a:prstGeom>
+          <a:noFill/>
+        </p:spPr>
+        <p:txBody>
+          <a:bodyPr wrap="square" anchor="t"/>
+          <a:lstStyle/>
+          <a:p>
+            <a:pPr algn="l"/>
+            <a:r>
+              <a:rPr sz="1000" b="0" i="0">
+                <a:solidFill>
+                  <a:srgbClr val="2C3A4B"/>
+                </a:solidFill>
+                <a:latin typeface="Segoe UI"/>
+              </a:rPr>
+              <a:t>▸  40+ years advising tech M&amp;A, capital raising, and listings; advises 51Careers.AI on growth, capital markets, and expansion</a:t>
+            </a:r>
+          </a:p>
+        </p:txBody>
+      </p:sp>
+      <p:sp>
+        <p:nvSpPr>
+          <p:cNvPr id="41" name="TextBox 40"/>
+          <p:cNvSpPr txBox="1"/>
+          <p:nvPr/>
+        </p:nvSpPr>
+        <p:spPr>
+          <a:xfrm>
+            <a:off x="502920" y="5760720"/>
+            <a:ext cx="11155680" cy="274320"/>
+          </a:xfrm>
+          <a:prstGeom prst="rect">
+            <a:avLst/>
+          </a:prstGeom>
+          <a:noFill/>
+        </p:spPr>
+        <p:txBody>
+          <a:bodyPr wrap="square" anchor="t"/>
+          <a:lstStyle/>
+          <a:p>
+            <a:pPr algn="l"/>
+            <a:r>
+              <a:rPr sz="900" b="0" i="0">
                 <a:solidFill>
                   <a:srgbClr val="5E6E80"/>
                 </a:solidFill>
                 <a:latin typeface="Segoe UI"/>
               </a:rPr>
-              <a:t>† Headcount per third-party estimates (2025); to be confirmed in due diligence.</a:t>
-            </a:r>
-          </a:p>
-        </p:txBody>
-      </p:sp>
-      <p:sp>
-        <p:nvSpPr>
-          <p:cNvPr id="23" name="Rectangle 22"/>
+              <a:t>Supported by ≈50 professionals across New York, Shanghai, London, Singapore, Seoul, Toronto, and Delhi. Full biographies available in the data room.</a:t>
+            </a:r>
+          </a:p>
+        </p:txBody>
+      </p:sp>
+      <p:sp>
+        <p:nvSpPr>
+          <p:cNvPr id="42" name="Rectangle 41"/>
           <p:cNvSpPr/>
           <p:nvPr/>
         </p:nvSpPr>
@@ -10958,7 +11500,7 @@
       </p:sp>
       <p:sp>
         <p:nvSpPr>
-          <p:cNvPr id="24" name="Rectangle 23"/>
+          <p:cNvPr id="43" name="Rectangle 42"/>
           <p:cNvSpPr/>
           <p:nvPr/>
         </p:nvSpPr>
@@ -11001,7 +11543,7 @@
       </p:sp>
       <p:sp>
         <p:nvSpPr>
-          <p:cNvPr id="25" name="TextBox 24"/>
+          <p:cNvPr id="44" name="TextBox 43"/>
           <p:cNvSpPr txBox="1"/>
           <p:nvPr/>
         </p:nvSpPr>
@@ -11034,7 +11576,7 @@
       </p:sp>
       <p:sp>
         <p:nvSpPr>
-          <p:cNvPr id="26" name="TextBox 25"/>
+          <p:cNvPr id="45" name="TextBox 44"/>
           <p:cNvSpPr txBox="1"/>
           <p:nvPr/>
         </p:nvSpPr>

--- a/51Careers_AI_Investor_Presentation.pptx
+++ b/51Careers_AI_Investor_Presentation.pptx
@@ -139,7 +139,7 @@
               <c:strCache>
                 <c:ptCount val="1"/>
                 <c:pt idx="0">
-                  <c:v>AI hiring tech</c:v>
+                  <c:v>Global AI hiring &amp; career tech</c:v>
                 </c:pt>
               </c:strCache>
             </c:strRef>
@@ -187,16 +187,16 @@
                   <c:v>18</c:v>
                 </c:pt>
                 <c:pt idx="1">
-                  <c:v>22</c:v>
+                  <c:v>23</c:v>
                 </c:pt>
                 <c:pt idx="2">
-                  <c:v>27</c:v>
+                  <c:v>29</c:v>
                 </c:pt>
                 <c:pt idx="3">
-                  <c:v>33</c:v>
+                  <c:v>37</c:v>
                 </c:pt>
                 <c:pt idx="4">
-                  <c:v>40</c:v>
+                  <c:v>46</c:v>
                 </c:pt>
               </c:numCache>
             </c:numRef>
@@ -321,7 +321,7 @@
               <c:strCache>
                 <c:ptCount val="1"/>
                 <c:pt idx="0">
-                  <c:v>Premium services</c:v>
+                  <c:v>Membership fees</c:v>
                 </c:pt>
               </c:strCache>
             </c:strRef>
@@ -342,7 +342,7 @@
               <c:strCache>
                 <c:ptCount val="3"/>
                 <c:pt idx="0">
-                  <c:v>Today</c:v>
+                  <c:v>Launch</c:v>
                 </c:pt>
                 <c:pt idx="1">
                   <c:v>2027E</c:v>
@@ -360,13 +360,13 @@
                 <c:formatCode>General</c:formatCode>
                 <c:ptCount val="3"/>
                 <c:pt idx="0">
-                  <c:v>70</c:v>
+                  <c:v>0</c:v>
                 </c:pt>
                 <c:pt idx="1">
-                  <c:v>45</c:v>
+                  <c:v>55</c:v>
                 </c:pt>
                 <c:pt idx="2">
-                  <c:v>25</c:v>
+                  <c:v>50</c:v>
                 </c:pt>
               </c:numCache>
             </c:numRef>
@@ -381,7 +381,7 @@
               <c:strCache>
                 <c:ptCount val="1"/>
                 <c:pt idx="0">
-                  <c:v>Consumer platform</c:v>
+                  <c:v>Consulting fees</c:v>
                 </c:pt>
               </c:strCache>
             </c:strRef>
@@ -402,7 +402,7 @@
               <c:strCache>
                 <c:ptCount val="3"/>
                 <c:pt idx="0">
-                  <c:v>Today</c:v>
+                  <c:v>Launch</c:v>
                 </c:pt>
                 <c:pt idx="1">
                   <c:v>2027E</c:v>
@@ -420,13 +420,13 @@
                 <c:formatCode>General</c:formatCode>
                 <c:ptCount val="3"/>
                 <c:pt idx="0">
-                  <c:v>25</c:v>
+                  <c:v>0</c:v>
                 </c:pt>
                 <c:pt idx="1">
-                  <c:v>35</c:v>
+                  <c:v>30</c:v>
                 </c:pt>
                 <c:pt idx="2">
-                  <c:v>40</c:v>
+                  <c:v>30</c:v>
                 </c:pt>
               </c:numCache>
             </c:numRef>
@@ -441,7 +441,7 @@
               <c:strCache>
                 <c:ptCount val="1"/>
                 <c:pt idx="0">
-                  <c:v>Employer SaaS</c:v>
+                  <c:v>Education fees</c:v>
                 </c:pt>
               </c:strCache>
             </c:strRef>
@@ -462,7 +462,7 @@
               <c:strCache>
                 <c:ptCount val="3"/>
                 <c:pt idx="0">
-                  <c:v>Today</c:v>
+                  <c:v>Launch</c:v>
                 </c:pt>
                 <c:pt idx="1">
                   <c:v>2027E</c:v>
@@ -480,13 +480,13 @@
                 <c:formatCode>General</c:formatCode>
                 <c:ptCount val="3"/>
                 <c:pt idx="0">
-                  <c:v>5</c:v>
+                  <c:v>0</c:v>
                 </c:pt>
                 <c:pt idx="1">
-                  <c:v>20</c:v>
+                  <c:v>15</c:v>
                 </c:pt>
                 <c:pt idx="2">
-                  <c:v>35</c:v>
+                  <c:v>20</c:v>
                 </c:pt>
               </c:numCache>
             </c:numRef>
@@ -630,7 +630,7 @@
               <c:strCache>
                 <c:ptCount val="1"/>
                 <c:pt idx="0">
-                  <c:v>Coverage (0–6)</c:v>
+                  <c:v>Career AI depth</c:v>
                 </c:pt>
               </c:strCache>
             </c:strRef>
@@ -654,16 +654,16 @@
                   <c:v>51Careers.AI</c:v>
                 </c:pt>
                 <c:pt idx="1">
-                  <c:v>Job Boards</c:v>
+                  <c:v>ChatGPT / OpenAI</c:v>
                 </c:pt>
                 <c:pt idx="2">
-                  <c:v>Prep Apps</c:v>
+                  <c:v>Google Gemini</c:v>
                 </c:pt>
                 <c:pt idx="3">
-                  <c:v>Coaching Firms</c:v>
+                  <c:v>Claude</c:v>
                 </c:pt>
                 <c:pt idx="4">
-                  <c:v>Staffing Agencies</c:v>
+                  <c:v>Generic prep apps</c:v>
                 </c:pt>
               </c:strCache>
             </c:strRef>
@@ -678,16 +678,16 @@
                   <c:v>6</c:v>
                 </c:pt>
                 <c:pt idx="1">
-                  <c:v>1</c:v>
+                  <c:v>2</c:v>
                 </c:pt>
                 <c:pt idx="2">
                   <c:v>2</c:v>
                 </c:pt>
                 <c:pt idx="3">
-                  <c:v>3</c:v>
+                  <c:v>2</c:v>
                 </c:pt>
                 <c:pt idx="4">
-                  <c:v>2</c:v>
+                  <c:v>3</c:v>
                 </c:pt>
               </c:numCache>
             </c:numRef>
@@ -812,7 +812,7 @@
               <c:strCache>
                 <c:ptCount val="1"/>
                 <c:pt idx="0">
-                  <c:v>Active markets</c:v>
+                  <c:v>Active users (index)</c:v>
                 </c:pt>
               </c:strCache>
             </c:strRef>
@@ -857,19 +857,19 @@
                 <c:formatCode>General</c:formatCode>
                 <c:ptCount val="5"/>
                 <c:pt idx="0">
-                  <c:v>3</c:v>
+                  <c:v>10</c:v>
                 </c:pt>
                 <c:pt idx="1">
-                  <c:v>4</c:v>
+                  <c:v>35</c:v>
                 </c:pt>
                 <c:pt idx="2">
-                  <c:v>8</c:v>
+                  <c:v>80</c:v>
                 </c:pt>
                 <c:pt idx="3">
-                  <c:v>8</c:v>
+                  <c:v>140</c:v>
                 </c:pt>
                 <c:pt idx="4">
-                  <c:v>10</c:v>
+                  <c:v>220</c:v>
                 </c:pt>
               </c:numCache>
             </c:numRef>
@@ -989,7 +989,7 @@
     <c:plotArea>
       <c:barChart>
         <c:barDir val="col"/>
-        <c:grouping val="stacked"/>
+        <c:grouping val="clustered"/>
         <c:ser>
           <c:idx val="0"/>
           <c:order val="0"/>
@@ -999,7 +999,7 @@
               <c:strCache>
                 <c:ptCount val="1"/>
                 <c:pt idx="0">
-                  <c:v>Estimated base</c:v>
+                  <c:v>Platform revenue</c:v>
                 </c:pt>
               </c:strCache>
             </c:strRef>
@@ -1020,7 +1020,7 @@
               <c:strCache>
                 <c:ptCount val="5"/>
                 <c:pt idx="0">
-                  <c:v>2025E</c:v>
+                  <c:v>2025A</c:v>
                 </c:pt>
                 <c:pt idx="1">
                   <c:v>2026E</c:v>
@@ -1044,82 +1044,24 @@
                 <c:formatCode>General</c:formatCode>
                 <c:ptCount val="5"/>
                 <c:pt idx="0">
-                  <c:v>10</c:v>
+                  <c:v>0</c:v>
+                </c:pt>
+                <c:pt idx="1">
+                  <c:v>0.8</c:v>
+                </c:pt>
+                <c:pt idx="2">
+                  <c:v>3.5</c:v>
+                </c:pt>
+                <c:pt idx="3">
+                  <c:v>9.0</c:v>
+                </c:pt>
+                <c:pt idx="4">
+                  <c:v>18.0</c:v>
                 </c:pt>
               </c:numCache>
             </c:numRef>
           </c:val>
         </c:ser>
-        <c:ser>
-          <c:idx val="1"/>
-          <c:order val="1"/>
-          <c:tx>
-            <c:strRef>
-              <c:f>Sheet1!$C$1</c:f>
-              <c:strCache>
-                <c:ptCount val="1"/>
-                <c:pt idx="0">
-                  <c:v>Projected</c:v>
-                </c:pt>
-              </c:strCache>
-            </c:strRef>
-          </c:tx>
-          <c:spPr>
-            <a:solidFill>
-              <a:srgbClr val="2F5D8A"/>
-            </a:solidFill>
-            <a:ln>
-              <a:solidFill>
-                <a:srgbClr val="2F5D8A"/>
-              </a:solidFill>
-            </a:ln>
-          </c:spPr>
-          <c:cat>
-            <c:strRef>
-              <c:f>Sheet1!$A$2:$A$6</c:f>
-              <c:strCache>
-                <c:ptCount val="5"/>
-                <c:pt idx="0">
-                  <c:v>2025E</c:v>
-                </c:pt>
-                <c:pt idx="1">
-                  <c:v>2026E</c:v>
-                </c:pt>
-                <c:pt idx="2">
-                  <c:v>2027E</c:v>
-                </c:pt>
-                <c:pt idx="3">
-                  <c:v>2028E</c:v>
-                </c:pt>
-                <c:pt idx="4">
-                  <c:v>2029E</c:v>
-                </c:pt>
-              </c:strCache>
-            </c:strRef>
-          </c:cat>
-          <c:val>
-            <c:numRef>
-              <c:f>Sheet1!$C$2:$C$6</c:f>
-              <c:numCache>
-                <c:formatCode>General</c:formatCode>
-                <c:ptCount val="5"/>
-                <c:pt idx="1">
-                  <c:v>14.5</c:v>
-                </c:pt>
-                <c:pt idx="2">
-                  <c:v>22.5</c:v>
-                </c:pt>
-                <c:pt idx="3">
-                  <c:v>34</c:v>
-                </c:pt>
-                <c:pt idx="4">
-                  <c:v>52</c:v>
-                </c:pt>
-              </c:numCache>
-            </c:numRef>
-          </c:val>
-        </c:ser>
-        <c:overlap val="100"/>
         <c:axId val="-2068027336"/>
         <c:axId val="-2113994440"/>
       </c:barChart>
@@ -1203,24 +1145,6 @@
         <c:crosses val="autoZero"/>
       </c:valAx>
     </c:plotArea>
-    <c:legend>
-      <c:legendPos val="b"/>
-      <c:overlay val="0"/>
-      <c:txPr>
-        <a:bodyPr/>
-        <a:lstStyle/>
-        <a:p>
-          <a:pPr>
-            <a:defRPr sz="900">
-              <a:solidFill>
-                <a:srgbClr val="5E6E80"/>
-              </a:solidFill>
-              <a:latin typeface="Segoe UI"/>
-            </a:defRPr>
-          </a:pPr>
-        </a:p>
-      </c:txPr>
-    </c:legend>
     <c:dispBlanksAs val="gap"/>
   </c:chart>
   <c:txPr>
@@ -1257,7 +1181,7 @@
               <c:strCache>
                 <c:ptCount val="1"/>
                 <c:pt idx="0">
-                  <c:v>Gross margin</c:v>
+                  <c:v>Paid conversion</c:v>
                 </c:pt>
               </c:strCache>
             </c:strRef>
@@ -1278,7 +1202,7 @@
               <c:strCache>
                 <c:ptCount val="5"/>
                 <c:pt idx="0">
-                  <c:v>2025E</c:v>
+                  <c:v>2025A</c:v>
                 </c:pt>
                 <c:pt idx="1">
                   <c:v>2026E</c:v>
@@ -1302,19 +1226,19 @@
                 <c:formatCode>General</c:formatCode>
                 <c:ptCount val="5"/>
                 <c:pt idx="0">
-                  <c:v>42</c:v>
+                  <c:v>0</c:v>
                 </c:pt>
                 <c:pt idx="1">
-                  <c:v>48</c:v>
+                  <c:v>2</c:v>
                 </c:pt>
                 <c:pt idx="2">
-                  <c:v>55</c:v>
+                  <c:v>5</c:v>
                 </c:pt>
                 <c:pt idx="3">
-                  <c:v>60</c:v>
+                  <c:v>8</c:v>
                 </c:pt>
                 <c:pt idx="4">
-                  <c:v>65</c:v>
+                  <c:v>12</c:v>
                 </c:pt>
               </c:numCache>
             </c:numRef>
@@ -4717,7 +4641,139 @@
         </p:nvSpPr>
         <p:spPr>
           <a:xfrm>
-            <a:off x="640080" y="502920"/>
+            <a:off x="640080" y="457200"/>
+            <a:ext cx="9144000" cy="274320"/>
+          </a:xfrm>
+          <a:prstGeom prst="rect">
+            <a:avLst/>
+          </a:prstGeom>
+          <a:noFill/>
+        </p:spPr>
+        <p:txBody>
+          <a:bodyPr wrap="square" anchor="t"/>
+          <a:lstStyle/>
+          <a:p>
+            <a:pPr algn="l"/>
+            <a:r>
+              <a:rPr sz="1100" b="1" i="0">
+                <a:solidFill>
+                  <a:srgbClr val="D7EBE8"/>
+                </a:solidFill>
+                <a:latin typeface="Segoe UI"/>
+              </a:rPr>
+              <a:t>CONFIDENTIAL INVESTOR PRESENTATION</a:t>
+            </a:r>
+          </a:p>
+        </p:txBody>
+      </p:sp>
+      <p:sp>
+        <p:nvSpPr>
+          <p:cNvPr id="6" name="TextBox 5"/>
+          <p:cNvSpPr txBox="1"/>
+          <p:nvPr/>
+        </p:nvSpPr>
+        <p:spPr>
+          <a:xfrm>
+            <a:off x="640080" y="1051560"/>
+            <a:ext cx="10058400" cy="685800"/>
+          </a:xfrm>
+          <a:prstGeom prst="rect">
+            <a:avLst/>
+          </a:prstGeom>
+          <a:noFill/>
+        </p:spPr>
+        <p:txBody>
+          <a:bodyPr wrap="square" anchor="t"/>
+          <a:lstStyle/>
+          <a:p>
+            <a:pPr algn="l"/>
+            <a:r>
+              <a:rPr sz="4600" b="1" i="0">
+                <a:solidFill>
+                  <a:srgbClr val="FFFFFF"/>
+                </a:solidFill>
+                <a:latin typeface="Georgia"/>
+              </a:rPr>
+              <a:t>51CAREERS.AI</a:t>
+            </a:r>
+          </a:p>
+        </p:txBody>
+      </p:sp>
+      <p:sp>
+        <p:nvSpPr>
+          <p:cNvPr id="7" name="TextBox 6"/>
+          <p:cNvSpPr txBox="1"/>
+          <p:nvPr/>
+        </p:nvSpPr>
+        <p:spPr>
+          <a:xfrm>
+            <a:off x="640080" y="1783080"/>
+            <a:ext cx="10058400" cy="365760"/>
+          </a:xfrm>
+          <a:prstGeom prst="rect">
+            <a:avLst/>
+          </a:prstGeom>
+          <a:noFill/>
+        </p:spPr>
+        <p:txBody>
+          <a:bodyPr wrap="square" anchor="t"/>
+          <a:lstStyle/>
+          <a:p>
+            <a:pPr algn="l"/>
+            <a:r>
+              <a:rPr sz="1800" b="0" i="0">
+                <a:solidFill>
+                  <a:srgbClr val="C5D5E0"/>
+                </a:solidFill>
+                <a:latin typeface="Segoe UI"/>
+              </a:rPr>
+              <a:t>The AI-Powered Global Career Platform</a:t>
+            </a:r>
+          </a:p>
+        </p:txBody>
+      </p:sp>
+      <p:sp>
+        <p:nvSpPr>
+          <p:cNvPr id="8" name="TextBox 7"/>
+          <p:cNvSpPr txBox="1"/>
+          <p:nvPr/>
+        </p:nvSpPr>
+        <p:spPr>
+          <a:xfrm>
+            <a:off x="640080" y="2240280"/>
+            <a:ext cx="10515600" cy="502920"/>
+          </a:xfrm>
+          <a:prstGeom prst="rect">
+            <a:avLst/>
+          </a:prstGeom>
+          <a:noFill/>
+        </p:spPr>
+        <p:txBody>
+          <a:bodyPr wrap="square" anchor="t"/>
+          <a:lstStyle/>
+          <a:p>
+            <a:pPr algn="l"/>
+            <a:r>
+              <a:rPr sz="1300" b="0" i="0">
+                <a:solidFill>
+                  <a:srgbClr val="A8BECC"/>
+                </a:solidFill>
+                <a:latin typeface="Segoe UI"/>
+              </a:rPr>
+              <a:t>Who we are — An AI career platform from the 51 Careers team: mock interviews, a 100K+ question bank, and a new AI résumé builder — free today, built for global professionals.</a:t>
+            </a:r>
+          </a:p>
+        </p:txBody>
+      </p:sp>
+      <p:sp>
+        <p:nvSpPr>
+          <p:cNvPr id="9" name="TextBox 8"/>
+          <p:cNvSpPr txBox="1"/>
+          <p:nvPr/>
+        </p:nvSpPr>
+        <p:spPr>
+          <a:xfrm>
+            <a:off x="640080" y="2880360"/>
             <a:ext cx="7315200" cy="274320"/>
           </a:xfrm>
           <a:prstGeom prst="rect">
@@ -4731,144 +4787,45 @@
           <a:p>
             <a:pPr algn="l"/>
             <a:r>
-              <a:rPr sz="1100" b="1" i="0">
-                <a:solidFill>
-                  <a:srgbClr val="D7EBE8"/>
+              <a:rPr sz="1300" b="1" i="0">
+                <a:solidFill>
+                  <a:srgbClr val="0A6B63"/>
                 </a:solidFill>
                 <a:latin typeface="Segoe UI"/>
               </a:rPr>
-              <a:t>CONFIDENTIAL INVESTOR PRESENTATION</a:t>
-            </a:r>
-          </a:p>
-        </p:txBody>
-      </p:sp>
-      <p:sp>
-        <p:nvSpPr>
-          <p:cNvPr id="6" name="TextBox 5"/>
-          <p:cNvSpPr txBox="1"/>
-          <p:nvPr/>
-        </p:nvSpPr>
-        <p:spPr>
-          <a:xfrm>
-            <a:off x="640080" y="1234440"/>
-            <a:ext cx="9144000" cy="777240"/>
-          </a:xfrm>
-          <a:prstGeom prst="rect">
-            <a:avLst/>
-          </a:prstGeom>
-          <a:noFill/>
-        </p:spPr>
-        <p:txBody>
-          <a:bodyPr wrap="square" anchor="t"/>
-          <a:lstStyle/>
-          <a:p>
-            <a:pPr algn="l"/>
-            <a:r>
-              <a:rPr sz="4800" b="1" i="0">
+              <a:t>Growth Financing</a:t>
+            </a:r>
+          </a:p>
+        </p:txBody>
+      </p:sp>
+      <p:sp>
+        <p:nvSpPr>
+          <p:cNvPr id="10" name="TextBox 9"/>
+          <p:cNvSpPr txBox="1"/>
+          <p:nvPr/>
+        </p:nvSpPr>
+        <p:spPr>
+          <a:xfrm>
+            <a:off x="640080" y="3154680"/>
+            <a:ext cx="8229600" cy="274320"/>
+          </a:xfrm>
+          <a:prstGeom prst="rect">
+            <a:avLst/>
+          </a:prstGeom>
+          <a:noFill/>
+        </p:spPr>
+        <p:txBody>
+          <a:bodyPr wrap="square" anchor="t"/>
+          <a:lstStyle/>
+          <a:p>
+            <a:pPr algn="l"/>
+            <a:r>
+              <a:rPr sz="1400" b="0" i="0">
                 <a:solidFill>
                   <a:srgbClr val="FFFFFF"/>
                 </a:solidFill>
-                <a:latin typeface="Georgia"/>
-              </a:rPr>
-              <a:t>51CAREERS.AI</a:t>
-            </a:r>
-          </a:p>
-        </p:txBody>
-      </p:sp>
-      <p:sp>
-        <p:nvSpPr>
-          <p:cNvPr id="7" name="TextBox 6"/>
-          <p:cNvSpPr txBox="1"/>
-          <p:nvPr/>
-        </p:nvSpPr>
-        <p:spPr>
-          <a:xfrm>
-            <a:off x="640080" y="2011680"/>
-            <a:ext cx="9144000" cy="365760"/>
-          </a:xfrm>
-          <a:prstGeom prst="rect">
-            <a:avLst/>
-          </a:prstGeom>
-          <a:noFill/>
-        </p:spPr>
-        <p:txBody>
-          <a:bodyPr wrap="square" anchor="t"/>
-          <a:lstStyle/>
-          <a:p>
-            <a:pPr algn="l"/>
-            <a:r>
-              <a:rPr sz="1800" b="0" i="0">
-                <a:solidFill>
-                  <a:srgbClr val="C5D5E0"/>
-                </a:solidFill>
                 <a:latin typeface="Segoe UI"/>
               </a:rPr>
-              <a:t>The AI-Powered Global Career Platform</a:t>
-            </a:r>
-          </a:p>
-        </p:txBody>
-      </p:sp>
-      <p:sp>
-        <p:nvSpPr>
-          <p:cNvPr id="8" name="TextBox 7"/>
-          <p:cNvSpPr txBox="1"/>
-          <p:nvPr/>
-        </p:nvSpPr>
-        <p:spPr>
-          <a:xfrm>
-            <a:off x="640080" y="2743200"/>
-            <a:ext cx="7315200" cy="320040"/>
-          </a:xfrm>
-          <a:prstGeom prst="rect">
-            <a:avLst/>
-          </a:prstGeom>
-          <a:noFill/>
-        </p:spPr>
-        <p:txBody>
-          <a:bodyPr wrap="square" anchor="t"/>
-          <a:lstStyle/>
-          <a:p>
-            <a:pPr algn="l"/>
-            <a:r>
-              <a:rPr sz="1400" b="1" i="0">
-                <a:solidFill>
-                  <a:srgbClr val="0A6B63"/>
-                </a:solidFill>
-                <a:latin typeface="Segoe UI"/>
-              </a:rPr>
-              <a:t>Growth Financing</a:t>
-            </a:r>
-          </a:p>
-        </p:txBody>
-      </p:sp>
-      <p:sp>
-        <p:nvSpPr>
-          <p:cNvPr id="9" name="TextBox 8"/>
-          <p:cNvSpPr txBox="1"/>
-          <p:nvPr/>
-        </p:nvSpPr>
-        <p:spPr>
-          <a:xfrm>
-            <a:off x="640080" y="3063240"/>
-            <a:ext cx="8229600" cy="320040"/>
-          </a:xfrm>
-          <a:prstGeom prst="rect">
-            <a:avLst/>
-          </a:prstGeom>
-          <a:noFill/>
-        </p:spPr>
-        <p:txBody>
-          <a:bodyPr wrap="square" anchor="t"/>
-          <a:lstStyle/>
-          <a:p>
-            <a:pPr algn="l"/>
-            <a:r>
-              <a:rPr sz="1400" b="0" i="0">
-                <a:solidFill>
-                  <a:srgbClr val="FFFFFF"/>
-                </a:solidFill>
-                <a:latin typeface="Segoe UI"/>
-              </a:rPr>
               <a:t>US$5.0 Million Private Placement   ·   July 2026</a:t>
             </a:r>
           </a:p>
@@ -4876,14 +4833,14 @@
       </p:sp>
       <p:sp>
         <p:nvSpPr>
-          <p:cNvPr id="10" name="Rounded Rectangle 9"/>
+          <p:cNvPr id="11" name="Rounded Rectangle 10"/>
           <p:cNvSpPr/>
           <p:nvPr/>
         </p:nvSpPr>
         <p:spPr>
           <a:xfrm>
-            <a:off x="640080" y="3840480"/>
-            <a:ext cx="3200400" cy="1234440"/>
+            <a:off x="502920" y="3794760"/>
+            <a:ext cx="2697480" cy="1234440"/>
           </a:xfrm>
           <a:prstGeom prst="roundRect">
             <a:avLst>
@@ -4921,47 +4878,47 @@
       </p:sp>
       <p:sp>
         <p:nvSpPr>
-          <p:cNvPr id="11" name="TextBox 10"/>
-          <p:cNvSpPr txBox="1"/>
-          <p:nvPr/>
-        </p:nvSpPr>
-        <p:spPr>
-          <a:xfrm>
-            <a:off x="868680" y="3977639"/>
-            <a:ext cx="2743200" cy="548640"/>
-          </a:xfrm>
-          <a:prstGeom prst="rect">
-            <a:avLst/>
-          </a:prstGeom>
-          <a:noFill/>
-        </p:spPr>
-        <p:txBody>
-          <a:bodyPr wrap="square" anchor="t"/>
-          <a:lstStyle/>
-          <a:p>
-            <a:pPr algn="l"/>
-            <a:r>
-              <a:rPr sz="3200" b="1" i="0">
+          <p:cNvPr id="12" name="TextBox 11"/>
+          <p:cNvSpPr txBox="1"/>
+          <p:nvPr/>
+        </p:nvSpPr>
+        <p:spPr>
+          <a:xfrm>
+            <a:off x="667512" y="3931920"/>
+            <a:ext cx="2377440" cy="502920"/>
+          </a:xfrm>
+          <a:prstGeom prst="rect">
+            <a:avLst/>
+          </a:prstGeom>
+          <a:noFill/>
+        </p:spPr>
+        <p:txBody>
+          <a:bodyPr wrap="square" anchor="t"/>
+          <a:lstStyle/>
+          <a:p>
+            <a:pPr algn="l"/>
+            <a:r>
+              <a:rPr sz="2600" b="1" i="0">
                 <a:solidFill>
                   <a:srgbClr val="FFFFFF"/>
                 </a:solidFill>
                 <a:latin typeface="Georgia"/>
               </a:rPr>
-              <a:t>2016</a:t>
-            </a:r>
-          </a:p>
-        </p:txBody>
-      </p:sp>
-      <p:sp>
-        <p:nvSpPr>
-          <p:cNvPr id="12" name="TextBox 11"/>
-          <p:cNvSpPr txBox="1"/>
-          <p:nvPr/>
-        </p:nvSpPr>
-        <p:spPr>
-          <a:xfrm>
-            <a:off x="868680" y="4617720"/>
-            <a:ext cx="2743200" cy="320040"/>
+              <a:t>2025</a:t>
+            </a:r>
+          </a:p>
+        </p:txBody>
+      </p:sp>
+      <p:sp>
+        <p:nvSpPr>
+          <p:cNvPr id="13" name="TextBox 12"/>
+          <p:cNvSpPr txBox="1"/>
+          <p:nvPr/>
+        </p:nvSpPr>
+        <p:spPr>
+          <a:xfrm>
+            <a:off x="667512" y="4526280"/>
+            <a:ext cx="2377440" cy="365760"/>
           </a:xfrm>
           <a:prstGeom prst="rect">
             <a:avLst/>
@@ -4980,21 +4937,21 @@
                 </a:solidFill>
                 <a:latin typeface="Segoe UI"/>
               </a:rPr>
-              <a:t>FOUNDED · NEW YORK CITY</a:t>
-            </a:r>
-          </a:p>
-        </p:txBody>
-      </p:sp>
-      <p:sp>
-        <p:nvSpPr>
-          <p:cNvPr id="13" name="Rounded Rectangle 12"/>
+              <a:t>AI PLATFORM LAUNCHED</a:t>
+            </a:r>
+          </a:p>
+        </p:txBody>
+      </p:sp>
+      <p:sp>
+        <p:nvSpPr>
+          <p:cNvPr id="14" name="Rounded Rectangle 13"/>
           <p:cNvSpPr/>
           <p:nvPr/>
         </p:nvSpPr>
         <p:spPr>
           <a:xfrm>
-            <a:off x="4069080" y="3840480"/>
-            <a:ext cx="3200400" cy="1234440"/>
+            <a:off x="3383280" y="3794760"/>
+            <a:ext cx="2697480" cy="1234440"/>
           </a:xfrm>
           <a:prstGeom prst="roundRect">
             <a:avLst>
@@ -5032,47 +4989,47 @@
       </p:sp>
       <p:sp>
         <p:nvSpPr>
-          <p:cNvPr id="14" name="TextBox 13"/>
-          <p:cNvSpPr txBox="1"/>
-          <p:nvPr/>
-        </p:nvSpPr>
-        <p:spPr>
-          <a:xfrm>
-            <a:off x="4297680" y="3977639"/>
-            <a:ext cx="2743200" cy="548640"/>
-          </a:xfrm>
-          <a:prstGeom prst="rect">
-            <a:avLst/>
-          </a:prstGeom>
-          <a:noFill/>
-        </p:spPr>
-        <p:txBody>
-          <a:bodyPr wrap="square" anchor="t"/>
-          <a:lstStyle/>
-          <a:p>
-            <a:pPr algn="l"/>
-            <a:r>
-              <a:rPr sz="3200" b="1" i="0">
+          <p:cNvPr id="15" name="TextBox 14"/>
+          <p:cNvSpPr txBox="1"/>
+          <p:nvPr/>
+        </p:nvSpPr>
+        <p:spPr>
+          <a:xfrm>
+            <a:off x="3547872" y="3931920"/>
+            <a:ext cx="2377440" cy="502920"/>
+          </a:xfrm>
+          <a:prstGeom prst="rect">
+            <a:avLst/>
+          </a:prstGeom>
+          <a:noFill/>
+        </p:spPr>
+        <p:txBody>
+          <a:bodyPr wrap="square" anchor="t"/>
+          <a:lstStyle/>
+          <a:p>
+            <a:pPr algn="l"/>
+            <a:r>
+              <a:rPr sz="2600" b="1" i="0">
                 <a:solidFill>
                   <a:srgbClr val="FFFFFF"/>
                 </a:solidFill>
                 <a:latin typeface="Georgia"/>
               </a:rPr>
-              <a:t>8+</a:t>
-            </a:r>
-          </a:p>
-        </p:txBody>
-      </p:sp>
-      <p:sp>
-        <p:nvSpPr>
-          <p:cNvPr id="15" name="TextBox 14"/>
-          <p:cNvSpPr txBox="1"/>
-          <p:nvPr/>
-        </p:nvSpPr>
-        <p:spPr>
-          <a:xfrm>
-            <a:off x="4297680" y="4617720"/>
-            <a:ext cx="2743200" cy="320040"/>
+              <a:t>10,000+</a:t>
+            </a:r>
+          </a:p>
+        </p:txBody>
+      </p:sp>
+      <p:sp>
+        <p:nvSpPr>
+          <p:cNvPr id="16" name="TextBox 15"/>
+          <p:cNvSpPr txBox="1"/>
+          <p:nvPr/>
+        </p:nvSpPr>
+        <p:spPr>
+          <a:xfrm>
+            <a:off x="3547872" y="4526280"/>
+            <a:ext cx="2377440" cy="365760"/>
           </a:xfrm>
           <a:prstGeom prst="rect">
             <a:avLst/>
@@ -5091,21 +5048,21 @@
                 </a:solidFill>
                 <a:latin typeface="Segoe UI"/>
               </a:rPr>
-              <a:t>COUNTRIES OF OPERATION</a:t>
-            </a:r>
-          </a:p>
-        </p:txBody>
-      </p:sp>
-      <p:sp>
-        <p:nvSpPr>
-          <p:cNvPr id="16" name="Rounded Rectangle 15"/>
+              <a:t>CANDIDATES HELPED · 8 YRS</a:t>
+            </a:r>
+          </a:p>
+        </p:txBody>
+      </p:sp>
+      <p:sp>
+        <p:nvSpPr>
+          <p:cNvPr id="17" name="Rounded Rectangle 16"/>
           <p:cNvSpPr/>
           <p:nvPr/>
         </p:nvSpPr>
         <p:spPr>
           <a:xfrm>
-            <a:off x="7498080" y="3840480"/>
-            <a:ext cx="3200400" cy="1234440"/>
+            <a:off x="6263640" y="3794760"/>
+            <a:ext cx="2697480" cy="1234440"/>
           </a:xfrm>
           <a:prstGeom prst="roundRect">
             <a:avLst>
@@ -5143,47 +5100,47 @@
       </p:sp>
       <p:sp>
         <p:nvSpPr>
-          <p:cNvPr id="17" name="TextBox 16"/>
-          <p:cNvSpPr txBox="1"/>
-          <p:nvPr/>
-        </p:nvSpPr>
-        <p:spPr>
-          <a:xfrm>
-            <a:off x="7726680" y="3977639"/>
-            <a:ext cx="2743200" cy="548640"/>
-          </a:xfrm>
-          <a:prstGeom prst="rect">
-            <a:avLst/>
-          </a:prstGeom>
-          <a:noFill/>
-        </p:spPr>
-        <p:txBody>
-          <a:bodyPr wrap="square" anchor="t"/>
-          <a:lstStyle/>
-          <a:p>
-            <a:pPr algn="l"/>
-            <a:r>
-              <a:rPr sz="3200" b="1" i="0">
+          <p:cNvPr id="18" name="TextBox 17"/>
+          <p:cNvSpPr txBox="1"/>
+          <p:nvPr/>
+        </p:nvSpPr>
+        <p:spPr>
+          <a:xfrm>
+            <a:off x="6428232" y="3931920"/>
+            <a:ext cx="2377440" cy="502920"/>
+          </a:xfrm>
+          <a:prstGeom prst="rect">
+            <a:avLst/>
+          </a:prstGeom>
+          <a:noFill/>
+        </p:spPr>
+        <p:txBody>
+          <a:bodyPr wrap="square" anchor="t"/>
+          <a:lstStyle/>
+          <a:p>
+            <a:pPr algn="l"/>
+            <a:r>
+              <a:rPr sz="2600" b="1" i="0">
                 <a:solidFill>
                   <a:srgbClr val="FFFFFF"/>
                 </a:solidFill>
                 <a:latin typeface="Georgia"/>
               </a:rPr>
-              <a:t>US$10M+</a:t>
-            </a:r>
-          </a:p>
-        </p:txBody>
-      </p:sp>
-      <p:sp>
-        <p:nvSpPr>
-          <p:cNvPr id="18" name="TextBox 17"/>
-          <p:cNvSpPr txBox="1"/>
-          <p:nvPr/>
-        </p:nvSpPr>
-        <p:spPr>
-          <a:xfrm>
-            <a:off x="7726680" y="4617720"/>
-            <a:ext cx="2743200" cy="320040"/>
+              <a:t>100K+</a:t>
+            </a:r>
+          </a:p>
+        </p:txBody>
+      </p:sp>
+      <p:sp>
+        <p:nvSpPr>
+          <p:cNvPr id="19" name="TextBox 18"/>
+          <p:cNvSpPr txBox="1"/>
+          <p:nvPr/>
+        </p:nvSpPr>
+        <p:spPr>
+          <a:xfrm>
+            <a:off x="6428232" y="4526280"/>
+            <a:ext cx="2377440" cy="365760"/>
           </a:xfrm>
           <a:prstGeom prst="rect">
             <a:avLst/>
@@ -5202,47 +5159,158 @@
                 </a:solidFill>
                 <a:latin typeface="Segoe UI"/>
               </a:rPr>
-              <a:t>ANNUAL REVENUE (EST.)†</a:t>
-            </a:r>
-          </a:p>
-        </p:txBody>
-      </p:sp>
-      <p:sp>
-        <p:nvSpPr>
-          <p:cNvPr id="19" name="TextBox 18"/>
-          <p:cNvSpPr txBox="1"/>
-          <p:nvPr/>
-        </p:nvSpPr>
-        <p:spPr>
-          <a:xfrm>
-            <a:off x="640080" y="5257800"/>
-            <a:ext cx="9144000" cy="228600"/>
-          </a:xfrm>
-          <a:prstGeom prst="rect">
-            <a:avLst/>
-          </a:prstGeom>
-          <a:noFill/>
-        </p:spPr>
-        <p:txBody>
-          <a:bodyPr wrap="square" anchor="t"/>
-          <a:lstStyle/>
-          <a:p>
-            <a:pPr algn="l"/>
-            <a:r>
-              <a:rPr sz="800" b="0" i="0">
+              <a:t>MOCK INTERVIEW QUESTIONS</a:t>
+            </a:r>
+          </a:p>
+        </p:txBody>
+      </p:sp>
+      <p:sp>
+        <p:nvSpPr>
+          <p:cNvPr id="20" name="Rounded Rectangle 19"/>
+          <p:cNvSpPr/>
+          <p:nvPr/>
+        </p:nvSpPr>
+        <p:spPr>
+          <a:xfrm>
+            <a:off x="9144000" y="3794760"/>
+            <a:ext cx="2697480" cy="1234440"/>
+          </a:xfrm>
+          <a:prstGeom prst="roundRect">
+            <a:avLst>
+              <a:gd name="adj" fmla="val 8000"/>
+            </a:avLst>
+          </a:prstGeom>
+          <a:solidFill>
+            <a:srgbClr val="122A40"/>
+          </a:solidFill>
+          <a:ln>
+            <a:noFill/>
+          </a:ln>
+        </p:spPr>
+        <p:style>
+          <a:lnRef idx="1">
+            <a:schemeClr val="accent1"/>
+          </a:lnRef>
+          <a:fillRef idx="3">
+            <a:schemeClr val="accent1"/>
+          </a:fillRef>
+          <a:effectRef idx="2">
+            <a:schemeClr val="accent1"/>
+          </a:effectRef>
+          <a:fontRef idx="minor">
+            <a:schemeClr val="lt1"/>
+          </a:fontRef>
+        </p:style>
+        <p:txBody>
+          <a:bodyPr rtlCol="0" anchor="ctr"/>
+          <a:lstStyle/>
+          <a:p>
+            <a:pPr algn="ctr"/>
+          </a:p>
+        </p:txBody>
+      </p:sp>
+      <p:sp>
+        <p:nvSpPr>
+          <p:cNvPr id="21" name="TextBox 20"/>
+          <p:cNvSpPr txBox="1"/>
+          <p:nvPr/>
+        </p:nvSpPr>
+        <p:spPr>
+          <a:xfrm>
+            <a:off x="9308592" y="3931920"/>
+            <a:ext cx="2377440" cy="502920"/>
+          </a:xfrm>
+          <a:prstGeom prst="rect">
+            <a:avLst/>
+          </a:prstGeom>
+          <a:noFill/>
+        </p:spPr>
+        <p:txBody>
+          <a:bodyPr wrap="square" anchor="t"/>
+          <a:lstStyle/>
+          <a:p>
+            <a:pPr algn="l"/>
+            <a:r>
+              <a:rPr sz="2600" b="1" i="0">
+                <a:solidFill>
+                  <a:srgbClr val="FFFFFF"/>
+                </a:solidFill>
+                <a:latin typeface="Georgia"/>
+              </a:rPr>
+              <a:t>US$0</a:t>
+            </a:r>
+          </a:p>
+        </p:txBody>
+      </p:sp>
+      <p:sp>
+        <p:nvSpPr>
+          <p:cNvPr id="22" name="TextBox 21"/>
+          <p:cNvSpPr txBox="1"/>
+          <p:nvPr/>
+        </p:nvSpPr>
+        <p:spPr>
+          <a:xfrm>
+            <a:off x="9308592" y="4526280"/>
+            <a:ext cx="2377440" cy="365760"/>
+          </a:xfrm>
+          <a:prstGeom prst="rect">
+            <a:avLst/>
+          </a:prstGeom>
+          <a:noFill/>
+        </p:spPr>
+        <p:txBody>
+          <a:bodyPr wrap="square" anchor="t"/>
+          <a:lstStyle/>
+          <a:p>
+            <a:pPr algn="l"/>
+            <a:r>
+              <a:rPr sz="900" b="1" i="0">
+                <a:solidFill>
+                  <a:srgbClr val="D7EBE8"/>
+                </a:solidFill>
+                <a:latin typeface="Segoe UI"/>
+              </a:rPr>
+              <a:t>PLATFORM REVENUE TODAY</a:t>
+            </a:r>
+          </a:p>
+        </p:txBody>
+      </p:sp>
+      <p:sp>
+        <p:nvSpPr>
+          <p:cNvPr id="23" name="TextBox 22"/>
+          <p:cNvSpPr txBox="1"/>
+          <p:nvPr/>
+        </p:nvSpPr>
+        <p:spPr>
+          <a:xfrm>
+            <a:off x="640080" y="5212080"/>
+            <a:ext cx="10058400" cy="228600"/>
+          </a:xfrm>
+          <a:prstGeom prst="rect">
+            <a:avLst/>
+          </a:prstGeom>
+          <a:noFill/>
+        </p:spPr>
+        <p:txBody>
+          <a:bodyPr wrap="square" anchor="t"/>
+          <a:lstStyle/>
+          <a:p>
+            <a:pPr algn="l"/>
+            <a:r>
+              <a:rPr sz="1100" b="0" i="0">
                 <a:solidFill>
                   <a:srgbClr val="6B7C8F"/>
                 </a:solidFill>
                 <a:latin typeface="Segoe UI"/>
               </a:rPr>
-              <a:t>† Third-party estimates; see p.9</a:t>
-            </a:r>
-          </a:p>
-        </p:txBody>
-      </p:sp>
-      <p:sp>
-        <p:nvSpPr>
-          <p:cNvPr id="20" name="TextBox 19"/>
+              <a:t>Currently free to grow active users · Monetization via membership, consulting &amp; education fees</a:t>
+            </a:r>
+          </a:p>
+        </p:txBody>
+      </p:sp>
+      <p:sp>
+        <p:nvSpPr>
+          <p:cNvPr id="24" name="TextBox 23"/>
           <p:cNvSpPr txBox="1"/>
           <p:nvPr/>
         </p:nvSpPr>
@@ -5403,7 +5471,7 @@
                 </a:solidFill>
                 <a:latin typeface="Georgia"/>
               </a:rPr>
-              <a:t>Differentiated at the Intersection of AI and Outcomes</a:t>
+              <a:t>Purpose-Built Career AI vs. General LLMs</a:t>
             </a:r>
           </a:p>
         </p:txBody>
@@ -5417,7 +5485,7 @@
         <p:spPr>
           <a:xfrm>
             <a:off x="502920" y="1188720"/>
-            <a:ext cx="5212080" cy="3291840"/>
+            <a:ext cx="5212080" cy="3246120"/>
           </a:xfrm>
           <a:prstGeom prst="roundRect">
             <a:avLst>
@@ -5483,7 +5551,7 @@
                 </a:solidFill>
                 <a:latin typeface="Segoe UI"/>
               </a:rPr>
-              <a:t>Capability coverage score (illustrative)</a:t>
+              <a:t>Career-domain capability score (illustrative, 0–6)</a:t>
             </a:r>
           </a:p>
         </p:txBody>
@@ -5498,7 +5566,7 @@
         </p:nvGraphicFramePr>
         <p:xfrm>
           <a:off x="594360" y="1600200"/>
-          <a:ext cx="4983480" cy="2697480"/>
+          <a:ext cx="4983480" cy="2651760"/>
         </p:xfrm>
         <a:graphic>
           <a:graphicData uri="http://schemas.openxmlformats.org/drawingml/2006/chart">
@@ -5516,7 +5584,7 @@
         </p:nvGraphicFramePr>
         <p:xfrm>
           <a:off x="5897880" y="1188720"/>
-          <a:ext cx="5806440" cy="3291840"/>
+          <a:ext cx="5806440" cy="3246120"/>
         </p:xfrm>
         <a:graphic>
           <a:graphicData uri="http://schemas.openxmlformats.org/drawingml/2006/table">
@@ -5525,14 +5593,13 @@
                 <a:tableStyleId>{5C22544A-7EE6-4342-B048-85BDC9FD1C3A}</a:tableStyleId>
               </a:tblPr>
               <a:tblGrid>
-                <a:gridCol w="967740"/>
-                <a:gridCol w="967740"/>
-                <a:gridCol w="967740"/>
-                <a:gridCol w="967740"/>
-                <a:gridCol w="967740"/>
-                <a:gridCol w="967740"/>
+                <a:gridCol w="1161288"/>
+                <a:gridCol w="1161288"/>
+                <a:gridCol w="1161288"/>
+                <a:gridCol w="1161288"/>
+                <a:gridCol w="1161288"/>
               </a:tblGrid>
-              <a:tr h="470262">
+              <a:tr h="463731">
                 <a:tc>
                   <a:txBody>
                     <a:bodyPr/>
@@ -5592,7 +5659,7 @@
                           </a:solidFill>
                           <a:latin typeface="Segoe UI"/>
                         </a:rPr>
-                        <a:t>Job Boards</a:t>
+                        <a:t>ChatGPT</a:t>
                       </a:r>
                     </a:p>
                   </a:txBody>
@@ -5615,7 +5682,7 @@
                           </a:solidFill>
                           <a:latin typeface="Segoe UI"/>
                         </a:rPr>
-                        <a:t>Prep Apps</a:t>
+                        <a:t>Gemini</a:t>
                       </a:r>
                     </a:p>
                   </a:txBody>
@@ -5638,30 +5705,7 @@
                           </a:solidFill>
                           <a:latin typeface="Segoe UI"/>
                         </a:rPr>
-                        <a:t>Coaching</a:t>
-                      </a:r>
-                    </a:p>
-                  </a:txBody>
-                  <a:tcPr>
-                    <a:solidFill>
-                      <a:srgbClr val="0B1F33"/>
-                    </a:solidFill>
-                  </a:tcPr>
-                </a:tc>
-                <a:tc>
-                  <a:txBody>
-                    <a:bodyPr/>
-                    <a:lstStyle/>
-                    <a:p>
-                      <a:pPr algn="ctr"/>
-                      <a:r>
-                        <a:rPr sz="900" b="1">
-                          <a:solidFill>
-                            <a:srgbClr val="FFFFFF"/>
-                          </a:solidFill>
-                          <a:latin typeface="Segoe UI"/>
-                        </a:rPr>
-                        <a:t>Staffing</a:t>
+                        <a:t>Claude</a:t>
                       </a:r>
                     </a:p>
                   </a:txBody>
@@ -5672,7 +5716,7 @@
                   </a:tcPr>
                 </a:tc>
               </a:tr>
-              <a:tr h="470262">
+              <a:tr h="463731">
                 <a:tc>
                   <a:txBody>
                     <a:bodyPr/>
@@ -5686,7 +5730,7 @@
                           </a:solidFill>
                           <a:latin typeface="Segoe UI"/>
                         </a:rPr>
-                        <a:t>AI interview practice</a:t>
+                        <a:t>Career-specific mock interviews</a:t>
                       </a:r>
                     </a:p>
                   </a:txBody>
@@ -5710,29 +5754,6 @@
                           <a:latin typeface="Segoe UI"/>
                         </a:rPr>
                         <a:t>●</a:t>
-                      </a:r>
-                    </a:p>
-                  </a:txBody>
-                  <a:tcPr>
-                    <a:solidFill>
-                      <a:srgbClr val="FFFFFF"/>
-                    </a:solidFill>
-                  </a:tcPr>
-                </a:tc>
-                <a:tc>
-                  <a:txBody>
-                    <a:bodyPr/>
-                    <a:lstStyle/>
-                    <a:p>
-                      <a:pPr algn="ctr"/>
-                      <a:r>
-                        <a:rPr sz="1000" b="0">
-                          <a:solidFill>
-                            <a:srgbClr val="5E6E80"/>
-                          </a:solidFill>
-                          <a:latin typeface="Segoe UI"/>
-                        </a:rPr>
-                        <a:t>—</a:t>
                       </a:r>
                     </a:p>
                   </a:txBody>
@@ -5801,7 +5822,7 @@
                           </a:solidFill>
                           <a:latin typeface="Segoe UI"/>
                         </a:rPr>
-                        <a:t>—</a:t>
+                        <a:t>○</a:t>
                       </a:r>
                     </a:p>
                   </a:txBody>
@@ -5812,7 +5833,7 @@
                   </a:tcPr>
                 </a:tc>
               </a:tr>
-              <a:tr h="470262">
+              <a:tr h="463731">
                 <a:tc>
                   <a:txBody>
                     <a:bodyPr/>
@@ -5826,287 +5847,7 @@
                           </a:solidFill>
                           <a:latin typeface="Segoe UI"/>
                         </a:rPr>
-                        <a:t>Real-question banks</a:t>
-                      </a:r>
-                    </a:p>
-                  </a:txBody>
-                  <a:tcPr>
-                    <a:solidFill>
-                      <a:srgbClr val="EEF3F8"/>
-                    </a:solidFill>
-                  </a:tcPr>
-                </a:tc>
-                <a:tc>
-                  <a:txBody>
-                    <a:bodyPr/>
-                    <a:lstStyle/>
-                    <a:p>
-                      <a:pPr algn="ctr"/>
-                      <a:r>
-                        <a:rPr sz="1000" b="1">
-                          <a:solidFill>
-                            <a:srgbClr val="0A6B63"/>
-                          </a:solidFill>
-                          <a:latin typeface="Segoe UI"/>
-                        </a:rPr>
-                        <a:t>●</a:t>
-                      </a:r>
-                    </a:p>
-                  </a:txBody>
-                  <a:tcPr>
-                    <a:solidFill>
-                      <a:srgbClr val="EEF3F8"/>
-                    </a:solidFill>
-                  </a:tcPr>
-                </a:tc>
-                <a:tc>
-                  <a:txBody>
-                    <a:bodyPr/>
-                    <a:lstStyle/>
-                    <a:p>
-                      <a:pPr algn="ctr"/>
-                      <a:r>
-                        <a:rPr sz="1000" b="0">
-                          <a:solidFill>
-                            <a:srgbClr val="5E6E80"/>
-                          </a:solidFill>
-                          <a:latin typeface="Segoe UI"/>
-                        </a:rPr>
-                        <a:t>—</a:t>
-                      </a:r>
-                    </a:p>
-                  </a:txBody>
-                  <a:tcPr>
-                    <a:solidFill>
-                      <a:srgbClr val="EEF3F8"/>
-                    </a:solidFill>
-                  </a:tcPr>
-                </a:tc>
-                <a:tc>
-                  <a:txBody>
-                    <a:bodyPr/>
-                    <a:lstStyle/>
-                    <a:p>
-                      <a:pPr algn="ctr"/>
-                      <a:r>
-                        <a:rPr sz="1000" b="0">
-                          <a:solidFill>
-                            <a:srgbClr val="5E6E80"/>
-                          </a:solidFill>
-                          <a:latin typeface="Segoe UI"/>
-                        </a:rPr>
-                        <a:t>○</a:t>
-                      </a:r>
-                    </a:p>
-                  </a:txBody>
-                  <a:tcPr>
-                    <a:solidFill>
-                      <a:srgbClr val="EEF3F8"/>
-                    </a:solidFill>
-                  </a:tcPr>
-                </a:tc>
-                <a:tc>
-                  <a:txBody>
-                    <a:bodyPr/>
-                    <a:lstStyle/>
-                    <a:p>
-                      <a:pPr algn="ctr"/>
-                      <a:r>
-                        <a:rPr sz="1000" b="0">
-                          <a:solidFill>
-                            <a:srgbClr val="5E6E80"/>
-                          </a:solidFill>
-                          <a:latin typeface="Segoe UI"/>
-                        </a:rPr>
-                        <a:t>○</a:t>
-                      </a:r>
-                    </a:p>
-                  </a:txBody>
-                  <a:tcPr>
-                    <a:solidFill>
-                      <a:srgbClr val="EEF3F8"/>
-                    </a:solidFill>
-                  </a:tcPr>
-                </a:tc>
-                <a:tc>
-                  <a:txBody>
-                    <a:bodyPr/>
-                    <a:lstStyle/>
-                    <a:p>
-                      <a:pPr algn="ctr"/>
-                      <a:r>
-                        <a:rPr sz="1000" b="0">
-                          <a:solidFill>
-                            <a:srgbClr val="5E6E80"/>
-                          </a:solidFill>
-                          <a:latin typeface="Segoe UI"/>
-                        </a:rPr>
-                        <a:t>—</a:t>
-                      </a:r>
-                    </a:p>
-                  </a:txBody>
-                  <a:tcPr>
-                    <a:solidFill>
-                      <a:srgbClr val="EEF3F8"/>
-                    </a:solidFill>
-                  </a:tcPr>
-                </a:tc>
-              </a:tr>
-              <a:tr h="470262">
-                <a:tc>
-                  <a:txBody>
-                    <a:bodyPr/>
-                    <a:lstStyle/>
-                    <a:p>
-                      <a:pPr algn="l"/>
-                      <a:r>
-                        <a:rPr sz="1000" b="0">
-                          <a:solidFill>
-                            <a:srgbClr val="2C3A4B"/>
-                          </a:solidFill>
-                          <a:latin typeface="Segoe UI"/>
-                        </a:rPr>
-                        <a:t>Human mentor network</a:t>
-                      </a:r>
-                    </a:p>
-                  </a:txBody>
-                  <a:tcPr>
-                    <a:solidFill>
-                      <a:srgbClr val="FFFFFF"/>
-                    </a:solidFill>
-                  </a:tcPr>
-                </a:tc>
-                <a:tc>
-                  <a:txBody>
-                    <a:bodyPr/>
-                    <a:lstStyle/>
-                    <a:p>
-                      <a:pPr algn="ctr"/>
-                      <a:r>
-                        <a:rPr sz="1000" b="1">
-                          <a:solidFill>
-                            <a:srgbClr val="0A6B63"/>
-                          </a:solidFill>
-                          <a:latin typeface="Segoe UI"/>
-                        </a:rPr>
-                        <a:t>●</a:t>
-                      </a:r>
-                    </a:p>
-                  </a:txBody>
-                  <a:tcPr>
-                    <a:solidFill>
-                      <a:srgbClr val="FFFFFF"/>
-                    </a:solidFill>
-                  </a:tcPr>
-                </a:tc>
-                <a:tc>
-                  <a:txBody>
-                    <a:bodyPr/>
-                    <a:lstStyle/>
-                    <a:p>
-                      <a:pPr algn="ctr"/>
-                      <a:r>
-                        <a:rPr sz="1000" b="0">
-                          <a:solidFill>
-                            <a:srgbClr val="5E6E80"/>
-                          </a:solidFill>
-                          <a:latin typeface="Segoe UI"/>
-                        </a:rPr>
-                        <a:t>—</a:t>
-                      </a:r>
-                    </a:p>
-                  </a:txBody>
-                  <a:tcPr>
-                    <a:solidFill>
-                      <a:srgbClr val="FFFFFF"/>
-                    </a:solidFill>
-                  </a:tcPr>
-                </a:tc>
-                <a:tc>
-                  <a:txBody>
-                    <a:bodyPr/>
-                    <a:lstStyle/>
-                    <a:p>
-                      <a:pPr algn="ctr"/>
-                      <a:r>
-                        <a:rPr sz="1000" b="0">
-                          <a:solidFill>
-                            <a:srgbClr val="5E6E80"/>
-                          </a:solidFill>
-                          <a:latin typeface="Segoe UI"/>
-                        </a:rPr>
-                        <a:t>—</a:t>
-                      </a:r>
-                    </a:p>
-                  </a:txBody>
-                  <a:tcPr>
-                    <a:solidFill>
-                      <a:srgbClr val="FFFFFF"/>
-                    </a:solidFill>
-                  </a:tcPr>
-                </a:tc>
-                <a:tc>
-                  <a:txBody>
-                    <a:bodyPr/>
-                    <a:lstStyle/>
-                    <a:p>
-                      <a:pPr algn="ctr"/>
-                      <a:r>
-                        <a:rPr sz="1000" b="0">
-                          <a:solidFill>
-                            <a:srgbClr val="0A6B63"/>
-                          </a:solidFill>
-                          <a:latin typeface="Segoe UI"/>
-                        </a:rPr>
-                        <a:t>●</a:t>
-                      </a:r>
-                    </a:p>
-                  </a:txBody>
-                  <a:tcPr>
-                    <a:solidFill>
-                      <a:srgbClr val="FFFFFF"/>
-                    </a:solidFill>
-                  </a:tcPr>
-                </a:tc>
-                <a:tc>
-                  <a:txBody>
-                    <a:bodyPr/>
-                    <a:lstStyle/>
-                    <a:p>
-                      <a:pPr algn="ctr"/>
-                      <a:r>
-                        <a:rPr sz="1000" b="0">
-                          <a:solidFill>
-                            <a:srgbClr val="5E6E80"/>
-                          </a:solidFill>
-                          <a:latin typeface="Segoe UI"/>
-                        </a:rPr>
-                        <a:t>○</a:t>
-                      </a:r>
-                    </a:p>
-                  </a:txBody>
-                  <a:tcPr>
-                    <a:solidFill>
-                      <a:srgbClr val="FFFFFF"/>
-                    </a:solidFill>
-                  </a:tcPr>
-                </a:tc>
-              </a:tr>
-              <a:tr h="470262">
-                <a:tc>
-                  <a:txBody>
-                    <a:bodyPr/>
-                    <a:lstStyle/>
-                    <a:p>
-                      <a:pPr algn="l"/>
-                      <a:r>
-                        <a:rPr sz="1000" b="0">
-                          <a:solidFill>
-                            <a:srgbClr val="2C3A4B"/>
-                          </a:solidFill>
-                          <a:latin typeface="Segoe UI"/>
-                        </a:rPr>
-                        <a:t>Outcome placement</a:t>
+                        <a:t>100K+ proprietary question bank</a:t>
                       </a:r>
                     </a:p>
                   </a:txBody>
@@ -6198,30 +5939,7 @@
                           </a:solidFill>
                           <a:latin typeface="Segoe UI"/>
                         </a:rPr>
-                        <a:t>○</a:t>
-                      </a:r>
-                    </a:p>
-                  </a:txBody>
-                  <a:tcPr>
-                    <a:solidFill>
-                      <a:srgbClr val="EEF3F8"/>
-                    </a:solidFill>
-                  </a:tcPr>
-                </a:tc>
-                <a:tc>
-                  <a:txBody>
-                    <a:bodyPr/>
-                    <a:lstStyle/>
-                    <a:p>
-                      <a:pPr algn="ctr"/>
-                      <a:r>
-                        <a:rPr sz="1000" b="0">
-                          <a:solidFill>
-                            <a:srgbClr val="0A6B63"/>
-                          </a:solidFill>
-                          <a:latin typeface="Segoe UI"/>
-                        </a:rPr>
-                        <a:t>●</a:t>
+                        <a:t>—</a:t>
                       </a:r>
                     </a:p>
                   </a:txBody>
@@ -6232,7 +5950,7 @@
                   </a:tcPr>
                 </a:tc>
               </a:tr>
-              <a:tr h="470262">
+              <a:tr h="463731">
                 <a:tc>
                   <a:txBody>
                     <a:bodyPr/>
@@ -6246,7 +5964,7 @@
                           </a:solidFill>
                           <a:latin typeface="Segoe UI"/>
                         </a:rPr>
-                        <a:t>Employer AI screening</a:t>
+                        <a:t>AI résumé builder (hiring-tuned)</a:t>
                       </a:r>
                     </a:p>
                   </a:txBody>
@@ -6315,6 +6033,217 @@
                           </a:solidFill>
                           <a:latin typeface="Segoe UI"/>
                         </a:rPr>
+                        <a:t>○</a:t>
+                      </a:r>
+                    </a:p>
+                  </a:txBody>
+                  <a:tcPr>
+                    <a:solidFill>
+                      <a:srgbClr val="FFFFFF"/>
+                    </a:solidFill>
+                  </a:tcPr>
+                </a:tc>
+                <a:tc>
+                  <a:txBody>
+                    <a:bodyPr/>
+                    <a:lstStyle/>
+                    <a:p>
+                      <a:pPr algn="ctr"/>
+                      <a:r>
+                        <a:rPr sz="1000" b="0">
+                          <a:solidFill>
+                            <a:srgbClr val="5E6E80"/>
+                          </a:solidFill>
+                          <a:latin typeface="Segoe UI"/>
+                        </a:rPr>
+                        <a:t>○</a:t>
+                      </a:r>
+                    </a:p>
+                  </a:txBody>
+                  <a:tcPr>
+                    <a:solidFill>
+                      <a:srgbClr val="FFFFFF"/>
+                    </a:solidFill>
+                  </a:tcPr>
+                </a:tc>
+              </a:tr>
+              <a:tr h="463731">
+                <a:tc>
+                  <a:txBody>
+                    <a:bodyPr/>
+                    <a:lstStyle/>
+                    <a:p>
+                      <a:pPr algn="l"/>
+                      <a:r>
+                        <a:rPr sz="1000" b="0">
+                          <a:solidFill>
+                            <a:srgbClr val="2C3A4B"/>
+                          </a:solidFill>
+                          <a:latin typeface="Segoe UI"/>
+                        </a:rPr>
+                        <a:t>8-year coaching / candidate data</a:t>
+                      </a:r>
+                    </a:p>
+                  </a:txBody>
+                  <a:tcPr>
+                    <a:solidFill>
+                      <a:srgbClr val="EEF3F8"/>
+                    </a:solidFill>
+                  </a:tcPr>
+                </a:tc>
+                <a:tc>
+                  <a:txBody>
+                    <a:bodyPr/>
+                    <a:lstStyle/>
+                    <a:p>
+                      <a:pPr algn="ctr"/>
+                      <a:r>
+                        <a:rPr sz="1000" b="1">
+                          <a:solidFill>
+                            <a:srgbClr val="0A6B63"/>
+                          </a:solidFill>
+                          <a:latin typeface="Segoe UI"/>
+                        </a:rPr>
+                        <a:t>●</a:t>
+                      </a:r>
+                    </a:p>
+                  </a:txBody>
+                  <a:tcPr>
+                    <a:solidFill>
+                      <a:srgbClr val="EEF3F8"/>
+                    </a:solidFill>
+                  </a:tcPr>
+                </a:tc>
+                <a:tc>
+                  <a:txBody>
+                    <a:bodyPr/>
+                    <a:lstStyle/>
+                    <a:p>
+                      <a:pPr algn="ctr"/>
+                      <a:r>
+                        <a:rPr sz="1000" b="0">
+                          <a:solidFill>
+                            <a:srgbClr val="5E6E80"/>
+                          </a:solidFill>
+                          <a:latin typeface="Segoe UI"/>
+                        </a:rPr>
+                        <a:t>—</a:t>
+                      </a:r>
+                    </a:p>
+                  </a:txBody>
+                  <a:tcPr>
+                    <a:solidFill>
+                      <a:srgbClr val="EEF3F8"/>
+                    </a:solidFill>
+                  </a:tcPr>
+                </a:tc>
+                <a:tc>
+                  <a:txBody>
+                    <a:bodyPr/>
+                    <a:lstStyle/>
+                    <a:p>
+                      <a:pPr algn="ctr"/>
+                      <a:r>
+                        <a:rPr sz="1000" b="0">
+                          <a:solidFill>
+                            <a:srgbClr val="5E6E80"/>
+                          </a:solidFill>
+                          <a:latin typeface="Segoe UI"/>
+                        </a:rPr>
+                        <a:t>—</a:t>
+                      </a:r>
+                    </a:p>
+                  </a:txBody>
+                  <a:tcPr>
+                    <a:solidFill>
+                      <a:srgbClr val="EEF3F8"/>
+                    </a:solidFill>
+                  </a:tcPr>
+                </a:tc>
+                <a:tc>
+                  <a:txBody>
+                    <a:bodyPr/>
+                    <a:lstStyle/>
+                    <a:p>
+                      <a:pPr algn="ctr"/>
+                      <a:r>
+                        <a:rPr sz="1000" b="0">
+                          <a:solidFill>
+                            <a:srgbClr val="5E6E80"/>
+                          </a:solidFill>
+                          <a:latin typeface="Segoe UI"/>
+                        </a:rPr>
+                        <a:t>—</a:t>
+                      </a:r>
+                    </a:p>
+                  </a:txBody>
+                  <a:tcPr>
+                    <a:solidFill>
+                      <a:srgbClr val="EEF3F8"/>
+                    </a:solidFill>
+                  </a:tcPr>
+                </a:tc>
+              </a:tr>
+              <a:tr h="463731">
+                <a:tc>
+                  <a:txBody>
+                    <a:bodyPr/>
+                    <a:lstStyle/>
+                    <a:p>
+                      <a:pPr algn="l"/>
+                      <a:r>
+                        <a:rPr sz="1000" b="0">
+                          <a:solidFill>
+                            <a:srgbClr val="2C3A4B"/>
+                          </a:solidFill>
+                          <a:latin typeface="Segoe UI"/>
+                        </a:rPr>
+                        <a:t>Membership / consulting path</a:t>
+                      </a:r>
+                    </a:p>
+                  </a:txBody>
+                  <a:tcPr>
+                    <a:solidFill>
+                      <a:srgbClr val="FFFFFF"/>
+                    </a:solidFill>
+                  </a:tcPr>
+                </a:tc>
+                <a:tc>
+                  <a:txBody>
+                    <a:bodyPr/>
+                    <a:lstStyle/>
+                    <a:p>
+                      <a:pPr algn="ctr"/>
+                      <a:r>
+                        <a:rPr sz="1000" b="1">
+                          <a:solidFill>
+                            <a:srgbClr val="0A6B63"/>
+                          </a:solidFill>
+                          <a:latin typeface="Segoe UI"/>
+                        </a:rPr>
+                        <a:t>●</a:t>
+                      </a:r>
+                    </a:p>
+                  </a:txBody>
+                  <a:tcPr>
+                    <a:solidFill>
+                      <a:srgbClr val="FFFFFF"/>
+                    </a:solidFill>
+                  </a:tcPr>
+                </a:tc>
+                <a:tc>
+                  <a:txBody>
+                    <a:bodyPr/>
+                    <a:lstStyle/>
+                    <a:p>
+                      <a:pPr algn="ctr"/>
+                      <a:r>
+                        <a:rPr sz="1000" b="0">
+                          <a:solidFill>
+                            <a:srgbClr val="5E6E80"/>
+                          </a:solidFill>
+                          <a:latin typeface="Segoe UI"/>
+                        </a:rPr>
                         <a:t>—</a:t>
                       </a:r>
                     </a:p>
@@ -6361,7 +6290,7 @@
                           </a:solidFill>
                           <a:latin typeface="Segoe UI"/>
                         </a:rPr>
-                        <a:t>○</a:t>
+                        <a:t>—</a:t>
                       </a:r>
                     </a:p>
                   </a:txBody>
@@ -6372,7 +6301,7 @@
                   </a:tcPr>
                 </a:tc>
               </a:tr>
-              <a:tr h="470268">
+              <a:tr h="463734">
                 <a:tc>
                   <a:txBody>
                     <a:bodyPr/>
@@ -6386,30 +6315,7 @@
                           </a:solidFill>
                           <a:latin typeface="Segoe UI"/>
                         </a:rPr>
-                        <a:t>Cross-border focus</a:t>
-                      </a:r>
-                    </a:p>
-                  </a:txBody>
-                  <a:tcPr>
-                    <a:solidFill>
-                      <a:srgbClr val="EEF3F8"/>
-                    </a:solidFill>
-                  </a:tcPr>
-                </a:tc>
-                <a:tc>
-                  <a:txBody>
-                    <a:bodyPr/>
-                    <a:lstStyle/>
-                    <a:p>
-                      <a:pPr algn="ctr"/>
-                      <a:r>
-                        <a:rPr sz="1000" b="1">
-                          <a:solidFill>
-                            <a:srgbClr val="0A6B63"/>
-                          </a:solidFill>
-                          <a:latin typeface="Segoe UI"/>
-                        </a:rPr>
-                        <a:t>●</a:t>
+                        <a:t>General conversational AI</a:t>
                       </a:r>
                     </a:p>
                   </a:txBody>
@@ -6451,11 +6357,11 @@
                       <a:r>
                         <a:rPr sz="1000" b="0">
                           <a:solidFill>
-                            <a:srgbClr val="5E6E80"/>
+                            <a:srgbClr val="0A6B63"/>
                           </a:solidFill>
                           <a:latin typeface="Segoe UI"/>
                         </a:rPr>
-                        <a:t>—</a:t>
+                        <a:t>●</a:t>
                       </a:r>
                     </a:p>
                   </a:txBody>
@@ -6474,11 +6380,11 @@
                       <a:r>
                         <a:rPr sz="1000" b="0">
                           <a:solidFill>
-                            <a:srgbClr val="5E6E80"/>
+                            <a:srgbClr val="0A6B63"/>
                           </a:solidFill>
                           <a:latin typeface="Segoe UI"/>
                         </a:rPr>
-                        <a:t>○</a:t>
+                        <a:t>●</a:t>
                       </a:r>
                     </a:p>
                   </a:txBody>
@@ -6497,11 +6403,11 @@
                       <a:r>
                         <a:rPr sz="1000" b="0">
                           <a:solidFill>
-                            <a:srgbClr val="5E6E80"/>
+                            <a:srgbClr val="0A6B63"/>
                           </a:solidFill>
                           <a:latin typeface="Segoe UI"/>
                         </a:rPr>
-                        <a:t>○</a:t>
+                        <a:t>●</a:t>
                       </a:r>
                     </a:p>
                   </a:txBody>
@@ -6524,8 +6430,8 @@
         </p:nvSpPr>
         <p:spPr>
           <a:xfrm>
-            <a:off x="502920" y="4663440"/>
-            <a:ext cx="11155680" cy="320040"/>
+            <a:off x="502920" y="4617720"/>
+            <a:ext cx="11155680" cy="274320"/>
           </a:xfrm>
           <a:prstGeom prst="rect">
             <a:avLst/>
@@ -6544,7 +6450,7 @@
                 </a:solidFill>
                 <a:latin typeface="Segoe UI"/>
               </a:rPr>
-              <a:t>●  Full capability      ○  Partial      —  Not offered</a:t>
+              <a:t>●  Full / native capability      ○  Partial / generic      —  Not offered</a:t>
             </a:r>
           </a:p>
         </p:txBody>
@@ -6557,8 +6463,8 @@
         </p:nvSpPr>
         <p:spPr>
           <a:xfrm>
-            <a:off x="502920" y="5029200"/>
-            <a:ext cx="11201400" cy="777240"/>
+            <a:off x="502920" y="4937760"/>
+            <a:ext cx="11201400" cy="868680"/>
           </a:xfrm>
           <a:prstGeom prst="roundRect">
             <a:avLst>
@@ -6602,8 +6508,8 @@
         </p:nvSpPr>
         <p:spPr>
           <a:xfrm>
-            <a:off x="685800" y="5166360"/>
-            <a:ext cx="10835640" cy="502920"/>
+            <a:off x="685800" y="5074920"/>
+            <a:ext cx="10835640" cy="640080"/>
           </a:xfrm>
           <a:prstGeom prst="rect">
             <a:avLst/>
@@ -6622,7 +6528,7 @@
                 </a:solidFill>
                 <a:latin typeface="Segoe UI"/>
               </a:rPr>
-              <a:t>51Careers.AI is the only platform combining AI-native preparation, human mentorship, and outcome-based placement across borders.</a:t>
+              <a:t>General models are powerful — but not career platforms. 51Careers.AI combines domain AI, a proprietary 100K+ question corpus, and an AI résumé builder purpose-built for global hiring outcomes.</a:t>
             </a:r>
           </a:p>
         </p:txBody>
@@ -6655,7 +6561,7 @@
                 </a:solidFill>
                 <a:latin typeface="Segoe UI"/>
               </a:rPr>
-              <a:t>Illustrative category comparison based on management assessment of publicly available offerings.</a:t>
+              <a:t>Illustrative comparison based on management assessment of publicly available general-purpose AI products.</a:t>
             </a:r>
           </a:p>
         </p:txBody>
@@ -6942,7 +6848,7 @@
                 </a:solidFill>
                 <a:latin typeface="Georgia"/>
               </a:rPr>
-              <a:t>A Phased Path to Global Scale</a:t>
+              <a:t>Users First, Then Monetize Globally</a:t>
             </a:r>
           </a:p>
         </p:txBody>
@@ -7098,7 +7004,7 @@
                 </a:solidFill>
                 <a:latin typeface="Segoe UI"/>
               </a:rPr>
-              <a:t>Strengthen the core</a:t>
+              <a:t>Grow free usage</a:t>
             </a:r>
           </a:p>
         </p:txBody>
@@ -7131,7 +7037,7 @@
                 </a:solidFill>
                 <a:latin typeface="Segoe UI"/>
               </a:rPr>
-              <a:t>▸  Scale the AI platform across the U.S. and Greater China</a:t>
+              <a:t>▸  Scale active users on free mock interviews, question bank, and AI résumé builder</a:t>
             </a:r>
           </a:p>
         </p:txBody>
@@ -7164,7 +7070,7 @@
                 </a:solidFill>
                 <a:latin typeface="Segoe UI"/>
               </a:rPr>
-              <a:t>▸  Migrate the coaching client base onto the platform</a:t>
+              <a:t>▸  Ship résumé-builder enhancements and expand question coverage globally</a:t>
             </a:r>
           </a:p>
         </p:txBody>
@@ -7197,7 +7103,7 @@
                 </a:solidFill>
                 <a:latin typeface="Segoe UI"/>
               </a:rPr>
-              <a:t>▸  Expand question-bank and assessment coverage by role and employer</a:t>
+              <a:t>▸  Instrument conversion funnels for membership pilots</a:t>
             </a:r>
           </a:p>
         </p:txBody>
@@ -7353,7 +7259,7 @@
                 </a:solidFill>
                 <a:latin typeface="Segoe UI"/>
               </a:rPr>
-              <a:t>Extend the footprint</a:t>
+              <a:t>Introduce paid tiers</a:t>
             </a:r>
           </a:p>
         </p:txBody>
@@ -7386,7 +7292,7 @@
                 </a:solidFill>
                 <a:latin typeface="Segoe UI"/>
               </a:rPr>
-              <a:t>▸  Full go-to-market in the U.K., Singapore, South Korea, Canada, and India</a:t>
+              <a:t>▸  Launch membership fees for premium AI practice and résumé tools</a:t>
             </a:r>
           </a:p>
         </p:txBody>
@@ -7419,7 +7325,7 @@
                 </a:solidFill>
                 <a:latin typeface="Segoe UI"/>
               </a:rPr>
-              <a:t>▸  University and institutional partnership programs</a:t>
+              <a:t>▸  Add consulting and education fee packages for high-intent users</a:t>
             </a:r>
           </a:p>
         </p:txBody>
@@ -7452,7 +7358,7 @@
                 </a:solidFill>
                 <a:latin typeface="Segoe UI"/>
               </a:rPr>
-              <a:t>▸  Convert employer pilots into paid SaaS relationships</a:t>
+              <a:t>▸  Expand language and market coverage worldwide</a:t>
             </a:r>
           </a:p>
         </p:txBody>
@@ -7608,7 +7514,7 @@
                 </a:solidFill>
                 <a:latin typeface="Segoe UI"/>
               </a:rPr>
-              <a:t>Compound the platform</a:t>
+              <a:t>Compound globally</a:t>
             </a:r>
           </a:p>
         </p:txBody>
@@ -7641,7 +7547,7 @@
                 </a:solidFill>
                 <a:latin typeface="Segoe UI"/>
               </a:rPr>
-              <a:t>▸  Employer SaaS at scale across core geographies</a:t>
+              <a:t>▸  Optimize paid conversion across membership, consulting, and education</a:t>
             </a:r>
           </a:p>
         </p:txBody>
@@ -7674,7 +7580,7 @@
                 </a:solidFill>
                 <a:latin typeface="Segoe UI"/>
               </a:rPr>
-              <a:t>▸  Additional languages, verticals, and seniority segments</a:t>
+              <a:t>▸  Deepen verticals and seniority segments globally</a:t>
             </a:r>
           </a:p>
         </p:txBody>
@@ -7707,7 +7613,7 @@
                 </a:solidFill>
                 <a:latin typeface="Segoe UI"/>
               </a:rPr>
-              <a:t>▸  Selective M&amp;A of regional career-services assets</a:t>
+              <a:t>▸  Selective partnerships with universities and employers</a:t>
             </a:r>
           </a:p>
         </p:txBody>
@@ -7768,7 +7674,7 @@
         <p:spPr>
           <a:xfrm>
             <a:off x="685800" y="4846320"/>
-            <a:ext cx="3657600" cy="256032"/>
+            <a:ext cx="4114800" cy="256032"/>
           </a:xfrm>
           <a:prstGeom prst="rect">
             <a:avLst/>
@@ -7787,7 +7693,7 @@
                 </a:solidFill>
                 <a:latin typeface="Segoe UI"/>
               </a:rPr>
-              <a:t>Geographic expansion intensity (illustrative)</a:t>
+              <a:t>Illustrative active-user growth (index)</a:t>
             </a:r>
           </a:p>
         </p:txBody>
@@ -7838,7 +7744,7 @@
                 </a:solidFill>
                 <a:latin typeface="Segoe UI"/>
               </a:rPr>
-              <a:t>Sequencing follows the existing footprint — new capital extends proven demand in markets the Company already serves, rather than funding market discovery.</a:t>
+              <a:t>Strategy: win global users with a free career AI product, then monetize engagement through membership, consulting, and education fees.</a:t>
             </a:r>
           </a:p>
         </p:txBody>
@@ -8125,7 +8031,7 @@
                 </a:solidFill>
                 <a:latin typeface="Georgia"/>
               </a:rPr>
-              <a:t>Illustrative Five-Year Trajectory</a:t>
+              <a:t>From Free Platform to Paid Scale</a:t>
             </a:r>
           </a:p>
         </p:txBody>
@@ -8186,7 +8092,7 @@
         <p:spPr>
           <a:xfrm>
             <a:off x="685800" y="1280160"/>
-            <a:ext cx="4572000" cy="256032"/>
+            <a:ext cx="5486400" cy="256032"/>
           </a:xfrm>
           <a:prstGeom prst="rect">
             <a:avLst/>
@@ -8205,7 +8111,7 @@
                 </a:solidFill>
                 <a:latin typeface="Segoe UI"/>
               </a:rPr>
-              <a:t>Revenue, US$ millions</a:t>
+              <a:t>Illustrative platform revenue, US$ millions</a:t>
             </a:r>
           </a:p>
         </p:txBody>
@@ -8284,7 +8190,7 @@
         <p:spPr>
           <a:xfrm>
             <a:off x="685800" y="4279392"/>
-            <a:ext cx="4572000" cy="228600"/>
+            <a:ext cx="5486400" cy="228600"/>
           </a:xfrm>
           <a:prstGeom prst="rect">
             <a:avLst/>
@@ -8303,7 +8209,7 @@
                 </a:solidFill>
                 <a:latin typeface="Segoe UI"/>
               </a:rPr>
-              <a:t>Illustrative gross margin (%)</a:t>
+              <a:t>Illustrative paid conversion of active users (%)</a:t>
             </a:r>
           </a:p>
         </p:txBody>
@@ -8380,26 +8286,26 @@
         <p:spPr>
           <a:xfrm>
             <a:off x="8092440" y="1325880"/>
-            <a:ext cx="3429000" cy="594360"/>
-          </a:xfrm>
-          <a:prstGeom prst="rect">
-            <a:avLst/>
-          </a:prstGeom>
-          <a:noFill/>
-        </p:spPr>
-        <p:txBody>
-          <a:bodyPr wrap="square" anchor="t"/>
-          <a:lstStyle/>
-          <a:p>
-            <a:pPr algn="l"/>
-            <a:r>
-              <a:rPr sz="3600" b="1" i="0">
+            <a:ext cx="3429000" cy="502920"/>
+          </a:xfrm>
+          <a:prstGeom prst="rect">
+            <a:avLst/>
+          </a:prstGeom>
+          <a:noFill/>
+        </p:spPr>
+        <p:txBody>
+          <a:bodyPr wrap="square" anchor="t"/>
+          <a:lstStyle/>
+          <a:p>
+            <a:pPr algn="l"/>
+            <a:r>
+              <a:rPr sz="3400" b="1" i="0">
                 <a:solidFill>
                   <a:srgbClr val="FFFFFF"/>
                 </a:solidFill>
                 <a:latin typeface="Georgia"/>
               </a:rPr>
-              <a:t>≈50%</a:t>
+              <a:t>US$0</a:t>
             </a:r>
           </a:p>
         </p:txBody>
@@ -8412,7 +8318,7 @@
         </p:nvSpPr>
         <p:spPr>
           <a:xfrm>
-            <a:off x="8092440" y="2011680"/>
+            <a:off x="8092440" y="1965960"/>
             <a:ext cx="3429000" cy="365760"/>
           </a:xfrm>
           <a:prstGeom prst="rect">
@@ -8432,7 +8338,7 @@
                 </a:solidFill>
                 <a:latin typeface="Segoe UI"/>
               </a:rPr>
-              <a:t>REVENUE CAGR, 2025E–2029E</a:t>
+              <a:t>PLATFORM REVENUE TODAY (FREE)</a:t>
             </a:r>
           </a:p>
         </p:txBody>
@@ -8512,7 +8418,7 @@
                 </a:solidFill>
                 <a:latin typeface="Segoe UI"/>
               </a:rPr>
-              <a:t>Key drivers</a:t>
+              <a:t>Revenue drivers</a:t>
             </a:r>
           </a:p>
         </p:txBody>
@@ -8526,7 +8432,7 @@
         <p:spPr>
           <a:xfrm>
             <a:off x="8092440" y="3291840"/>
-            <a:ext cx="3429000" cy="548640"/>
+            <a:ext cx="3429000" cy="502920"/>
           </a:xfrm>
           <a:prstGeom prst="rect">
             <a:avLst/>
@@ -8545,7 +8451,7 @@
                 </a:solidFill>
                 <a:latin typeface="Segoe UI"/>
               </a:rPr>
-              <a:t>▸  Self-serve platform subscriptions compounding across markets</a:t>
+              <a:t>▸  Grow free active users globally</a:t>
             </a:r>
           </a:p>
         </p:txBody>
@@ -8558,8 +8464,8 @@
         </p:nvSpPr>
         <p:spPr>
           <a:xfrm>
-            <a:off x="8092440" y="3840480"/>
-            <a:ext cx="3429000" cy="548640"/>
+            <a:off x="8092440" y="3794760"/>
+            <a:ext cx="3429000" cy="502920"/>
           </a:xfrm>
           <a:prstGeom prst="rect">
             <a:avLst/>
@@ -8578,7 +8484,7 @@
                 </a:solidFill>
                 <a:latin typeface="Segoe UI"/>
               </a:rPr>
-              <a:t>▸  Mix shift from services to software lifting gross margin toward 65%+</a:t>
+              <a:t>▸  Introduce membership fees for premium AI tools</a:t>
             </a:r>
           </a:p>
         </p:txBody>
@@ -8591,8 +8497,8 @@
         </p:nvSpPr>
         <p:spPr>
           <a:xfrm>
-            <a:off x="8092440" y="4389120"/>
-            <a:ext cx="3429000" cy="548640"/>
+            <a:off x="8092440" y="4297680"/>
+            <a:ext cx="3429000" cy="502920"/>
           </a:xfrm>
           <a:prstGeom prst="rect">
             <a:avLst/>
@@ -8611,7 +8517,7 @@
                 </a:solidFill>
                 <a:latin typeface="Segoe UI"/>
               </a:rPr>
-              <a:t>▸  Employer SaaS ramping from 2027</a:t>
+              <a:t>▸  Add consulting fees for high-touch guidance</a:t>
             </a:r>
           </a:p>
         </p:txBody>
@@ -8624,8 +8530,8 @@
         </p:nvSpPr>
         <p:spPr>
           <a:xfrm>
-            <a:off x="8092440" y="4937759"/>
-            <a:ext cx="3429000" cy="548640"/>
+            <a:off x="8092440" y="4800600"/>
+            <a:ext cx="3429000" cy="502920"/>
           </a:xfrm>
           <a:prstGeom prst="rect">
             <a:avLst/>
@@ -8644,7 +8550,7 @@
                 </a:solidFill>
                 <a:latin typeface="Segoe UI"/>
               </a:rPr>
-              <a:t>▸  AI-assisted delivery driving operating leverage</a:t>
+              <a:t>▸  Layer education fees for structured programs</a:t>
             </a:r>
           </a:p>
         </p:txBody>
@@ -8677,7 +8583,7 @@
                 </a:solidFill>
                 <a:latin typeface="Segoe UI"/>
               </a:rPr>
-              <a:t>Illustrative management projections, not a forecast; 2025 base reflects third-party revenue estimates. Actual results will differ.</a:t>
+              <a:t>Illustrative management projections only — not a forecast. 2025A platform revenue is US$0 (free product). Actual results will differ.</a:t>
             </a:r>
           </a:p>
         </p:txBody>
@@ -9798,7 +9704,7 @@
                 </a:solidFill>
                 <a:latin typeface="Segoe UI"/>
               </a:rPr>
-              <a:t>What this capital achieves — next-generation platform release · go-to-market in three additional countries · employer SaaS general availability · scaled global mentor network.</a:t>
+              <a:t>What this capital achieves — AI résumé builder &amp; mock-interview scale · global active-user growth · paid membership / consulting / education launch.</a:t>
             </a:r>
           </a:p>
         </p:txBody>
@@ -10241,7 +10147,7 @@
                 </a:solidFill>
                 <a:latin typeface="Segoe UI"/>
               </a:rPr>
-              <a:t>FOUNDER</a:t>
+              <a:t>FOUNDER &amp; CEO</a:t>
             </a:r>
           </a:p>
         </p:txBody>
@@ -12449,7 +12355,7 @@
                 </a:solidFill>
                 <a:latin typeface="Georgia"/>
               </a:rPr>
-              <a:t>Investment Highlights</a:t>
+              <a:t>Who We Are &amp; Why Now</a:t>
             </a:r>
           </a:p>
         </p:txBody>
@@ -12605,7 +12511,7 @@
                 </a:solidFill>
                 <a:latin typeface="Segoe UI"/>
               </a:rPr>
-              <a:t>Large &amp; Expanding Market</a:t>
+              <a:t>Who We Are</a:t>
             </a:r>
           </a:p>
         </p:txBody>
@@ -12638,7 +12544,7 @@
                 </a:solidFill>
                 <a:latin typeface="Segoe UI"/>
               </a:rPr>
-              <a:t>Global recruitment and career-development spend exceeds US$200B, with AI-enabled segments compounding at double-digit rates.</a:t>
+              <a:t>51Careers.AI is the AI-powered career platform from the 51 Careers team — helping professionals worldwide prepare, apply, and compete for great jobs.</a:t>
             </a:r>
           </a:p>
         </p:txBody>
@@ -12794,7 +12700,7 @@
                 </a:solidFill>
                 <a:latin typeface="Segoe UI"/>
               </a:rPr>
-              <a:t>A Decade of Operating Proof</a:t>
+              <a:t>Our Product</a:t>
             </a:r>
           </a:p>
         </p:txBody>
@@ -12827,7 +12733,7 @@
                 </a:solidFill>
                 <a:latin typeface="Segoe UI"/>
               </a:rPr>
-              <a:t>Founded in New York in 2016; an established, revenue-generating career-services franchise now scaling as an AI-first platform.</a:t>
+              <a:t>AI mock interviews, a proprietary 100K+ interview-question database, and a new AI résumé builder — plus coaching pathways as users grow.</a:t>
             </a:r>
           </a:p>
         </p:txBody>
@@ -12983,7 +12889,7 @@
                 </a:solidFill>
                 <a:latin typeface="Segoe UI"/>
               </a:rPr>
-              <a:t>AI-Native Product Suite</a:t>
+              <a:t>Proven Demand Base</a:t>
             </a:r>
           </a:p>
         </p:txBody>
@@ -13016,7 +12922,7 @@
                 </a:solidFill>
                 <a:latin typeface="Segoe UI"/>
               </a:rPr>
-              <a:t>Personalized mock interviews, proprietary question banks, online assessments, mentor coaching, and intelligent job matching.</a:t>
+              <a:t>Over 10,000 candidates helped across eight years of career-development operations; the AI platform launched in 2025 and is free today.</a:t>
             </a:r>
           </a:p>
         </p:txBody>
@@ -13172,7 +13078,7 @@
                 </a:solidFill>
                 <a:latin typeface="Segoe UI"/>
               </a:rPr>
-              <a:t>Global Footprint</a:t>
+              <a:t>Global Market</a:t>
             </a:r>
           </a:p>
         </p:txBody>
@@ -13205,7 +13111,7 @@
                 </a:solidFill>
                 <a:latin typeface="Segoe UI"/>
               </a:rPr>
-              <a:t>Teams and delivery capability across the U.S., China, U.K., Singapore, South Korea, Canada, and India.</a:t>
+              <a:t>A multi-hundred-billion-dollar global recruitment and career-development market shifting rapidly toward AI-native tools.</a:t>
             </a:r>
           </a:p>
         </p:txBody>
@@ -13361,7 +13267,7 @@
                 </a:solidFill>
                 <a:latin typeface="Segoe UI"/>
               </a:rPr>
-              <a:t>Strategic AI Partnership</a:t>
+              <a:t>Clear Monetization Path</a:t>
             </a:r>
           </a:p>
         </p:txBody>
@@ -13394,7 +13300,7 @@
                 </a:solidFill>
                 <a:latin typeface="Segoe UI"/>
               </a:rPr>
-              <a:t>Deep collaboration with Alibaba Cloud AI — Tongyi LLM, NLP, semantic search — powering advisor, matching, and screening systems.</a:t>
+              <a:t>Grow active users on a free product, then introduce membership fees, consulting fees, and education fees as engagement compounds.</a:t>
             </a:r>
           </a:p>
         </p:txBody>
@@ -13550,7 +13456,7 @@
                 </a:solidFill>
                 <a:latin typeface="Segoe UI"/>
               </a:rPr>
-              <a:t>Compelling Entry Point</a:t>
+              <a:t>Capital to Scale</a:t>
             </a:r>
           </a:p>
         </p:txBody>
@@ -13583,7 +13489,7 @@
                 </a:solidFill>
                 <a:latin typeface="Segoe UI"/>
               </a:rPr>
-              <a:t>US$5.0M primary round at a US$50.0M valuation to fund the product roadmap and global go-to-market.</a:t>
+              <a:t>US$5.0M primary round at a US$50.0M valuation to fund product, AI features, and global user growth.</a:t>
             </a:r>
           </a:p>
         </p:txBody>
@@ -14026,7 +13932,7 @@
                 </a:solidFill>
                 <a:latin typeface="Segoe UI"/>
               </a:rPr>
-              <a:t>Hiring processes are opaque and intensely competitive. Interview preparation remains fragmented across scattered resources, and quality human coaching is expensive and does not scale.</a:t>
+              <a:t>Hiring processes are opaque and intensely competitive worldwide. Interview preparation remains fragmented, and quality coaching is expensive and does not scale.</a:t>
             </a:r>
           </a:p>
         </p:txBody>
@@ -14149,7 +14055,7 @@
                 </a:solidFill>
                 <a:latin typeface="Segoe UI"/>
               </a:rPr>
-              <a:t>For international talent</a:t>
+              <a:t>For global talent</a:t>
             </a:r>
           </a:p>
         </p:txBody>
@@ -14182,7 +14088,7 @@
                 </a:solidFill>
                 <a:latin typeface="Segoe UI"/>
               </a:rPr>
-              <a:t>Language, cultural, and visa complexity compound an already difficult search — a large, motivated population is structurally underserved by generic tools.</a:t>
+              <a:t>Language, cultural, and cross-border complexity compound an already difficult search — hundreds of millions of professionals are underserved by generic AI chat tools.</a:t>
             </a:r>
           </a:p>
         </p:txBody>
@@ -14418,7 +14324,7 @@
                 </a:solidFill>
                 <a:latin typeface="Segoe UI"/>
               </a:rPr>
-              <a:t>Structural friction indicators</a:t>
+              <a:t>Global friction indicators</a:t>
             </a:r>
           </a:p>
         </p:txBody>
@@ -14484,7 +14390,7 @@
                 </a:solidFill>
                 <a:latin typeface="Segoe UI"/>
               </a:rPr>
-              <a:t>APPLICATIONS PER CORPORATE JOB OPENING</a:t>
+              <a:t>APPLICATIONS PER CORPORATE JOB OPENING (GLOBAL)</a:t>
             </a:r>
           </a:p>
         </p:txBody>
@@ -14603,7 +14509,7 @@
                 </a:solidFill>
                 <a:latin typeface="Georgia"/>
               </a:rPr>
-              <a:t>1.1M+</a:t>
+              <a:t>6M+</a:t>
             </a:r>
           </a:p>
         </p:txBody>
@@ -14636,7 +14542,7 @@
                 </a:solidFill>
                 <a:latin typeface="Segoe UI"/>
               </a:rPr>
-              <a:t>INTERNATIONAL STUDENTS IN THE U.S. ALONE</a:t>
+              <a:t>INTERNATIONAL STUDENTS WORLDWIDE (ANNUAL)</a:t>
             </a:r>
           </a:p>
         </p:txBody>
@@ -14693,7 +14599,7 @@
         <p:spPr>
           <a:xfrm>
             <a:off x="6812280" y="3749039"/>
-            <a:ext cx="4343400" cy="109728"/>
+            <a:ext cx="3886200" cy="109728"/>
           </a:xfrm>
           <a:prstGeom prst="rect">
             <a:avLst/>
@@ -14907,7 +14813,7 @@
                 </a:solidFill>
                 <a:latin typeface="Segoe UI"/>
               </a:rPr>
-              <a:t>Sources: Open Doors 2024; Glassdoor; industry estimates.</a:t>
+              <a:t>Sources: UNESCO / OECD mobility data; Glassdoor; industry estimates.</a:t>
             </a:r>
           </a:p>
         </p:txBody>
@@ -15194,7 +15100,7 @@
                 </a:solidFill>
                 <a:latin typeface="Georgia"/>
               </a:rPr>
-              <a:t>A US$200B+ Global Talent Market in Structural Shift</a:t>
+              <a:t>A Global Career Market in Structural Shift</a:t>
             </a:r>
           </a:p>
         </p:txBody>
@@ -15383,7 +15289,7 @@
                 </a:solidFill>
                 <a:latin typeface="Segoe UI"/>
               </a:rPr>
-              <a:t>Global recruitment, talent-acquisition, and career-development spend.</a:t>
+              <a:t>Global recruitment, talent-acquisition, and career-development spend worldwide.</a:t>
             </a:r>
           </a:p>
         </p:txBody>
@@ -15539,7 +15445,7 @@
                 </a:solidFill>
                 <a:latin typeface="Georgia"/>
               </a:rPr>
-              <a:t>US$30B</a:t>
+              <a:t>US$30B+</a:t>
             </a:r>
           </a:p>
         </p:txBody>
@@ -15572,7 +15478,7 @@
                 </a:solidFill>
                 <a:latin typeface="Segoe UI"/>
               </a:rPr>
-              <a:t>AI-enabled hiring technology and digital career preparation.</a:t>
+              <a:t>Global AI-enabled hiring technology and digital career preparation.</a:t>
             </a:r>
           </a:p>
         </p:txBody>
@@ -15633,7 +15539,7 @@
         <p:spPr>
           <a:xfrm>
             <a:off x="685800" y="4892040"/>
-            <a:ext cx="1510588" cy="146304"/>
+            <a:ext cx="1726387" cy="146304"/>
           </a:xfrm>
           <a:prstGeom prst="rect">
             <a:avLst/>
@@ -15695,7 +15601,7 @@
                 </a:solidFill>
                 <a:latin typeface="Segoe UI"/>
               </a:rPr>
-              <a:t>INITIAL TARGET SEGMENT</a:t>
+              <a:t>NEAR-TERM FOCUS</a:t>
             </a:r>
           </a:p>
         </p:txBody>
@@ -15728,7 +15634,7 @@
                 </a:solidFill>
                 <a:latin typeface="Georgia"/>
               </a:rPr>
-              <a:t>US$1.5B</a:t>
+              <a:t>US$5B+</a:t>
             </a:r>
           </a:p>
         </p:txBody>
@@ -15761,7 +15667,7 @@
                 </a:solidFill>
                 <a:latin typeface="Segoe UI"/>
               </a:rPr>
-              <a:t>Cross-border early-career talent across current Company markets.</a:t>
+              <a:t>Global early-career and mid-career professionals seeking AI prep, résumés, and interview readiness.</a:t>
             </a:r>
           </a:p>
         </p:txBody>
@@ -15841,7 +15747,7 @@
                 </a:solidFill>
                 <a:latin typeface="Segoe UI"/>
               </a:rPr>
-              <a:t>AI hiring &amp; career-tech spend (illustrative, US$B)</a:t>
+              <a:t>Global AI career-tech spend (illustrative, US$B)</a:t>
             </a:r>
           </a:p>
         </p:txBody>
@@ -15892,7 +15798,7 @@
                 </a:solidFill>
                 <a:latin typeface="Segoe UI"/>
               </a:rPr>
-              <a:t>Management estimates informed by public industry research; presented for illustration.</a:t>
+              <a:t>Management estimates informed by public global industry research; presented for illustration.</a:t>
             </a:r>
           </a:p>
         </p:txBody>
@@ -16146,7 +16052,7 @@
                 </a:solidFill>
                 <a:latin typeface="Segoe UI"/>
               </a:rPr>
-              <a:t>THE PLATFORM</a:t>
+              <a:t>OUR PRODUCT</a:t>
             </a:r>
           </a:p>
         </p:txBody>
@@ -16179,7 +16085,7 @@
                 </a:solidFill>
                 <a:latin typeface="Georgia"/>
               </a:rPr>
-              <a:t>One Platform Spanning Preparation, Placement &amp; Hiring</a:t>
+              <a:t>What 51Careers.AI Delivers Today</a:t>
             </a:r>
           </a:p>
         </p:txBody>
@@ -16192,8 +16098,86 @@
         </p:nvSpPr>
         <p:spPr>
           <a:xfrm>
-            <a:off x="502920" y="1234440"/>
-            <a:ext cx="5486400" cy="4160520"/>
+            <a:off x="502920" y="1170432"/>
+            <a:ext cx="11201400" cy="640080"/>
+          </a:xfrm>
+          <a:prstGeom prst="roundRect">
+            <a:avLst>
+              <a:gd name="adj" fmla="val 8000"/>
+            </a:avLst>
+          </a:prstGeom>
+          <a:solidFill>
+            <a:srgbClr val="D7EBE8"/>
+          </a:solidFill>
+          <a:ln>
+            <a:noFill/>
+          </a:ln>
+        </p:spPr>
+        <p:style>
+          <a:lnRef idx="1">
+            <a:schemeClr val="accent1"/>
+          </a:lnRef>
+          <a:fillRef idx="3">
+            <a:schemeClr val="accent1"/>
+          </a:fillRef>
+          <a:effectRef idx="2">
+            <a:schemeClr val="accent1"/>
+          </a:effectRef>
+          <a:fontRef idx="minor">
+            <a:schemeClr val="lt1"/>
+          </a:fontRef>
+        </p:style>
+        <p:txBody>
+          <a:bodyPr rtlCol="0" anchor="ctr"/>
+          <a:lstStyle/>
+          <a:p>
+            <a:pPr algn="ctr"/>
+          </a:p>
+        </p:txBody>
+      </p:sp>
+      <p:sp>
+        <p:nvSpPr>
+          <p:cNvPr id="6" name="TextBox 5"/>
+          <p:cNvSpPr txBox="1"/>
+          <p:nvPr/>
+        </p:nvSpPr>
+        <p:spPr>
+          <a:xfrm>
+            <a:off x="685800" y="1280160"/>
+            <a:ext cx="10835640" cy="457200"/>
+          </a:xfrm>
+          <a:prstGeom prst="rect">
+            <a:avLst/>
+          </a:prstGeom>
+          <a:noFill/>
+        </p:spPr>
+        <p:txBody>
+          <a:bodyPr wrap="square" anchor="t"/>
+          <a:lstStyle/>
+          <a:p>
+            <a:pPr algn="l"/>
+            <a:r>
+              <a:rPr sz="1300" b="1" i="0">
+                <a:solidFill>
+                  <a:srgbClr val="07524C"/>
+                </a:solidFill>
+                <a:latin typeface="Segoe UI"/>
+              </a:rPr>
+              <a:t>51Careers.AI is a free AI career platform — mock interviews, a 100K+ question database, and a new AI résumé builder — designed to help professionals worldwide compete for better jobs.</a:t>
+            </a:r>
+          </a:p>
+        </p:txBody>
+      </p:sp>
+      <p:sp>
+        <p:nvSpPr>
+          <p:cNvPr id="7" name="Rounded Rectangle 6"/>
+          <p:cNvSpPr/>
+          <p:nvPr/>
+        </p:nvSpPr>
+        <p:spPr>
+          <a:xfrm>
+            <a:off x="502920" y="2011680"/>
+            <a:ext cx="2743200" cy="3200400"/>
           </a:xfrm>
           <a:prstGeom prst="roundRect">
             <a:avLst>
@@ -16233,14 +16217,14 @@
       </p:sp>
       <p:sp>
         <p:nvSpPr>
-          <p:cNvPr id="6" name="Rectangle 5"/>
+          <p:cNvPr id="8" name="Rectangle 7"/>
           <p:cNvSpPr/>
           <p:nvPr/>
         </p:nvSpPr>
         <p:spPr>
           <a:xfrm>
-            <a:off x="502920" y="1234440"/>
-            <a:ext cx="5486400" cy="457200"/>
+            <a:off x="502920" y="2011680"/>
+            <a:ext cx="2743200" cy="109728"/>
           </a:xfrm>
           <a:prstGeom prst="rect">
             <a:avLst/>
@@ -16276,311 +16260,80 @@
       </p:sp>
       <p:sp>
         <p:nvSpPr>
-          <p:cNvPr id="7" name="TextBox 6"/>
-          <p:cNvSpPr txBox="1"/>
-          <p:nvPr/>
-        </p:nvSpPr>
-        <p:spPr>
-          <a:xfrm>
-            <a:off x="685800" y="1325880"/>
-            <a:ext cx="5120640" cy="320040"/>
-          </a:xfrm>
-          <a:prstGeom prst="rect">
-            <a:avLst/>
-          </a:prstGeom>
-          <a:noFill/>
-        </p:spPr>
-        <p:txBody>
-          <a:bodyPr wrap="square" anchor="t"/>
-          <a:lstStyle/>
-          <a:p>
-            <a:pPr algn="l"/>
-            <a:r>
-              <a:rPr sz="1200" b="1" i="0">
-                <a:solidFill>
-                  <a:srgbClr val="FFFFFF"/>
+          <p:cNvPr id="9" name="TextBox 8"/>
+          <p:cNvSpPr txBox="1"/>
+          <p:nvPr/>
+        </p:nvSpPr>
+        <p:spPr>
+          <a:xfrm>
+            <a:off x="667512" y="2286000"/>
+            <a:ext cx="2423160" cy="640080"/>
+          </a:xfrm>
+          <a:prstGeom prst="rect">
+            <a:avLst/>
+          </a:prstGeom>
+          <a:noFill/>
+        </p:spPr>
+        <p:txBody>
+          <a:bodyPr wrap="square" anchor="t"/>
+          <a:lstStyle/>
+          <a:p>
+            <a:pPr algn="l"/>
+            <a:r>
+              <a:rPr sz="1500" b="1" i="0">
+                <a:solidFill>
+                  <a:srgbClr val="0B1F33"/>
+                </a:solidFill>
+                <a:latin typeface="Georgia"/>
+              </a:rPr>
+              <a:t>AI Mock Interviews</a:t>
+            </a:r>
+          </a:p>
+        </p:txBody>
+      </p:sp>
+      <p:sp>
+        <p:nvSpPr>
+          <p:cNvPr id="10" name="TextBox 9"/>
+          <p:cNvSpPr txBox="1"/>
+          <p:nvPr/>
+        </p:nvSpPr>
+        <p:spPr>
+          <a:xfrm>
+            <a:off x="667512" y="3017520"/>
+            <a:ext cx="2423160" cy="1828800"/>
+          </a:xfrm>
+          <a:prstGeom prst="rect">
+            <a:avLst/>
+          </a:prstGeom>
+          <a:noFill/>
+        </p:spPr>
+        <p:txBody>
+          <a:bodyPr wrap="square" anchor="t"/>
+          <a:lstStyle/>
+          <a:p>
+            <a:pPr algn="l"/>
+            <a:r>
+              <a:rPr sz="1200" b="0" i="0">
+                <a:solidFill>
+                  <a:srgbClr val="2C3A4B"/>
                 </a:solidFill>
                 <a:latin typeface="Segoe UI"/>
               </a:rPr>
-              <a:t>FOR CANDIDATES</a:t>
-            </a:r>
-          </a:p>
-        </p:txBody>
-      </p:sp>
-      <p:sp>
-        <p:nvSpPr>
-          <p:cNvPr id="8" name="TextBox 7"/>
-          <p:cNvSpPr txBox="1"/>
-          <p:nvPr/>
-        </p:nvSpPr>
-        <p:spPr>
-          <a:xfrm>
-            <a:off x="777240" y="1874519"/>
-            <a:ext cx="4937760" cy="274320"/>
-          </a:xfrm>
-          <a:prstGeom prst="rect">
-            <a:avLst/>
-          </a:prstGeom>
-          <a:noFill/>
-        </p:spPr>
-        <p:txBody>
-          <a:bodyPr wrap="square" anchor="t"/>
-          <a:lstStyle/>
-          <a:p>
-            <a:pPr algn="l"/>
-            <a:r>
-              <a:rPr sz="1300" b="1" i="0">
-                <a:solidFill>
-                  <a:srgbClr val="0B1F33"/>
-                </a:solidFill>
-                <a:latin typeface="Segoe UI"/>
-              </a:rPr>
-              <a:t>AI Mock Interviews</a:t>
-            </a:r>
-          </a:p>
-        </p:txBody>
-      </p:sp>
-      <p:sp>
-        <p:nvSpPr>
-          <p:cNvPr id="9" name="TextBox 8"/>
-          <p:cNvSpPr txBox="1"/>
-          <p:nvPr/>
-        </p:nvSpPr>
-        <p:spPr>
-          <a:xfrm>
-            <a:off x="777240" y="2130552"/>
-            <a:ext cx="4937760" cy="365760"/>
-          </a:xfrm>
-          <a:prstGeom prst="rect">
-            <a:avLst/>
-          </a:prstGeom>
-          <a:noFill/>
-        </p:spPr>
-        <p:txBody>
-          <a:bodyPr wrap="square" anchor="t"/>
-          <a:lstStyle/>
-          <a:p>
-            <a:pPr algn="l"/>
-            <a:r>
-              <a:rPr sz="1100" b="0" i="0">
-                <a:solidFill>
-                  <a:srgbClr val="2C3A4B"/>
-                </a:solidFill>
-                <a:latin typeface="Segoe UI"/>
-              </a:rPr>
-              <a:t>Role- and company-specific practice with personalized, real-time feedback.</a:t>
-            </a:r>
-          </a:p>
-        </p:txBody>
-      </p:sp>
-      <p:sp>
-        <p:nvSpPr>
-          <p:cNvPr id="10" name="TextBox 9"/>
-          <p:cNvSpPr txBox="1"/>
-          <p:nvPr/>
-        </p:nvSpPr>
-        <p:spPr>
-          <a:xfrm>
-            <a:off x="777240" y="2651760"/>
-            <a:ext cx="4937760" cy="274320"/>
-          </a:xfrm>
-          <a:prstGeom prst="rect">
-            <a:avLst/>
-          </a:prstGeom>
-          <a:noFill/>
-        </p:spPr>
-        <p:txBody>
-          <a:bodyPr wrap="square" anchor="t"/>
-          <a:lstStyle/>
-          <a:p>
-            <a:pPr algn="l"/>
-            <a:r>
-              <a:rPr sz="1300" b="1" i="0">
-                <a:solidFill>
-                  <a:srgbClr val="0B1F33"/>
-                </a:solidFill>
-                <a:latin typeface="Segoe UI"/>
-              </a:rPr>
-              <a:t>Question Banks &amp; Assessments</a:t>
-            </a:r>
-          </a:p>
-        </p:txBody>
-      </p:sp>
-      <p:sp>
-        <p:nvSpPr>
-          <p:cNvPr id="11" name="TextBox 10"/>
-          <p:cNvSpPr txBox="1"/>
-          <p:nvPr/>
-        </p:nvSpPr>
-        <p:spPr>
-          <a:xfrm>
-            <a:off x="777240" y="2907791"/>
-            <a:ext cx="4937760" cy="365760"/>
-          </a:xfrm>
-          <a:prstGeom prst="rect">
-            <a:avLst/>
-          </a:prstGeom>
-          <a:noFill/>
-        </p:spPr>
-        <p:txBody>
-          <a:bodyPr wrap="square" anchor="t"/>
-          <a:lstStyle/>
-          <a:p>
-            <a:pPr algn="l"/>
-            <a:r>
-              <a:rPr sz="1100" b="0" i="0">
-                <a:solidFill>
-                  <a:srgbClr val="2C3A4B"/>
-                </a:solidFill>
-                <a:latin typeface="Segoe UI"/>
-              </a:rPr>
-              <a:t>Proprietary libraries of real interview questions and timed online assessments.</a:t>
-            </a:r>
-          </a:p>
-        </p:txBody>
-      </p:sp>
-      <p:sp>
-        <p:nvSpPr>
-          <p:cNvPr id="12" name="TextBox 11"/>
-          <p:cNvSpPr txBox="1"/>
-          <p:nvPr/>
-        </p:nvSpPr>
-        <p:spPr>
-          <a:xfrm>
-            <a:off x="777240" y="3429000"/>
-            <a:ext cx="4937760" cy="274320"/>
-          </a:xfrm>
-          <a:prstGeom prst="rect">
-            <a:avLst/>
-          </a:prstGeom>
-          <a:noFill/>
-        </p:spPr>
-        <p:txBody>
-          <a:bodyPr wrap="square" anchor="t"/>
-          <a:lstStyle/>
-          <a:p>
-            <a:pPr algn="l"/>
-            <a:r>
-              <a:rPr sz="1300" b="1" i="0">
-                <a:solidFill>
-                  <a:srgbClr val="0B1F33"/>
-                </a:solidFill>
-                <a:latin typeface="Segoe UI"/>
-              </a:rPr>
-              <a:t>Mentor Coaching</a:t>
-            </a:r>
-          </a:p>
-        </p:txBody>
-      </p:sp>
-      <p:sp>
-        <p:nvSpPr>
-          <p:cNvPr id="13" name="TextBox 12"/>
-          <p:cNvSpPr txBox="1"/>
-          <p:nvPr/>
-        </p:nvSpPr>
-        <p:spPr>
-          <a:xfrm>
-            <a:off x="777240" y="3685032"/>
-            <a:ext cx="4937760" cy="365760"/>
-          </a:xfrm>
-          <a:prstGeom prst="rect">
-            <a:avLst/>
-          </a:prstGeom>
-          <a:noFill/>
-        </p:spPr>
-        <p:txBody>
-          <a:bodyPr wrap="square" anchor="t"/>
-          <a:lstStyle/>
-          <a:p>
-            <a:pPr algn="l"/>
-            <a:r>
-              <a:rPr sz="1100" b="0" i="0">
-                <a:solidFill>
-                  <a:srgbClr val="2C3A4B"/>
-                </a:solidFill>
-                <a:latin typeface="Segoe UI"/>
-              </a:rPr>
-              <a:t>One-on-one guidance from practitioners at leading global employers.</a:t>
-            </a:r>
-          </a:p>
-        </p:txBody>
-      </p:sp>
-      <p:sp>
-        <p:nvSpPr>
-          <p:cNvPr id="14" name="TextBox 13"/>
-          <p:cNvSpPr txBox="1"/>
-          <p:nvPr/>
-        </p:nvSpPr>
-        <p:spPr>
-          <a:xfrm>
-            <a:off x="777240" y="4206240"/>
-            <a:ext cx="4937760" cy="274320"/>
-          </a:xfrm>
-          <a:prstGeom prst="rect">
-            <a:avLst/>
-          </a:prstGeom>
-          <a:noFill/>
-        </p:spPr>
-        <p:txBody>
-          <a:bodyPr wrap="square" anchor="t"/>
-          <a:lstStyle/>
-          <a:p>
-            <a:pPr algn="l"/>
-            <a:r>
-              <a:rPr sz="1300" b="1" i="0">
-                <a:solidFill>
-                  <a:srgbClr val="0B1F33"/>
-                </a:solidFill>
-                <a:latin typeface="Segoe UI"/>
-              </a:rPr>
-              <a:t>Referrals &amp; Placement</a:t>
-            </a:r>
-          </a:p>
-        </p:txBody>
-      </p:sp>
-      <p:sp>
-        <p:nvSpPr>
-          <p:cNvPr id="15" name="TextBox 14"/>
-          <p:cNvSpPr txBox="1"/>
-          <p:nvPr/>
-        </p:nvSpPr>
-        <p:spPr>
-          <a:xfrm>
-            <a:off x="777240" y="4462272"/>
-            <a:ext cx="4937760" cy="365760"/>
-          </a:xfrm>
-          <a:prstGeom prst="rect">
-            <a:avLst/>
-          </a:prstGeom>
-          <a:noFill/>
-        </p:spPr>
-        <p:txBody>
-          <a:bodyPr wrap="square" anchor="t"/>
-          <a:lstStyle/>
-          <a:p>
-            <a:pPr algn="l"/>
-            <a:r>
-              <a:rPr sz="1100" b="0" i="0">
-                <a:solidFill>
-                  <a:srgbClr val="2C3A4B"/>
-                </a:solidFill>
-                <a:latin typeface="Segoe UI"/>
-              </a:rPr>
-              <a:t>Internship and full-time referral programs, including outcome-based offerings.</a:t>
-            </a:r>
-          </a:p>
-        </p:txBody>
-      </p:sp>
-      <p:sp>
-        <p:nvSpPr>
-          <p:cNvPr id="16" name="Rounded Rectangle 15"/>
+              <a:t>Role- and company-specific practice with personalized feedback powered by career-domain intelligence.</a:t>
+            </a:r>
+          </a:p>
+        </p:txBody>
+      </p:sp>
+      <p:sp>
+        <p:nvSpPr>
+          <p:cNvPr id="11" name="Rounded Rectangle 10"/>
           <p:cNvSpPr/>
           <p:nvPr/>
         </p:nvSpPr>
         <p:spPr>
           <a:xfrm>
-            <a:off x="6217920" y="1234440"/>
-            <a:ext cx="5486400" cy="4160520"/>
+            <a:off x="3383280" y="2011680"/>
+            <a:ext cx="2743200" cy="3200400"/>
           </a:xfrm>
           <a:prstGeom prst="roundRect">
             <a:avLst>
@@ -16620,14 +16373,14 @@
       </p:sp>
       <p:sp>
         <p:nvSpPr>
-          <p:cNvPr id="17" name="Rectangle 16"/>
+          <p:cNvPr id="12" name="Rectangle 11"/>
           <p:cNvSpPr/>
           <p:nvPr/>
         </p:nvSpPr>
         <p:spPr>
           <a:xfrm>
-            <a:off x="6217920" y="1234440"/>
-            <a:ext cx="5486400" cy="457200"/>
+            <a:off x="3383280" y="2011680"/>
+            <a:ext cx="2743200" cy="109728"/>
           </a:xfrm>
           <a:prstGeom prst="rect">
             <a:avLst/>
@@ -16663,245 +16416,80 @@
       </p:sp>
       <p:sp>
         <p:nvSpPr>
-          <p:cNvPr id="18" name="TextBox 17"/>
-          <p:cNvSpPr txBox="1"/>
-          <p:nvPr/>
-        </p:nvSpPr>
-        <p:spPr>
-          <a:xfrm>
-            <a:off x="6400800" y="1325880"/>
-            <a:ext cx="5120640" cy="320040"/>
-          </a:xfrm>
-          <a:prstGeom prst="rect">
-            <a:avLst/>
-          </a:prstGeom>
-          <a:noFill/>
-        </p:spPr>
-        <p:txBody>
-          <a:bodyPr wrap="square" anchor="t"/>
-          <a:lstStyle/>
-          <a:p>
-            <a:pPr algn="l"/>
-            <a:r>
-              <a:rPr sz="1200" b="1" i="0">
-                <a:solidFill>
-                  <a:srgbClr val="FFFFFF"/>
+          <p:cNvPr id="13" name="TextBox 12"/>
+          <p:cNvSpPr txBox="1"/>
+          <p:nvPr/>
+        </p:nvSpPr>
+        <p:spPr>
+          <a:xfrm>
+            <a:off x="3547872" y="2286000"/>
+            <a:ext cx="2423160" cy="640080"/>
+          </a:xfrm>
+          <a:prstGeom prst="rect">
+            <a:avLst/>
+          </a:prstGeom>
+          <a:noFill/>
+        </p:spPr>
+        <p:txBody>
+          <a:bodyPr wrap="square" anchor="t"/>
+          <a:lstStyle/>
+          <a:p>
+            <a:pPr algn="l"/>
+            <a:r>
+              <a:rPr sz="1500" b="1" i="0">
+                <a:solidFill>
+                  <a:srgbClr val="0B1F33"/>
+                </a:solidFill>
+                <a:latin typeface="Georgia"/>
+              </a:rPr>
+              <a:t>100K+ Question Database</a:t>
+            </a:r>
+          </a:p>
+        </p:txBody>
+      </p:sp>
+      <p:sp>
+        <p:nvSpPr>
+          <p:cNvPr id="14" name="TextBox 13"/>
+          <p:cNvSpPr txBox="1"/>
+          <p:nvPr/>
+        </p:nvSpPr>
+        <p:spPr>
+          <a:xfrm>
+            <a:off x="3547872" y="3017520"/>
+            <a:ext cx="2423160" cy="1828800"/>
+          </a:xfrm>
+          <a:prstGeom prst="rect">
+            <a:avLst/>
+          </a:prstGeom>
+          <a:noFill/>
+        </p:spPr>
+        <p:txBody>
+          <a:bodyPr wrap="square" anchor="t"/>
+          <a:lstStyle/>
+          <a:p>
+            <a:pPr algn="l"/>
+            <a:r>
+              <a:rPr sz="1200" b="0" i="0">
+                <a:solidFill>
+                  <a:srgbClr val="2C3A4B"/>
                 </a:solidFill>
                 <a:latin typeface="Segoe UI"/>
               </a:rPr>
-              <a:t>FOR EMPLOYERS</a:t>
-            </a:r>
-          </a:p>
-        </p:txBody>
-      </p:sp>
-      <p:sp>
-        <p:nvSpPr>
-          <p:cNvPr id="19" name="TextBox 18"/>
-          <p:cNvSpPr txBox="1"/>
-          <p:nvPr/>
-        </p:nvSpPr>
-        <p:spPr>
-          <a:xfrm>
-            <a:off x="6492240" y="1965960"/>
-            <a:ext cx="4937760" cy="274320"/>
-          </a:xfrm>
-          <a:prstGeom prst="rect">
-            <a:avLst/>
-          </a:prstGeom>
-          <a:noFill/>
-        </p:spPr>
-        <p:txBody>
-          <a:bodyPr wrap="square" anchor="t"/>
-          <a:lstStyle/>
-          <a:p>
-            <a:pPr algn="l"/>
-            <a:r>
-              <a:rPr sz="1300" b="1" i="0">
-                <a:solidFill>
-                  <a:srgbClr val="0B1F33"/>
-                </a:solidFill>
-                <a:latin typeface="Segoe UI"/>
-              </a:rPr>
-              <a:t>AI Candidate Screening</a:t>
-            </a:r>
-          </a:p>
-        </p:txBody>
-      </p:sp>
-      <p:sp>
-        <p:nvSpPr>
-          <p:cNvPr id="20" name="TextBox 19"/>
-          <p:cNvSpPr txBox="1"/>
-          <p:nvPr/>
-        </p:nvSpPr>
-        <p:spPr>
-          <a:xfrm>
-            <a:off x="6492240" y="2221991"/>
-            <a:ext cx="4937760" cy="411480"/>
-          </a:xfrm>
-          <a:prstGeom prst="rect">
-            <a:avLst/>
-          </a:prstGeom>
-          <a:noFill/>
-        </p:spPr>
-        <p:txBody>
-          <a:bodyPr wrap="square" anchor="t"/>
-          <a:lstStyle/>
-          <a:p>
-            <a:pPr algn="l"/>
-            <a:r>
-              <a:rPr sz="1100" b="0" i="0">
-                <a:solidFill>
-                  <a:srgbClr val="2C3A4B"/>
-                </a:solidFill>
-                <a:latin typeface="Segoe UI"/>
-              </a:rPr>
-              <a:t>Semantic evaluation of fit, capability, and readiness at scale.</a:t>
-            </a:r>
-          </a:p>
-        </p:txBody>
-      </p:sp>
-      <p:sp>
-        <p:nvSpPr>
-          <p:cNvPr id="21" name="TextBox 20"/>
-          <p:cNvSpPr txBox="1"/>
-          <p:nvPr/>
-        </p:nvSpPr>
-        <p:spPr>
-          <a:xfrm>
-            <a:off x="6492240" y="2880360"/>
-            <a:ext cx="4937760" cy="274320"/>
-          </a:xfrm>
-          <a:prstGeom prst="rect">
-            <a:avLst/>
-          </a:prstGeom>
-          <a:noFill/>
-        </p:spPr>
-        <p:txBody>
-          <a:bodyPr wrap="square" anchor="t"/>
-          <a:lstStyle/>
-          <a:p>
-            <a:pPr algn="l"/>
-            <a:r>
-              <a:rPr sz="1300" b="1" i="0">
-                <a:solidFill>
-                  <a:srgbClr val="0B1F33"/>
-                </a:solidFill>
-                <a:latin typeface="Segoe UI"/>
-              </a:rPr>
-              <a:t>Job Posting Optimization</a:t>
-            </a:r>
-          </a:p>
-        </p:txBody>
-      </p:sp>
-      <p:sp>
-        <p:nvSpPr>
-          <p:cNvPr id="22" name="TextBox 21"/>
-          <p:cNvSpPr txBox="1"/>
-          <p:nvPr/>
-        </p:nvSpPr>
-        <p:spPr>
-          <a:xfrm>
-            <a:off x="6492240" y="3136391"/>
-            <a:ext cx="4937760" cy="411480"/>
-          </a:xfrm>
-          <a:prstGeom prst="rect">
-            <a:avLst/>
-          </a:prstGeom>
-          <a:noFill/>
-        </p:spPr>
-        <p:txBody>
-          <a:bodyPr wrap="square" anchor="t"/>
-          <a:lstStyle/>
-          <a:p>
-            <a:pPr algn="l"/>
-            <a:r>
-              <a:rPr sz="1100" b="0" i="0">
-                <a:solidFill>
-                  <a:srgbClr val="2C3A4B"/>
-                </a:solidFill>
-                <a:latin typeface="Segoe UI"/>
-              </a:rPr>
-              <a:t>AI-assisted role definition and sourcing precision.</a:t>
-            </a:r>
-          </a:p>
-        </p:txBody>
-      </p:sp>
-      <p:sp>
-        <p:nvSpPr>
-          <p:cNvPr id="23" name="TextBox 22"/>
-          <p:cNvSpPr txBox="1"/>
-          <p:nvPr/>
-        </p:nvSpPr>
-        <p:spPr>
-          <a:xfrm>
-            <a:off x="6492240" y="3794760"/>
-            <a:ext cx="4937760" cy="274320"/>
-          </a:xfrm>
-          <a:prstGeom prst="rect">
-            <a:avLst/>
-          </a:prstGeom>
-          <a:noFill/>
-        </p:spPr>
-        <p:txBody>
-          <a:bodyPr wrap="square" anchor="t"/>
-          <a:lstStyle/>
-          <a:p>
-            <a:pPr algn="l"/>
-            <a:r>
-              <a:rPr sz="1300" b="1" i="0">
-                <a:solidFill>
-                  <a:srgbClr val="0B1F33"/>
-                </a:solidFill>
-                <a:latin typeface="Segoe UI"/>
-              </a:rPr>
-              <a:t>Talent Evaluation</a:t>
-            </a:r>
-          </a:p>
-        </p:txBody>
-      </p:sp>
-      <p:sp>
-        <p:nvSpPr>
-          <p:cNvPr id="24" name="TextBox 23"/>
-          <p:cNvSpPr txBox="1"/>
-          <p:nvPr/>
-        </p:nvSpPr>
-        <p:spPr>
-          <a:xfrm>
-            <a:off x="6492240" y="4050792"/>
-            <a:ext cx="4937760" cy="411480"/>
-          </a:xfrm>
-          <a:prstGeom prst="rect">
-            <a:avLst/>
-          </a:prstGeom>
-          <a:noFill/>
-        </p:spPr>
-        <p:txBody>
-          <a:bodyPr wrap="square" anchor="t"/>
-          <a:lstStyle/>
-          <a:p>
-            <a:pPr algn="l"/>
-            <a:r>
-              <a:rPr sz="1100" b="0" i="0">
-                <a:solidFill>
-                  <a:srgbClr val="2C3A4B"/>
-                </a:solidFill>
-                <a:latin typeface="Segoe UI"/>
-              </a:rPr>
-              <a:t>Structured assessment and interview analytics for confident decisions.</a:t>
-            </a:r>
-          </a:p>
-        </p:txBody>
-      </p:sp>
-      <p:sp>
-        <p:nvSpPr>
-          <p:cNvPr id="25" name="Rounded Rectangle 24"/>
+              <a:t>Proprietary library of real interview questions built from years of coaching and candidate preparation.</a:t>
+            </a:r>
+          </a:p>
+        </p:txBody>
+      </p:sp>
+      <p:sp>
+        <p:nvSpPr>
+          <p:cNvPr id="15" name="Rounded Rectangle 14"/>
           <p:cNvSpPr/>
           <p:nvPr/>
         </p:nvSpPr>
         <p:spPr>
           <a:xfrm>
-            <a:off x="502920" y="5532120"/>
-            <a:ext cx="11201400" cy="502920"/>
+            <a:off x="6263640" y="2011680"/>
+            <a:ext cx="2743200" cy="3200400"/>
           </a:xfrm>
           <a:prstGeom prst="roundRect">
             <a:avLst>
@@ -16909,10 +16497,12 @@
             </a:avLst>
           </a:prstGeom>
           <a:solidFill>
-            <a:srgbClr val="D7EBE8"/>
+            <a:srgbClr val="FFFFFF"/>
           </a:solidFill>
-          <a:ln>
-            <a:noFill/>
+          <a:ln w="12700">
+            <a:solidFill>
+              <a:srgbClr val="D4DEE8"/>
+            </a:solidFill>
           </a:ln>
         </p:spPr>
         <p:style>
@@ -16939,40 +16529,352 @@
       </p:sp>
       <p:sp>
         <p:nvSpPr>
-          <p:cNvPr id="26" name="TextBox 25"/>
-          <p:cNvSpPr txBox="1"/>
-          <p:nvPr/>
-        </p:nvSpPr>
-        <p:spPr>
-          <a:xfrm>
-            <a:off x="685800" y="5623560"/>
-            <a:ext cx="10789920" cy="365760"/>
-          </a:xfrm>
-          <a:prstGeom prst="rect">
-            <a:avLst/>
-          </a:prstGeom>
-          <a:noFill/>
-        </p:spPr>
-        <p:txBody>
-          <a:bodyPr wrap="square" anchor="t"/>
-          <a:lstStyle/>
-          <a:p>
-            <a:pPr algn="l"/>
-            <a:r>
-              <a:rPr sz="1100" b="1" i="0">
-                <a:solidFill>
-                  <a:srgbClr val="07524C"/>
+          <p:cNvPr id="16" name="Rectangle 15"/>
+          <p:cNvSpPr/>
+          <p:nvPr/>
+        </p:nvSpPr>
+        <p:spPr>
+          <a:xfrm>
+            <a:off x="6263640" y="2011680"/>
+            <a:ext cx="2743200" cy="109728"/>
+          </a:xfrm>
+          <a:prstGeom prst="rect">
+            <a:avLst/>
+          </a:prstGeom>
+          <a:solidFill>
+            <a:srgbClr val="8A6D3B"/>
+          </a:solidFill>
+          <a:ln>
+            <a:noFill/>
+          </a:ln>
+        </p:spPr>
+        <p:style>
+          <a:lnRef idx="1">
+            <a:schemeClr val="accent1"/>
+          </a:lnRef>
+          <a:fillRef idx="3">
+            <a:schemeClr val="accent1"/>
+          </a:fillRef>
+          <a:effectRef idx="2">
+            <a:schemeClr val="accent1"/>
+          </a:effectRef>
+          <a:fontRef idx="minor">
+            <a:schemeClr val="lt1"/>
+          </a:fontRef>
+        </p:style>
+        <p:txBody>
+          <a:bodyPr rtlCol="0" anchor="ctr"/>
+          <a:lstStyle/>
+          <a:p>
+            <a:pPr algn="ctr"/>
+          </a:p>
+        </p:txBody>
+      </p:sp>
+      <p:sp>
+        <p:nvSpPr>
+          <p:cNvPr id="17" name="TextBox 16"/>
+          <p:cNvSpPr txBox="1"/>
+          <p:nvPr/>
+        </p:nvSpPr>
+        <p:spPr>
+          <a:xfrm>
+            <a:off x="6428231" y="2286000"/>
+            <a:ext cx="2423160" cy="640080"/>
+          </a:xfrm>
+          <a:prstGeom prst="rect">
+            <a:avLst/>
+          </a:prstGeom>
+          <a:noFill/>
+        </p:spPr>
+        <p:txBody>
+          <a:bodyPr wrap="square" anchor="t"/>
+          <a:lstStyle/>
+          <a:p>
+            <a:pPr algn="l"/>
+            <a:r>
+              <a:rPr sz="1500" b="1" i="0">
+                <a:solidFill>
+                  <a:srgbClr val="0B1F33"/>
+                </a:solidFill>
+                <a:latin typeface="Georgia"/>
+              </a:rPr>
+              <a:t>AI Résumé Builder</a:t>
+            </a:r>
+          </a:p>
+        </p:txBody>
+      </p:sp>
+      <p:sp>
+        <p:nvSpPr>
+          <p:cNvPr id="18" name="TextBox 17"/>
+          <p:cNvSpPr txBox="1"/>
+          <p:nvPr/>
+        </p:nvSpPr>
+        <p:spPr>
+          <a:xfrm>
+            <a:off x="6428231" y="3017520"/>
+            <a:ext cx="2423160" cy="1828800"/>
+          </a:xfrm>
+          <a:prstGeom prst="rect">
+            <a:avLst/>
+          </a:prstGeom>
+          <a:noFill/>
+        </p:spPr>
+        <p:txBody>
+          <a:bodyPr wrap="square" anchor="t"/>
+          <a:lstStyle/>
+          <a:p>
+            <a:pPr algn="l"/>
+            <a:r>
+              <a:rPr sz="1200" b="0" i="0">
+                <a:solidFill>
+                  <a:srgbClr val="2C3A4B"/>
                 </a:solidFill>
                 <a:latin typeface="Segoe UI"/>
               </a:rPr>
-              <a:t>The flywheel: candidate outcomes generate proprietary data that sharpens matching and screening for employers — a compounding advantage on both sides of the market.</a:t>
-            </a:r>
-          </a:p>
-        </p:txBody>
-      </p:sp>
-      <p:sp>
-        <p:nvSpPr>
-          <p:cNvPr id="27" name="Rectangle 26"/>
+              <a:t>New AI feature that drafts and refines résumés tailored to roles, industries, and hiring expectations.</a:t>
+            </a:r>
+          </a:p>
+        </p:txBody>
+      </p:sp>
+      <p:sp>
+        <p:nvSpPr>
+          <p:cNvPr id="19" name="Rounded Rectangle 18"/>
+          <p:cNvSpPr/>
+          <p:nvPr/>
+        </p:nvSpPr>
+        <p:spPr>
+          <a:xfrm>
+            <a:off x="9144000" y="2011680"/>
+            <a:ext cx="2743200" cy="3200400"/>
+          </a:xfrm>
+          <a:prstGeom prst="roundRect">
+            <a:avLst>
+              <a:gd name="adj" fmla="val 8000"/>
+            </a:avLst>
+          </a:prstGeom>
+          <a:solidFill>
+            <a:srgbClr val="FFFFFF"/>
+          </a:solidFill>
+          <a:ln w="12700">
+            <a:solidFill>
+              <a:srgbClr val="D4DEE8"/>
+            </a:solidFill>
+          </a:ln>
+        </p:spPr>
+        <p:style>
+          <a:lnRef idx="1">
+            <a:schemeClr val="accent1"/>
+          </a:lnRef>
+          <a:fillRef idx="3">
+            <a:schemeClr val="accent1"/>
+          </a:fillRef>
+          <a:effectRef idx="2">
+            <a:schemeClr val="accent1"/>
+          </a:effectRef>
+          <a:fontRef idx="minor">
+            <a:schemeClr val="lt1"/>
+          </a:fontRef>
+        </p:style>
+        <p:txBody>
+          <a:bodyPr rtlCol="0" anchor="ctr"/>
+          <a:lstStyle/>
+          <a:p>
+            <a:pPr algn="ctr"/>
+          </a:p>
+        </p:txBody>
+      </p:sp>
+      <p:sp>
+        <p:nvSpPr>
+          <p:cNvPr id="20" name="Rectangle 19"/>
+          <p:cNvSpPr/>
+          <p:nvPr/>
+        </p:nvSpPr>
+        <p:spPr>
+          <a:xfrm>
+            <a:off x="9144000" y="2011680"/>
+            <a:ext cx="2743200" cy="109728"/>
+          </a:xfrm>
+          <a:prstGeom prst="rect">
+            <a:avLst/>
+          </a:prstGeom>
+          <a:solidFill>
+            <a:srgbClr val="6B7C8F"/>
+          </a:solidFill>
+          <a:ln>
+            <a:noFill/>
+          </a:ln>
+        </p:spPr>
+        <p:style>
+          <a:lnRef idx="1">
+            <a:schemeClr val="accent1"/>
+          </a:lnRef>
+          <a:fillRef idx="3">
+            <a:schemeClr val="accent1"/>
+          </a:fillRef>
+          <a:effectRef idx="2">
+            <a:schemeClr val="accent1"/>
+          </a:effectRef>
+          <a:fontRef idx="minor">
+            <a:schemeClr val="lt1"/>
+          </a:fontRef>
+        </p:style>
+        <p:txBody>
+          <a:bodyPr rtlCol="0" anchor="ctr"/>
+          <a:lstStyle/>
+          <a:p>
+            <a:pPr algn="ctr"/>
+          </a:p>
+        </p:txBody>
+      </p:sp>
+      <p:sp>
+        <p:nvSpPr>
+          <p:cNvPr id="21" name="TextBox 20"/>
+          <p:cNvSpPr txBox="1"/>
+          <p:nvPr/>
+        </p:nvSpPr>
+        <p:spPr>
+          <a:xfrm>
+            <a:off x="9308592" y="2286000"/>
+            <a:ext cx="2423160" cy="640080"/>
+          </a:xfrm>
+          <a:prstGeom prst="rect">
+            <a:avLst/>
+          </a:prstGeom>
+          <a:noFill/>
+        </p:spPr>
+        <p:txBody>
+          <a:bodyPr wrap="square" anchor="t"/>
+          <a:lstStyle/>
+          <a:p>
+            <a:pPr algn="l"/>
+            <a:r>
+              <a:rPr sz="1500" b="1" i="0">
+                <a:solidFill>
+                  <a:srgbClr val="0B1F33"/>
+                </a:solidFill>
+                <a:latin typeface="Georgia"/>
+              </a:rPr>
+              <a:t>Career Pathways</a:t>
+            </a:r>
+          </a:p>
+        </p:txBody>
+      </p:sp>
+      <p:sp>
+        <p:nvSpPr>
+          <p:cNvPr id="22" name="TextBox 21"/>
+          <p:cNvSpPr txBox="1"/>
+          <p:nvPr/>
+        </p:nvSpPr>
+        <p:spPr>
+          <a:xfrm>
+            <a:off x="9308592" y="3017520"/>
+            <a:ext cx="2423160" cy="1828800"/>
+          </a:xfrm>
+          <a:prstGeom prst="rect">
+            <a:avLst/>
+          </a:prstGeom>
+          <a:noFill/>
+        </p:spPr>
+        <p:txBody>
+          <a:bodyPr wrap="square" anchor="t"/>
+          <a:lstStyle/>
+          <a:p>
+            <a:pPr algn="l"/>
+            <a:r>
+              <a:rPr sz="1200" b="0" i="0">
+                <a:solidFill>
+                  <a:srgbClr val="2C3A4B"/>
+                </a:solidFill>
+                <a:latin typeface="Segoe UI"/>
+              </a:rPr>
+              <a:t>Coaching and education pathways ready to monetize via membership, consulting, and education fees.</a:t>
+            </a:r>
+          </a:p>
+        </p:txBody>
+      </p:sp>
+      <p:sp>
+        <p:nvSpPr>
+          <p:cNvPr id="23" name="Rounded Rectangle 22"/>
+          <p:cNvSpPr/>
+          <p:nvPr/>
+        </p:nvSpPr>
+        <p:spPr>
+          <a:xfrm>
+            <a:off x="502920" y="5394960"/>
+            <a:ext cx="11201400" cy="640080"/>
+          </a:xfrm>
+          <a:prstGeom prst="roundRect">
+            <a:avLst>
+              <a:gd name="adj" fmla="val 8000"/>
+            </a:avLst>
+          </a:prstGeom>
+          <a:solidFill>
+            <a:srgbClr val="FFFFFF"/>
+          </a:solidFill>
+          <a:ln w="12700">
+            <a:solidFill>
+              <a:srgbClr val="D4DEE8"/>
+            </a:solidFill>
+          </a:ln>
+        </p:spPr>
+        <p:style>
+          <a:lnRef idx="1">
+            <a:schemeClr val="accent1"/>
+          </a:lnRef>
+          <a:fillRef idx="3">
+            <a:schemeClr val="accent1"/>
+          </a:fillRef>
+          <a:effectRef idx="2">
+            <a:schemeClr val="accent1"/>
+          </a:effectRef>
+          <a:fontRef idx="minor">
+            <a:schemeClr val="lt1"/>
+          </a:fontRef>
+        </p:style>
+        <p:txBody>
+          <a:bodyPr rtlCol="0" anchor="ctr"/>
+          <a:lstStyle/>
+          <a:p>
+            <a:pPr algn="ctr"/>
+          </a:p>
+        </p:txBody>
+      </p:sp>
+      <p:sp>
+        <p:nvSpPr>
+          <p:cNvPr id="24" name="TextBox 23"/>
+          <p:cNvSpPr txBox="1"/>
+          <p:nvPr/>
+        </p:nvSpPr>
+        <p:spPr>
+          <a:xfrm>
+            <a:off x="685800" y="5532120"/>
+            <a:ext cx="10835640" cy="411480"/>
+          </a:xfrm>
+          <a:prstGeom prst="rect">
+            <a:avLst/>
+          </a:prstGeom>
+          <a:noFill/>
+        </p:spPr>
+        <p:txBody>
+          <a:bodyPr wrap="square" anchor="t"/>
+          <a:lstStyle/>
+          <a:p>
+            <a:pPr algn="l"/>
+            <a:r>
+              <a:rPr sz="1300" b="1" i="0">
+                <a:solidFill>
+                  <a:srgbClr val="0B1F33"/>
+                </a:solidFill>
+                <a:latin typeface="Segoe UI"/>
+              </a:rPr>
+              <a:t>Pricing today: Free  ·  Next: membership tiers · consulting fees · education fees as active users scale globally</a:t>
+            </a:r>
+          </a:p>
+        </p:txBody>
+      </p:sp>
+      <p:sp>
+        <p:nvSpPr>
+          <p:cNvPr id="25" name="Rectangle 24"/>
           <p:cNvSpPr/>
           <p:nvPr/>
         </p:nvSpPr>
@@ -17015,7 +16917,7 @@
       </p:sp>
       <p:sp>
         <p:nvSpPr>
-          <p:cNvPr id="28" name="Rectangle 27"/>
+          <p:cNvPr id="26" name="Rectangle 25"/>
           <p:cNvSpPr/>
           <p:nvPr/>
         </p:nvSpPr>
@@ -17058,7 +16960,7 @@
       </p:sp>
       <p:sp>
         <p:nvSpPr>
-          <p:cNvPr id="29" name="TextBox 28"/>
+          <p:cNvPr id="27" name="TextBox 26"/>
           <p:cNvSpPr txBox="1"/>
           <p:nvPr/>
         </p:nvSpPr>
@@ -17091,7 +16993,7 @@
       </p:sp>
       <p:sp>
         <p:nvSpPr>
-          <p:cNvPr id="30" name="TextBox 29"/>
+          <p:cNvPr id="28" name="TextBox 27"/>
           <p:cNvSpPr txBox="1"/>
           <p:nvPr/>
         </p:nvSpPr>
@@ -17575,7 +17477,7 @@
                 </a:solidFill>
                 <a:latin typeface="Segoe UI"/>
               </a:rPr>
-              <a:t>A decade of accumulated interview questions, outcome-labeled placement data, and mentor feedback loops — assets that generic models and job boards cannot readily replicate.</a:t>
+              <a:t>100K+ proprietary interview questions and eight years of candidate-prep insight — assets that general-purpose models like ChatGPT or Gemini cannot readily replicate.</a:t>
             </a:r>
           </a:p>
         </p:txBody>
@@ -17764,7 +17666,7 @@
                 </a:solidFill>
                 <a:latin typeface="Segoe UI"/>
               </a:rPr>
-              <a:t>Mock Interviews · Career Advisor · Matching · Screening</a:t>
+              <a:t>Mock Interviews · AI Résumé Builder · Career Advisor · Question Bank</a:t>
             </a:r>
           </a:p>
         </p:txBody>
@@ -18076,7 +17978,7 @@
                 </a:solidFill>
                 <a:latin typeface="Segoe UI"/>
               </a:rPr>
-              <a:t>Proprietary question corpus · Outcome data · Alibaba Cloud</a:t>
+              <a:t>100K+ question corpus · 8-year coaching data · Alibaba Cloud</a:t>
             </a:r>
           </a:p>
         </p:txBody>
@@ -18363,7 +18265,7 @@
                 </a:solidFill>
                 <a:latin typeface="Georgia"/>
               </a:rPr>
-              <a:t>Diversified, Outcome-Aligned Revenue</a:t>
+              <a:t>Free Today — Paid as Users Scale</a:t>
             </a:r>
           </a:p>
         </p:txBody>
@@ -18486,7 +18388,7 @@
                 </a:solidFill>
                 <a:latin typeface="Segoe UI"/>
               </a:rPr>
-              <a:t>01 · CONSUMER PLATFORM</a:t>
+              <a:t>01 · TODAY</a:t>
             </a:r>
           </a:p>
         </p:txBody>
@@ -18519,7 +18421,7 @@
                 </a:solidFill>
                 <a:latin typeface="Georgia"/>
               </a:rPr>
-              <a:t>Subscriptions &amp; Prep</a:t>
+              <a:t>Free Platform</a:t>
             </a:r>
           </a:p>
         </p:txBody>
@@ -18552,7 +18454,7 @@
                 </a:solidFill>
                 <a:latin typeface="Segoe UI"/>
               </a:rPr>
-              <a:t>Self-serve AI interview practice, question banks, and assessments sold as subscriptions and credit packs.</a:t>
+              <a:t>51Careers.AI is free to maximize active users: AI mock interviews, the 100K+ question bank, and the new AI résumé builder.</a:t>
             </a:r>
           </a:p>
         </p:txBody>
@@ -18585,7 +18487,7 @@
                 </a:solidFill>
                 <a:latin typeface="Segoe UI"/>
               </a:rPr>
-              <a:t>Recurring · High margin · Scales globally</a:t>
+              <a:t>Acquire · Engage · Build habit</a:t>
             </a:r>
           </a:p>
         </p:txBody>
@@ -18708,7 +18610,7 @@
                 </a:solidFill>
                 <a:latin typeface="Segoe UI"/>
               </a:rPr>
-              <a:t>02 · PREMIUM SERVICES</a:t>
+              <a:t>02 · NEXT</a:t>
             </a:r>
           </a:p>
         </p:txBody>
@@ -18741,7 +18643,7 @@
                 </a:solidFill>
                 <a:latin typeface="Georgia"/>
               </a:rPr>
-              <a:t>Coaching &amp; Placement</a:t>
+              <a:t>Membership Fees</a:t>
             </a:r>
           </a:p>
         </p:txBody>
@@ -18774,7 +18676,7 @@
                 </a:solidFill>
                 <a:latin typeface="Segoe UI"/>
               </a:rPr>
-              <a:t>Mentor-led programs and outcome-based placement offerings — the Company’s proven, high-ARPU franchise since 2016.</a:t>
+              <a:t>Tiered memberships unlock advanced practice, premium résumé tools, deeper question packs, and progress analytics.</a:t>
             </a:r>
           </a:p>
         </p:txBody>
@@ -18807,7 +18709,7 @@
                 </a:solidFill>
                 <a:latin typeface="Segoe UI"/>
               </a:rPr>
-              <a:t>High ARPU · Proven demand · Cash generative</a:t>
+              <a:t>Recurring · Scalable · Global</a:t>
             </a:r>
           </a:p>
         </p:txBody>
@@ -18930,7 +18832,7 @@
                 </a:solidFill>
                 <a:latin typeface="Segoe UI"/>
               </a:rPr>
-              <a:t>03 · ENTERPRISE &amp; INSTITUTIONS</a:t>
+              <a:t>03 · EXPAND</a:t>
             </a:r>
           </a:p>
         </p:txBody>
@@ -18963,7 +18865,7 @@
                 </a:solidFill>
                 <a:latin typeface="Georgia"/>
               </a:rPr>
-              <a:t>Employer SaaS</a:t>
+              <a:t>Consulting &amp; Education</a:t>
             </a:r>
           </a:p>
         </p:txBody>
@@ -18996,7 +18898,7 @@
                 </a:solidFill>
                 <a:latin typeface="Segoe UI"/>
               </a:rPr>
-              <a:t>AI screening, talent evaluation, and posting optimization for employers; partnerships with universities and institutions.</a:t>
+              <a:t>Higher-ARPU consulting, coaching, and education programs for users who want human guidance and structured career curricula.</a:t>
             </a:r>
           </a:p>
         </p:txBody>
@@ -19029,7 +18931,7 @@
                 </a:solidFill>
                 <a:latin typeface="Segoe UI"/>
               </a:rPr>
-              <a:t>B2B · Land-and-expand · Data flywheel</a:t>
+              <a:t>High ARPU · Proven demand</a:t>
             </a:r>
           </a:p>
         </p:txBody>
@@ -19090,7 +18992,7 @@
         <p:spPr>
           <a:xfrm>
             <a:off x="685800" y="4160520"/>
-            <a:ext cx="4572000" cy="274320"/>
+            <a:ext cx="5486400" cy="274320"/>
           </a:xfrm>
           <a:prstGeom prst="rect">
             <a:avLst/>
@@ -19109,7 +19011,7 @@
                 </a:solidFill>
                 <a:latin typeface="Segoe UI"/>
               </a:rPr>
-              <a:t>Illustrative revenue mix evolution (%)</a:t>
+              <a:t>Illustrative monetization mix once paid conversion begins (%)</a:t>
             </a:r>
           </a:p>
         </p:txBody>
@@ -19140,8 +19042,8 @@
         </p:nvSpPr>
         <p:spPr>
           <a:xfrm>
-            <a:off x="8321040" y="4709160"/>
-            <a:ext cx="3108960" cy="1097280"/>
+            <a:off x="8321040" y="4663440"/>
+            <a:ext cx="3108960" cy="1188720"/>
           </a:xfrm>
           <a:prstGeom prst="rect">
             <a:avLst/>
@@ -19164,7 +19066,7 @@
                 </a:solidFill>
                 <a:latin typeface="Segoe UI"/>
               </a:rPr>
-              <a:t>Model evolution</a:t>
+              <a:t>Path to revenue</a:t>
             </a:r>
           </a:p>
           <a:p>
@@ -19176,7 +19078,7 @@
                 </a:solidFill>
                 <a:latin typeface="Segoe UI"/>
               </a:rPr>
-              <a:t>Services-led today → blended by 2027 → software-led by 2029, expanding gross margin as the platform scales.</a:t>
+              <a:t>Platform revenue is US$0 today. Grow active users on free access, then introduce membership, consulting, and education fees.</a:t>
             </a:r>
           </a:p>
         </p:txBody>
@@ -19463,7 +19365,7 @@
                 </a:solidFill>
                 <a:latin typeface="Georgia"/>
               </a:rPr>
-              <a:t>A Real Business, Not a Concept</a:t>
+              <a:t>Built on Real Candidate Outcomes</a:t>
             </a:r>
           </a:p>
         </p:txBody>
@@ -19537,13 +19439,13 @@
           <a:p>
             <a:pPr algn="l"/>
             <a:r>
-              <a:rPr sz="2600" b="1" i="0">
+              <a:rPr sz="2400" b="1" i="0">
                 <a:solidFill>
                   <a:srgbClr val="0B1F33"/>
                 </a:solidFill>
                 <a:latin typeface="Georgia"/>
               </a:rPr>
-              <a:t>10 yrs</a:t>
+              <a:t>10,000+</a:t>
             </a:r>
           </a:p>
         </p:txBody>
@@ -19576,7 +19478,7 @@
                 </a:solidFill>
                 <a:latin typeface="Segoe UI"/>
               </a:rPr>
-              <a:t>OPERATING HISTORY SINCE 2016</a:t>
+              <a:t>CANDIDATES HELPED · 8 YEARS</a:t>
             </a:r>
           </a:p>
         </p:txBody>
@@ -19650,13 +19552,13 @@
           <a:p>
             <a:pPr algn="l"/>
             <a:r>
-              <a:rPr sz="2600" b="1" i="0">
+              <a:rPr sz="2400" b="1" i="0">
                 <a:solidFill>
                   <a:srgbClr val="0B1F33"/>
                 </a:solidFill>
                 <a:latin typeface="Georgia"/>
               </a:rPr>
-              <a:t>US$10M+</a:t>
+              <a:t>100K+</a:t>
             </a:r>
           </a:p>
         </p:txBody>
@@ -19689,7 +19591,7 @@
                 </a:solidFill>
                 <a:latin typeface="Segoe UI"/>
               </a:rPr>
-              <a:t>ANNUAL REVENUE (2025, EST.)†</a:t>
+              <a:t>MOCK INTERVIEW QUESTIONS</a:t>
             </a:r>
           </a:p>
         </p:txBody>
@@ -19763,13 +19665,13 @@
           <a:p>
             <a:pPr algn="l"/>
             <a:r>
-              <a:rPr sz="2600" b="1" i="0">
+              <a:rPr sz="2400" b="1" i="0">
                 <a:solidFill>
                   <a:srgbClr val="0B1F33"/>
                 </a:solidFill>
                 <a:latin typeface="Georgia"/>
               </a:rPr>
-              <a:t>≈50</a:t>
+              <a:t>2025</a:t>
             </a:r>
           </a:p>
         </p:txBody>
@@ -19802,7 +19704,7 @@
                 </a:solidFill>
                 <a:latin typeface="Segoe UI"/>
               </a:rPr>
-              <a:t>PROFESSIONALS WORLDWIDE†</a:t>
+              <a:t>AI PLATFORM LAUNCH</a:t>
             </a:r>
           </a:p>
         </p:txBody>
@@ -19876,13 +19778,13 @@
           <a:p>
             <a:pPr algn="l"/>
             <a:r>
-              <a:rPr sz="2600" b="1" i="0">
+              <a:rPr sz="2400" b="1" i="0">
                 <a:solidFill>
                   <a:srgbClr val="0B1F33"/>
                 </a:solidFill>
                 <a:latin typeface="Georgia"/>
               </a:rPr>
-              <a:t>8+</a:t>
+              <a:t>US$0</a:t>
             </a:r>
           </a:p>
         </p:txBody>
@@ -19915,7 +19817,7 @@
                 </a:solidFill>
                 <a:latin typeface="Segoe UI"/>
               </a:rPr>
-              <a:t>COUNTRIES OF OPERATION</a:t>
+              <a:t>PLATFORM REVENUE (FREE)</a:t>
             </a:r>
           </a:p>
         </p:txBody>
@@ -20147,7 +20049,7 @@
                 </a:solidFill>
                 <a:latin typeface="Segoe UI"/>
               </a:rPr>
-              <a:t>Founded in New York as a premium career-consulting firm for international students</a:t>
+              <a:t>51 Careers founded — premium career development for global professionals</a:t>
             </a:r>
           </a:p>
         </p:txBody>
@@ -20256,7 +20158,7 @@
                 </a:solidFill>
                 <a:latin typeface="Segoe UI"/>
               </a:rPr>
-              <a:t>Scaled the coaching, referral, and placement franchise across the U.S. and Greater China</a:t>
+              <a:t>Helped 10,000+ candidates; built deep interview &amp; résumé expertise</a:t>
             </a:r>
           </a:p>
         </p:txBody>
@@ -20332,7 +20234,7 @@
                 </a:solidFill>
                 <a:latin typeface="Segoe UI"/>
               </a:rPr>
-              <a:t>Jul 2025</a:t>
+              <a:t>2025</a:t>
             </a:r>
           </a:p>
         </p:txBody>
@@ -20365,7 +20267,7 @@
                 </a:solidFill>
                 <a:latin typeface="Segoe UI"/>
               </a:rPr>
-              <a:t>Strategic AI partnership with Alibaba Cloud (Tongyi LLM, NLP, semantic search)</a:t>
+              <a:t>Launched 51Careers.AI — free AI platform with mock interviews &amp; 100K+ questions</a:t>
             </a:r>
           </a:p>
         </p:txBody>
@@ -20441,7 +20343,7 @@
                 </a:solidFill>
                 <a:latin typeface="Segoe UI"/>
               </a:rPr>
-              <a:t>2025</a:t>
+              <a:t>2025–26</a:t>
             </a:r>
           </a:p>
         </p:txBody>
@@ -20474,7 +20376,7 @@
                 </a:solidFill>
                 <a:latin typeface="Segoe UI"/>
               </a:rPr>
-              <a:t>Launched 51Careers.AI — the Company’s AI-powered global career platform</a:t>
+              <a:t>Developing AI résumé builder; growing active users globally</a:t>
             </a:r>
           </a:p>
         </p:txBody>
@@ -20550,7 +20452,7 @@
                 </a:solidFill>
                 <a:latin typeface="Segoe UI"/>
               </a:rPr>
-              <a:t>2026</a:t>
+              <a:t>Next</a:t>
             </a:r>
           </a:p>
         </p:txBody>
@@ -20583,7 +20485,7 @@
                 </a:solidFill>
                 <a:latin typeface="Segoe UI"/>
               </a:rPr>
-              <a:t>Global platform expansion underway across eight-plus countries</a:t>
+              <a:t>Introduce membership, consulting, and education fees as usage scales</a:t>
             </a:r>
           </a:p>
         </p:txBody>
@@ -20677,7 +20579,7 @@
         <p:spPr>
           <a:xfrm>
             <a:off x="7726679" y="3063240"/>
-            <a:ext cx="3794760" cy="502920"/>
+            <a:ext cx="3794760" cy="548640"/>
           </a:xfrm>
           <a:prstGeom prst="rect">
             <a:avLst/>
@@ -20696,7 +20598,7 @@
                 </a:solidFill>
                 <a:latin typeface="Segoe UI"/>
               </a:rPr>
-              <a:t>▸  Durable, decade-long demand with proven willingness to pay</a:t>
+              <a:t>▸  Eight years of real candidate-prep insight behind the AI product</a:t>
             </a:r>
           </a:p>
         </p:txBody>
@@ -20709,8 +20611,8 @@
         </p:nvSpPr>
         <p:spPr>
           <a:xfrm>
-            <a:off x="7726679" y="3566160"/>
-            <a:ext cx="3794760" cy="502920"/>
+            <a:off x="7726679" y="3657600"/>
+            <a:ext cx="3794760" cy="548640"/>
           </a:xfrm>
           <a:prstGeom prst="rect">
             <a:avLst/>
@@ -20729,7 +20631,7 @@
                 </a:solidFill>
                 <a:latin typeface="Segoe UI"/>
               </a:rPr>
-              <a:t>▸  Cross-border delivery capability that is difficult to replicate</a:t>
+              <a:t>▸  100K+ proprietary questions create a durable data advantage vs. generic LLMs</a:t>
             </a:r>
           </a:p>
         </p:txBody>
@@ -20742,8 +20644,8 @@
         </p:nvSpPr>
         <p:spPr>
           <a:xfrm>
-            <a:off x="7726679" y="4069080"/>
-            <a:ext cx="3794760" cy="502920"/>
+            <a:off x="7726679" y="4251960"/>
+            <a:ext cx="3794760" cy="548640"/>
           </a:xfrm>
           <a:prstGeom prst="rect">
             <a:avLst/>
@@ -20762,7 +20664,7 @@
                 </a:solidFill>
                 <a:latin typeface="Segoe UI"/>
               </a:rPr>
-              <a:t>▸  AI now layers operating leverage onto an established service core</a:t>
+              <a:t>▸  Free launch maximizes global user acquisition before monetization</a:t>
             </a:r>
           </a:p>
         </p:txBody>
@@ -20775,8 +20677,8 @@
         </p:nvSpPr>
         <p:spPr>
           <a:xfrm>
-            <a:off x="7726679" y="4572000"/>
-            <a:ext cx="3794760" cy="502920"/>
+            <a:off x="7726679" y="4846320"/>
+            <a:ext cx="3794760" cy="548640"/>
           </a:xfrm>
           <a:prstGeom prst="rect">
             <a:avLst/>
@@ -20795,7 +20697,7 @@
                 </a:solidFill>
                 <a:latin typeface="Segoe UI"/>
               </a:rPr>
-              <a:t>▸  Existing revenue de-risks the platform transition</a:t>
+              <a:t>▸  Clear path: membership · consulting · education fees</a:t>
             </a:r>
           </a:p>
         </p:txBody>
@@ -20828,7 +20730,7 @@
                 </a:solidFill>
                 <a:latin typeface="Segoe UI"/>
               </a:rPr>
-              <a:t>† Third-party estimates (ZoomInfo; LeadIQ, 2025–26) ranging US$9.7–15M revenue and ≈30–50 staff; to be confirmed in due diligence.</a:t>
+              <a:t>Platform revenue is currently US$0 by design (free access). Candidate totals reflect 51 Careers operating history since 2016.</a:t>
             </a:r>
           </a:p>
         </p:txBody>

--- a/51Careers_AI_Investor_Presentation.pptx
+++ b/51Careers_AI_Investor_Presentation.pptx
@@ -125,7 +125,7 @@
 <c:chartSpace xmlns:c="http://schemas.openxmlformats.org/drawingml/2006/chart" xmlns:a="http://schemas.openxmlformats.org/drawingml/2006/main" xmlns:r="http://schemas.openxmlformats.org/officeDocument/2006/relationships">
   <c:date1904 val="0"/>
   <c:chart>
-    <c:autoTitleDeleted val="0"/>
+    <c:autoTitleDeleted val="1"/>
     <c:plotArea>
       <c:barChart>
         <c:barDir val="col"/>
@@ -139,7 +139,7 @@
               <c:strCache>
                 <c:ptCount val="1"/>
                 <c:pt idx="0">
-                  <c:v>Global AI hiring &amp; career tech</c:v>
+                  <c:v>Spend</c:v>
                 </c:pt>
               </c:strCache>
             </c:strRef>
@@ -307,7 +307,7 @@
 <c:chartSpace xmlns:c="http://schemas.openxmlformats.org/drawingml/2006/chart" xmlns:a="http://schemas.openxmlformats.org/drawingml/2006/main" xmlns:r="http://schemas.openxmlformats.org/officeDocument/2006/relationships">
   <c:date1904 val="0"/>
   <c:chart>
-    <c:autoTitleDeleted val="0"/>
+    <c:autoTitleDeleted val="1"/>
     <c:plotArea>
       <c:barChart>
         <c:barDir val="col"/>
@@ -338,16 +338,13 @@
           </c:spPr>
           <c:cat>
             <c:strRef>
-              <c:f>Sheet1!$A$2:$A$4</c:f>
+              <c:f>Sheet1!$A$2:$A$3</c:f>
               <c:strCache>
-                <c:ptCount val="3"/>
+                <c:ptCount val="2"/>
                 <c:pt idx="0">
-                  <c:v>Launch</c:v>
+                  <c:v>2027E</c:v>
                 </c:pt>
                 <c:pt idx="1">
-                  <c:v>2027E</c:v>
-                </c:pt>
-                <c:pt idx="2">
                   <c:v>2029E</c:v>
                 </c:pt>
               </c:strCache>
@@ -355,17 +352,14 @@
           </c:cat>
           <c:val>
             <c:numRef>
-              <c:f>Sheet1!$B$2:$B$4</c:f>
+              <c:f>Sheet1!$B$2:$B$3</c:f>
               <c:numCache>
                 <c:formatCode>General</c:formatCode>
-                <c:ptCount val="3"/>
+                <c:ptCount val="2"/>
                 <c:pt idx="0">
-                  <c:v>0</c:v>
+                  <c:v>55</c:v>
                 </c:pt>
                 <c:pt idx="1">
-                  <c:v>55</c:v>
-                </c:pt>
-                <c:pt idx="2">
                   <c:v>50</c:v>
                 </c:pt>
               </c:numCache>
@@ -398,16 +392,13 @@
           </c:spPr>
           <c:cat>
             <c:strRef>
-              <c:f>Sheet1!$A$2:$A$4</c:f>
+              <c:f>Sheet1!$A$2:$A$3</c:f>
               <c:strCache>
-                <c:ptCount val="3"/>
+                <c:ptCount val="2"/>
                 <c:pt idx="0">
-                  <c:v>Launch</c:v>
+                  <c:v>2027E</c:v>
                 </c:pt>
                 <c:pt idx="1">
-                  <c:v>2027E</c:v>
-                </c:pt>
-                <c:pt idx="2">
                   <c:v>2029E</c:v>
                 </c:pt>
               </c:strCache>
@@ -415,17 +406,14 @@
           </c:cat>
           <c:val>
             <c:numRef>
-              <c:f>Sheet1!$C$2:$C$4</c:f>
+              <c:f>Sheet1!$C$2:$C$3</c:f>
               <c:numCache>
                 <c:formatCode>General</c:formatCode>
-                <c:ptCount val="3"/>
+                <c:ptCount val="2"/>
                 <c:pt idx="0">
-                  <c:v>0</c:v>
+                  <c:v>30</c:v>
                 </c:pt>
                 <c:pt idx="1">
-                  <c:v>30</c:v>
-                </c:pt>
-                <c:pt idx="2">
                   <c:v>30</c:v>
                 </c:pt>
               </c:numCache>
@@ -458,16 +446,13 @@
           </c:spPr>
           <c:cat>
             <c:strRef>
-              <c:f>Sheet1!$A$2:$A$4</c:f>
+              <c:f>Sheet1!$A$2:$A$3</c:f>
               <c:strCache>
-                <c:ptCount val="3"/>
+                <c:ptCount val="2"/>
                 <c:pt idx="0">
-                  <c:v>Launch</c:v>
+                  <c:v>2027E</c:v>
                 </c:pt>
                 <c:pt idx="1">
-                  <c:v>2027E</c:v>
-                </c:pt>
-                <c:pt idx="2">
                   <c:v>2029E</c:v>
                 </c:pt>
               </c:strCache>
@@ -475,17 +460,14 @@
           </c:cat>
           <c:val>
             <c:numRef>
-              <c:f>Sheet1!$D$2:$D$4</c:f>
+              <c:f>Sheet1!$D$2:$D$3</c:f>
               <c:numCache>
                 <c:formatCode>General</c:formatCode>
-                <c:ptCount val="3"/>
+                <c:ptCount val="2"/>
                 <c:pt idx="0">
-                  <c:v>0</c:v>
+                  <c:v>15</c:v>
                 </c:pt>
                 <c:pt idx="1">
-                  <c:v>15</c:v>
-                </c:pt>
-                <c:pt idx="2">
                   <c:v>20</c:v>
                 </c:pt>
               </c:numCache>
@@ -616,7 +598,7 @@
 <c:chartSpace xmlns:c="http://schemas.openxmlformats.org/drawingml/2006/chart" xmlns:a="http://schemas.openxmlformats.org/drawingml/2006/main" xmlns:r="http://schemas.openxmlformats.org/officeDocument/2006/relationships">
   <c:date1904 val="0"/>
   <c:chart>
-    <c:autoTitleDeleted val="0"/>
+    <c:autoTitleDeleted val="1"/>
     <c:plotArea>
       <c:barChart>
         <c:barDir val="bar"/>
@@ -630,7 +612,7 @@
               <c:strCache>
                 <c:ptCount val="1"/>
                 <c:pt idx="0">
-                  <c:v>Career AI depth</c:v>
+                  <c:v>Score</c:v>
                 </c:pt>
               </c:strCache>
             </c:strRef>
@@ -798,7 +780,7 @@
 <c:chartSpace xmlns:c="http://schemas.openxmlformats.org/drawingml/2006/chart" xmlns:a="http://schemas.openxmlformats.org/drawingml/2006/main" xmlns:r="http://schemas.openxmlformats.org/officeDocument/2006/relationships">
   <c:date1904 val="0"/>
   <c:chart>
-    <c:autoTitleDeleted val="0"/>
+    <c:autoTitleDeleted val="1"/>
     <c:plotArea>
       <c:lineChart>
         <c:grouping val="standard"/>
@@ -812,7 +794,7 @@
               <c:strCache>
                 <c:ptCount val="1"/>
                 <c:pt idx="0">
-                  <c:v>Active users (index)</c:v>
+                  <c:v>Index</c:v>
                 </c:pt>
               </c:strCache>
             </c:strRef>
@@ -985,7 +967,7 @@
 <c:chartSpace xmlns:c="http://schemas.openxmlformats.org/drawingml/2006/chart" xmlns:a="http://schemas.openxmlformats.org/drawingml/2006/main" xmlns:r="http://schemas.openxmlformats.org/officeDocument/2006/relationships">
   <c:date1904 val="0"/>
   <c:chart>
-    <c:autoTitleDeleted val="0"/>
+    <c:autoTitleDeleted val="1"/>
     <c:plotArea>
       <c:barChart>
         <c:barDir val="col"/>
@@ -999,7 +981,7 @@
               <c:strCache>
                 <c:ptCount val="1"/>
                 <c:pt idx="0">
-                  <c:v>Platform revenue</c:v>
+                  <c:v>Revenue</c:v>
                 </c:pt>
               </c:strCache>
             </c:strRef>
@@ -1167,7 +1149,7 @@
 <c:chartSpace xmlns:c="http://schemas.openxmlformats.org/drawingml/2006/chart" xmlns:a="http://schemas.openxmlformats.org/drawingml/2006/main" xmlns:r="http://schemas.openxmlformats.org/officeDocument/2006/relationships">
   <c:date1904 val="0"/>
   <c:chart>
-    <c:autoTitleDeleted val="0"/>
+    <c:autoTitleDeleted val="1"/>
     <c:plotArea>
       <c:lineChart>
         <c:grouping val="standard"/>
@@ -1181,7 +1163,7 @@
               <c:strCache>
                 <c:ptCount val="1"/>
                 <c:pt idx="0">
-                  <c:v>Paid conversion</c:v>
+                  <c:v>Conversion</c:v>
                 </c:pt>
               </c:strCache>
             </c:strRef>
@@ -1355,7 +1337,7 @@
   <c:date1904 val="0"/>
   <c:roundedCorners val="0"/>
   <c:chart>
-    <c:autoTitleDeleted val="0"/>
+    <c:autoTitleDeleted val="1"/>
     <c:plotArea>
       <c:layout/>
       <c:doughnutChart>
@@ -1369,7 +1351,7 @@
               <c:strCache>
                 <c:ptCount val="1"/>
                 <c:pt idx="0">
-                  <c:v>Use of Proceeds</c:v>
+                  <c:v>Allocation</c:v>
                 </c:pt>
               </c:strCache>
             </c:strRef>
@@ -4760,7 +4742,7 @@
                 </a:solidFill>
                 <a:latin typeface="Segoe UI"/>
               </a:rPr>
-              <a:t>Who we are — An AI career platform from the 51 Careers team: mock interviews, a 100K+ question bank, and a new AI résumé builder — free today, built for global professionals.</a:t>
+              <a:t>Who we are — An AI career platform from the 51Careers team: mock interviews, a 100K+ question bank, and a new AI résumé builder — free today, built for global professionals.</a:t>
             </a:r>
           </a:p>
         </p:txBody>
@@ -5636,7 +5618,7 @@
                           </a:solidFill>
                           <a:latin typeface="Segoe UI"/>
                         </a:rPr>
-                        <a:t>51Careers</a:t>
+                        <a:t>51Careers.AI</a:t>
                       </a:r>
                     </a:p>
                   </a:txBody>
@@ -7673,8 +7655,8 @@
         </p:nvSpPr>
         <p:spPr>
           <a:xfrm>
-            <a:off x="685800" y="4846320"/>
-            <a:ext cx="4114800" cy="256032"/>
+            <a:off x="685800" y="4828032"/>
+            <a:ext cx="10789920" cy="228600"/>
           </a:xfrm>
           <a:prstGeom prst="rect">
             <a:avLst/>
@@ -7707,8 +7689,8 @@
           <p:nvPr/>
         </p:nvGraphicFramePr>
         <p:xfrm>
-          <a:off x="4572000" y="4709160"/>
-          <a:ext cx="6949440" cy="1143000"/>
+          <a:off x="640080" y="4937760"/>
+          <a:ext cx="10881360" cy="868680"/>
         </p:xfrm>
         <a:graphic>
           <a:graphicData uri="http://schemas.openxmlformats.org/drawingml/2006/chart">
@@ -10180,7 +10162,7 @@
                 </a:solidFill>
                 <a:latin typeface="Segoe UI"/>
               </a:rPr>
-              <a:t>▸  Founder of 51 Careers and 51Careers.AI; investor &amp; Managing Director at publicly listed Helio</a:t>
+              <a:t>▸  Founder of 51Careers and 51Careers.AI; investor &amp; Managing Director at publicly listed Helio</a:t>
             </a:r>
           </a:p>
         </p:txBody>
@@ -10213,7 +10195,7 @@
                 </a:solidFill>
                 <a:latin typeface="Segoe UI"/>
               </a:rPr>
-              <a:t>▸  Decade of international business, capital markets, and global resource integration across AI, education, and related industries</a:t>
+              <a:t>▸  Decade of international business, capital markets, and global resource integration</a:t>
             </a:r>
           </a:p>
         </p:txBody>
@@ -10402,7 +10384,7 @@
                 </a:solidFill>
                 <a:latin typeface="Segoe UI"/>
               </a:rPr>
-              <a:t>▸  Co-Founder since 2016; U.S. CPA — M.S. Accounting (Pace); B.A. Accounting (Dongbei University of Finance and Economics)</a:t>
+              <a:t>▸  Co-Founder since 2016; U.S. CPA — M.S. Accounting (Pace University)</a:t>
             </a:r>
           </a:p>
         </p:txBody>
@@ -10435,7 +10417,7 @@
                 </a:solidFill>
                 <a:latin typeface="Segoe UI"/>
               </a:rPr>
-              <a:t>▸  Oversees financial strategy, corporate governance, and sustainable growth; prior senior finance leadership in U.S. industry</a:t>
+              <a:t>▸  Oversees financial strategy, corporate governance, and sustainable growth</a:t>
             </a:r>
           </a:p>
         </p:txBody>
@@ -10624,7 +10606,7 @@
                 </a:solidFill>
                 <a:latin typeface="Segoe UI"/>
               </a:rPr>
-              <a:t>▸  Serial entrepreneur (10+ yrs) across SaaS, AI, and digital business; B.S. Computer Science, ECUST</a:t>
+              <a:t>▸  Serial entrepreneur (10+ yrs) across SaaS, AI, and digital business; B.S. CS, ECUST</a:t>
             </a:r>
           </a:p>
         </p:txBody>
@@ -10657,7 +10639,7 @@
                 </a:solidFill>
                 <a:latin typeface="Segoe UI"/>
               </a:rPr>
-              <a:t>▸  Prior CTO roles (Youpindao, Roubeibei) and multiple co-founded ventures; leads technology, operations, and AI strategy</a:t>
+              <a:t>▸  Prior CTO roles and multiple co-founded ventures; leads technology, operations, and AI</a:t>
             </a:r>
           </a:p>
         </p:txBody>
@@ -10879,7 +10861,7 @@
                 </a:solidFill>
                 <a:latin typeface="Segoe UI"/>
               </a:rPr>
-              <a:t>▸  Former CTO &amp; Director of Product, Ci Finance; senior product/tech roles at CPIC, Allinpay, Noah Holdings, and Tianrang Intelligence</a:t>
+              <a:t>▸  Former CTO &amp; Director of Product, Ci Finance; senior roles at CPIC, Allinpay, Noah</a:t>
             </a:r>
           </a:p>
         </p:txBody>
@@ -11068,7 +11050,7 @@
                 </a:solidFill>
                 <a:latin typeface="Segoe UI"/>
               </a:rPr>
-              <a:t>▸  Full-stack engineer; previously at Amazon Web Services (AWS) on mission-critical systems</a:t>
+              <a:t>▸  Full-stack engineer; previously at Amazon Web Services (AWS)</a:t>
             </a:r>
           </a:p>
         </p:txBody>
@@ -11101,7 +11083,7 @@
                 </a:solidFill>
                 <a:latin typeface="Segoe UI"/>
               </a:rPr>
-              <a:t>▸  B.S. Mechanical Engineering (Northwestern), M.S. Robotics; extensive hiring-panel experience and career mentorship</a:t>
+              <a:t>▸  B.S. Northwestern, M.S. Robotics; extensive hiring-panel experience and mentorship</a:t>
             </a:r>
           </a:p>
         </p:txBody>
@@ -11290,7 +11272,7 @@
                 </a:solidFill>
                 <a:latin typeface="Segoe UI"/>
               </a:rPr>
-              <a:t>▸  Harvard &amp; MIT; former senior executive at Morgan Stanley; founder of Cedar (Wall Street investment banking)</a:t>
+              <a:t>▸  Harvard &amp; MIT; former senior executive at Morgan Stanley; founder of Cedar</a:t>
             </a:r>
           </a:p>
         </p:txBody>
@@ -11323,7 +11305,7 @@
                 </a:solidFill>
                 <a:latin typeface="Segoe UI"/>
               </a:rPr>
-              <a:t>▸  40+ years advising tech M&amp;A, capital raising, and listings; advises 51Careers.AI on growth, capital markets, and expansion</a:t>
+              <a:t>▸  40+ years in tech M&amp;A and capital raising; advises on growth and expansion</a:t>
             </a:r>
           </a:p>
         </p:txBody>
@@ -12544,7 +12526,7 @@
                 </a:solidFill>
                 <a:latin typeface="Segoe UI"/>
               </a:rPr>
-              <a:t>51Careers.AI is the AI-powered career platform from the 51 Careers team — helping professionals worldwide prepare, apply, and compete for great jobs.</a:t>
+              <a:t>51Careers.AI is the AI-powered career platform from the 51Careers team — helping professionals worldwide prepare, apply, and compete for great jobs.</a:t>
             </a:r>
           </a:p>
         </p:txBody>
@@ -15113,8 +15095,8 @@
         </p:nvSpPr>
         <p:spPr>
           <a:xfrm>
-            <a:off x="502920" y="1234440"/>
-            <a:ext cx="5852160" cy="1234440"/>
+            <a:off x="502920" y="1207008"/>
+            <a:ext cx="5852160" cy="1353312"/>
           </a:xfrm>
           <a:prstGeom prst="roundRect">
             <a:avLst>
@@ -15154,14 +15136,113 @@
       </p:sp>
       <p:sp>
         <p:nvSpPr>
-          <p:cNvPr id="6" name="Rectangle 5"/>
+          <p:cNvPr id="6" name="TextBox 5"/>
+          <p:cNvSpPr txBox="1"/>
+          <p:nvPr/>
+        </p:nvSpPr>
+        <p:spPr>
+          <a:xfrm>
+            <a:off x="685800" y="1316736"/>
+            <a:ext cx="5394960" cy="201168"/>
+          </a:xfrm>
+          <a:prstGeom prst="rect">
+            <a:avLst/>
+          </a:prstGeom>
+          <a:noFill/>
+        </p:spPr>
+        <p:txBody>
+          <a:bodyPr wrap="square" anchor="t"/>
+          <a:lstStyle/>
+          <a:p>
+            <a:pPr algn="l"/>
+            <a:r>
+              <a:rPr sz="900" b="1" i="0">
+                <a:solidFill>
+                  <a:srgbClr val="5E6E80"/>
+                </a:solidFill>
+                <a:latin typeface="Segoe UI"/>
+              </a:rPr>
+              <a:t>TOTAL ADDRESSABLE MARKET</a:t>
+            </a:r>
+          </a:p>
+        </p:txBody>
+      </p:sp>
+      <p:sp>
+        <p:nvSpPr>
+          <p:cNvPr id="7" name="TextBox 6"/>
+          <p:cNvSpPr txBox="1"/>
+          <p:nvPr/>
+        </p:nvSpPr>
+        <p:spPr>
+          <a:xfrm>
+            <a:off x="685800" y="1536192"/>
+            <a:ext cx="5394960" cy="365760"/>
+          </a:xfrm>
+          <a:prstGeom prst="rect">
+            <a:avLst/>
+          </a:prstGeom>
+          <a:noFill/>
+        </p:spPr>
+        <p:txBody>
+          <a:bodyPr wrap="square" anchor="t"/>
+          <a:lstStyle/>
+          <a:p>
+            <a:pPr algn="l"/>
+            <a:r>
+              <a:rPr sz="2600" b="1" i="0">
+                <a:solidFill>
+                  <a:srgbClr val="0B1F33"/>
+                </a:solidFill>
+                <a:latin typeface="Georgia"/>
+              </a:rPr>
+              <a:t>US$200B+</a:t>
+            </a:r>
+          </a:p>
+        </p:txBody>
+      </p:sp>
+      <p:sp>
+        <p:nvSpPr>
+          <p:cNvPr id="8" name="TextBox 7"/>
+          <p:cNvSpPr txBox="1"/>
+          <p:nvPr/>
+        </p:nvSpPr>
+        <p:spPr>
+          <a:xfrm>
+            <a:off x="685800" y="1956816"/>
+            <a:ext cx="5394960" cy="320040"/>
+          </a:xfrm>
+          <a:prstGeom prst="rect">
+            <a:avLst/>
+          </a:prstGeom>
+          <a:noFill/>
+        </p:spPr>
+        <p:txBody>
+          <a:bodyPr wrap="square" anchor="t"/>
+          <a:lstStyle/>
+          <a:p>
+            <a:pPr algn="l"/>
+            <a:r>
+              <a:rPr sz="1100" b="0" i="0">
+                <a:solidFill>
+                  <a:srgbClr val="2C3A4B"/>
+                </a:solidFill>
+                <a:latin typeface="Segoe UI"/>
+              </a:rPr>
+              <a:t>Global recruitment, talent-acquisition, and career-development spend worldwide.</a:t>
+            </a:r>
+          </a:p>
+        </p:txBody>
+      </p:sp>
+      <p:sp>
+        <p:nvSpPr>
+          <p:cNvPr id="9" name="Rectangle 8"/>
           <p:cNvSpPr/>
           <p:nvPr/>
         </p:nvSpPr>
         <p:spPr>
           <a:xfrm>
-            <a:off x="685800" y="2148840"/>
-            <a:ext cx="5394960" cy="146304"/>
+            <a:off x="685800" y="2322576"/>
+            <a:ext cx="5394960" cy="128016"/>
           </a:xfrm>
           <a:prstGeom prst="rect">
             <a:avLst/>
@@ -15197,113 +15278,14 @@
       </p:sp>
       <p:sp>
         <p:nvSpPr>
-          <p:cNvPr id="7" name="TextBox 6"/>
-          <p:cNvSpPr txBox="1"/>
-          <p:nvPr/>
-        </p:nvSpPr>
-        <p:spPr>
-          <a:xfrm>
-            <a:off x="685800" y="1344168"/>
-            <a:ext cx="5394960" cy="228600"/>
-          </a:xfrm>
-          <a:prstGeom prst="rect">
-            <a:avLst/>
-          </a:prstGeom>
-          <a:noFill/>
-        </p:spPr>
-        <p:txBody>
-          <a:bodyPr wrap="square" anchor="t"/>
-          <a:lstStyle/>
-          <a:p>
-            <a:pPr algn="l"/>
-            <a:r>
-              <a:rPr sz="900" b="1" i="0">
-                <a:solidFill>
-                  <a:srgbClr val="5E6E80"/>
-                </a:solidFill>
-                <a:latin typeface="Segoe UI"/>
-              </a:rPr>
-              <a:t>TOTAL ADDRESSABLE MARKET</a:t>
-            </a:r>
-          </a:p>
-        </p:txBody>
-      </p:sp>
-      <p:sp>
-        <p:nvSpPr>
-          <p:cNvPr id="8" name="TextBox 7"/>
-          <p:cNvSpPr txBox="1"/>
-          <p:nvPr/>
-        </p:nvSpPr>
-        <p:spPr>
-          <a:xfrm>
-            <a:off x="685800" y="1554480"/>
-            <a:ext cx="5394960" cy="365760"/>
-          </a:xfrm>
-          <a:prstGeom prst="rect">
-            <a:avLst/>
-          </a:prstGeom>
-          <a:noFill/>
-        </p:spPr>
-        <p:txBody>
-          <a:bodyPr wrap="square" anchor="t"/>
-          <a:lstStyle/>
-          <a:p>
-            <a:pPr algn="l"/>
-            <a:r>
-              <a:rPr sz="2600" b="1" i="0">
-                <a:solidFill>
-                  <a:srgbClr val="0B1F33"/>
-                </a:solidFill>
-                <a:latin typeface="Georgia"/>
-              </a:rPr>
-              <a:t>US$200B+</a:t>
-            </a:r>
-          </a:p>
-        </p:txBody>
-      </p:sp>
-      <p:sp>
-        <p:nvSpPr>
-          <p:cNvPr id="9" name="TextBox 8"/>
-          <p:cNvSpPr txBox="1"/>
-          <p:nvPr/>
-        </p:nvSpPr>
-        <p:spPr>
-          <a:xfrm>
-            <a:off x="685800" y="1892808"/>
-            <a:ext cx="5394960" cy="256032"/>
-          </a:xfrm>
-          <a:prstGeom prst="rect">
-            <a:avLst/>
-          </a:prstGeom>
-          <a:noFill/>
-        </p:spPr>
-        <p:txBody>
-          <a:bodyPr wrap="square" anchor="t"/>
-          <a:lstStyle/>
-          <a:p>
-            <a:pPr algn="l"/>
-            <a:r>
-              <a:rPr sz="1000" b="0" i="0">
-                <a:solidFill>
-                  <a:srgbClr val="2C3A4B"/>
-                </a:solidFill>
-                <a:latin typeface="Segoe UI"/>
-              </a:rPr>
-              <a:t>Global recruitment, talent-acquisition, and career-development spend worldwide.</a:t>
-            </a:r>
-          </a:p>
-        </p:txBody>
-      </p:sp>
-      <p:sp>
-        <p:nvSpPr>
           <p:cNvPr id="10" name="Rounded Rectangle 9"/>
           <p:cNvSpPr/>
           <p:nvPr/>
         </p:nvSpPr>
         <p:spPr>
           <a:xfrm>
-            <a:off x="502920" y="2606040"/>
-            <a:ext cx="5852160" cy="1234440"/>
+            <a:off x="502920" y="2651760"/>
+            <a:ext cx="5852160" cy="1353312"/>
           </a:xfrm>
           <a:prstGeom prst="roundRect">
             <a:avLst>
@@ -15343,14 +15325,113 @@
       </p:sp>
       <p:sp>
         <p:nvSpPr>
-          <p:cNvPr id="11" name="Rectangle 10"/>
+          <p:cNvPr id="11" name="TextBox 10"/>
+          <p:cNvSpPr txBox="1"/>
+          <p:nvPr/>
+        </p:nvSpPr>
+        <p:spPr>
+          <a:xfrm>
+            <a:off x="685800" y="2761488"/>
+            <a:ext cx="5394960" cy="201168"/>
+          </a:xfrm>
+          <a:prstGeom prst="rect">
+            <a:avLst/>
+          </a:prstGeom>
+          <a:noFill/>
+        </p:spPr>
+        <p:txBody>
+          <a:bodyPr wrap="square" anchor="t"/>
+          <a:lstStyle/>
+          <a:p>
+            <a:pPr algn="l"/>
+            <a:r>
+              <a:rPr sz="900" b="1" i="0">
+                <a:solidFill>
+                  <a:srgbClr val="5E6E80"/>
+                </a:solidFill>
+                <a:latin typeface="Segoe UI"/>
+              </a:rPr>
+              <a:t>SERVICEABLE MARKET</a:t>
+            </a:r>
+          </a:p>
+        </p:txBody>
+      </p:sp>
+      <p:sp>
+        <p:nvSpPr>
+          <p:cNvPr id="12" name="TextBox 11"/>
+          <p:cNvSpPr txBox="1"/>
+          <p:nvPr/>
+        </p:nvSpPr>
+        <p:spPr>
+          <a:xfrm>
+            <a:off x="685800" y="2980944"/>
+            <a:ext cx="5394960" cy="365760"/>
+          </a:xfrm>
+          <a:prstGeom prst="rect">
+            <a:avLst/>
+          </a:prstGeom>
+          <a:noFill/>
+        </p:spPr>
+        <p:txBody>
+          <a:bodyPr wrap="square" anchor="t"/>
+          <a:lstStyle/>
+          <a:p>
+            <a:pPr algn="l"/>
+            <a:r>
+              <a:rPr sz="2600" b="1" i="0">
+                <a:solidFill>
+                  <a:srgbClr val="0B1F33"/>
+                </a:solidFill>
+                <a:latin typeface="Georgia"/>
+              </a:rPr>
+              <a:t>US$30B+</a:t>
+            </a:r>
+          </a:p>
+        </p:txBody>
+      </p:sp>
+      <p:sp>
+        <p:nvSpPr>
+          <p:cNvPr id="13" name="TextBox 12"/>
+          <p:cNvSpPr txBox="1"/>
+          <p:nvPr/>
+        </p:nvSpPr>
+        <p:spPr>
+          <a:xfrm>
+            <a:off x="685800" y="3401568"/>
+            <a:ext cx="5394960" cy="320040"/>
+          </a:xfrm>
+          <a:prstGeom prst="rect">
+            <a:avLst/>
+          </a:prstGeom>
+          <a:noFill/>
+        </p:spPr>
+        <p:txBody>
+          <a:bodyPr wrap="square" anchor="t"/>
+          <a:lstStyle/>
+          <a:p>
+            <a:pPr algn="l"/>
+            <a:r>
+              <a:rPr sz="1100" b="0" i="0">
+                <a:solidFill>
+                  <a:srgbClr val="2C3A4B"/>
+                </a:solidFill>
+                <a:latin typeface="Segoe UI"/>
+              </a:rPr>
+              <a:t>Global AI-enabled hiring technology and digital career preparation.</a:t>
+            </a:r>
+          </a:p>
+        </p:txBody>
+      </p:sp>
+      <p:sp>
+        <p:nvSpPr>
+          <p:cNvPr id="14" name="Rectangle 13"/>
           <p:cNvSpPr/>
           <p:nvPr/>
         </p:nvSpPr>
         <p:spPr>
           <a:xfrm>
-            <a:off x="685800" y="3520440"/>
-            <a:ext cx="2967228" cy="146304"/>
+            <a:off x="685800" y="3767328"/>
+            <a:ext cx="3129076" cy="128016"/>
           </a:xfrm>
           <a:prstGeom prst="rect">
             <a:avLst/>
@@ -15386,113 +15467,14 @@
       </p:sp>
       <p:sp>
         <p:nvSpPr>
-          <p:cNvPr id="12" name="TextBox 11"/>
-          <p:cNvSpPr txBox="1"/>
-          <p:nvPr/>
-        </p:nvSpPr>
-        <p:spPr>
-          <a:xfrm>
-            <a:off x="685800" y="2715768"/>
-            <a:ext cx="5394960" cy="228600"/>
-          </a:xfrm>
-          <a:prstGeom prst="rect">
-            <a:avLst/>
-          </a:prstGeom>
-          <a:noFill/>
-        </p:spPr>
-        <p:txBody>
-          <a:bodyPr wrap="square" anchor="t"/>
-          <a:lstStyle/>
-          <a:p>
-            <a:pPr algn="l"/>
-            <a:r>
-              <a:rPr sz="900" b="1" i="0">
-                <a:solidFill>
-                  <a:srgbClr val="5E6E80"/>
-                </a:solidFill>
-                <a:latin typeface="Segoe UI"/>
-              </a:rPr>
-              <a:t>SERVICEABLE MARKET</a:t>
-            </a:r>
-          </a:p>
-        </p:txBody>
-      </p:sp>
-      <p:sp>
-        <p:nvSpPr>
-          <p:cNvPr id="13" name="TextBox 12"/>
-          <p:cNvSpPr txBox="1"/>
-          <p:nvPr/>
-        </p:nvSpPr>
-        <p:spPr>
-          <a:xfrm>
-            <a:off x="685800" y="2926080"/>
-            <a:ext cx="5394960" cy="365760"/>
-          </a:xfrm>
-          <a:prstGeom prst="rect">
-            <a:avLst/>
-          </a:prstGeom>
-          <a:noFill/>
-        </p:spPr>
-        <p:txBody>
-          <a:bodyPr wrap="square" anchor="t"/>
-          <a:lstStyle/>
-          <a:p>
-            <a:pPr algn="l"/>
-            <a:r>
-              <a:rPr sz="2600" b="1" i="0">
-                <a:solidFill>
-                  <a:srgbClr val="0B1F33"/>
-                </a:solidFill>
-                <a:latin typeface="Georgia"/>
-              </a:rPr>
-              <a:t>US$30B+</a:t>
-            </a:r>
-          </a:p>
-        </p:txBody>
-      </p:sp>
-      <p:sp>
-        <p:nvSpPr>
-          <p:cNvPr id="14" name="TextBox 13"/>
-          <p:cNvSpPr txBox="1"/>
-          <p:nvPr/>
-        </p:nvSpPr>
-        <p:spPr>
-          <a:xfrm>
-            <a:off x="685800" y="3264408"/>
-            <a:ext cx="5394960" cy="256032"/>
-          </a:xfrm>
-          <a:prstGeom prst="rect">
-            <a:avLst/>
-          </a:prstGeom>
-          <a:noFill/>
-        </p:spPr>
-        <p:txBody>
-          <a:bodyPr wrap="square" anchor="t"/>
-          <a:lstStyle/>
-          <a:p>
-            <a:pPr algn="l"/>
-            <a:r>
-              <a:rPr sz="1000" b="0" i="0">
-                <a:solidFill>
-                  <a:srgbClr val="2C3A4B"/>
-                </a:solidFill>
-                <a:latin typeface="Segoe UI"/>
-              </a:rPr>
-              <a:t>Global AI-enabled hiring technology and digital career preparation.</a:t>
-            </a:r>
-          </a:p>
-        </p:txBody>
-      </p:sp>
-      <p:sp>
-        <p:nvSpPr>
           <p:cNvPr id="15" name="Rounded Rectangle 14"/>
           <p:cNvSpPr/>
           <p:nvPr/>
         </p:nvSpPr>
         <p:spPr>
           <a:xfrm>
-            <a:off x="502920" y="3977639"/>
-            <a:ext cx="5852160" cy="1234440"/>
+            <a:off x="502920" y="4096512"/>
+            <a:ext cx="5852160" cy="1353312"/>
           </a:xfrm>
           <a:prstGeom prst="roundRect">
             <a:avLst>
@@ -15532,14 +15514,113 @@
       </p:sp>
       <p:sp>
         <p:nvSpPr>
-          <p:cNvPr id="16" name="Rectangle 15"/>
+          <p:cNvPr id="16" name="TextBox 15"/>
+          <p:cNvSpPr txBox="1"/>
+          <p:nvPr/>
+        </p:nvSpPr>
+        <p:spPr>
+          <a:xfrm>
+            <a:off x="685800" y="4206240"/>
+            <a:ext cx="5394960" cy="201168"/>
+          </a:xfrm>
+          <a:prstGeom prst="rect">
+            <a:avLst/>
+          </a:prstGeom>
+          <a:noFill/>
+        </p:spPr>
+        <p:txBody>
+          <a:bodyPr wrap="square" anchor="t"/>
+          <a:lstStyle/>
+          <a:p>
+            <a:pPr algn="l"/>
+            <a:r>
+              <a:rPr sz="900" b="1" i="0">
+                <a:solidFill>
+                  <a:srgbClr val="5E6E80"/>
+                </a:solidFill>
+                <a:latin typeface="Segoe UI"/>
+              </a:rPr>
+              <a:t>NEAR-TERM FOCUS</a:t>
+            </a:r>
+          </a:p>
+        </p:txBody>
+      </p:sp>
+      <p:sp>
+        <p:nvSpPr>
+          <p:cNvPr id="17" name="TextBox 16"/>
+          <p:cNvSpPr txBox="1"/>
+          <p:nvPr/>
+        </p:nvSpPr>
+        <p:spPr>
+          <a:xfrm>
+            <a:off x="685800" y="4425696"/>
+            <a:ext cx="5394960" cy="365760"/>
+          </a:xfrm>
+          <a:prstGeom prst="rect">
+            <a:avLst/>
+          </a:prstGeom>
+          <a:noFill/>
+        </p:spPr>
+        <p:txBody>
+          <a:bodyPr wrap="square" anchor="t"/>
+          <a:lstStyle/>
+          <a:p>
+            <a:pPr algn="l"/>
+            <a:r>
+              <a:rPr sz="2600" b="1" i="0">
+                <a:solidFill>
+                  <a:srgbClr val="0B1F33"/>
+                </a:solidFill>
+                <a:latin typeface="Georgia"/>
+              </a:rPr>
+              <a:t>US$5B+</a:t>
+            </a:r>
+          </a:p>
+        </p:txBody>
+      </p:sp>
+      <p:sp>
+        <p:nvSpPr>
+          <p:cNvPr id="18" name="TextBox 17"/>
+          <p:cNvSpPr txBox="1"/>
+          <p:nvPr/>
+        </p:nvSpPr>
+        <p:spPr>
+          <a:xfrm>
+            <a:off x="685800" y="4846320"/>
+            <a:ext cx="5394960" cy="320040"/>
+          </a:xfrm>
+          <a:prstGeom prst="rect">
+            <a:avLst/>
+          </a:prstGeom>
+          <a:noFill/>
+        </p:spPr>
+        <p:txBody>
+          <a:bodyPr wrap="square" anchor="t"/>
+          <a:lstStyle/>
+          <a:p>
+            <a:pPr algn="l"/>
+            <a:r>
+              <a:rPr sz="1100" b="0" i="0">
+                <a:solidFill>
+                  <a:srgbClr val="2C3A4B"/>
+                </a:solidFill>
+                <a:latin typeface="Segoe UI"/>
+              </a:rPr>
+              <a:t>Global professionals seeking AI prep, résumés, and interview readiness.</a:t>
+            </a:r>
+          </a:p>
+        </p:txBody>
+      </p:sp>
+      <p:sp>
+        <p:nvSpPr>
+          <p:cNvPr id="19" name="Rectangle 18"/>
           <p:cNvSpPr/>
           <p:nvPr/>
         </p:nvSpPr>
         <p:spPr>
           <a:xfrm>
-            <a:off x="685800" y="4892040"/>
-            <a:ext cx="1726387" cy="146304"/>
+            <a:off x="685800" y="5212080"/>
+            <a:ext cx="1834286" cy="128016"/>
           </a:xfrm>
           <a:prstGeom prst="rect">
             <a:avLst/>
@@ -15575,113 +15656,14 @@
       </p:sp>
       <p:sp>
         <p:nvSpPr>
-          <p:cNvPr id="17" name="TextBox 16"/>
-          <p:cNvSpPr txBox="1"/>
-          <p:nvPr/>
-        </p:nvSpPr>
-        <p:spPr>
-          <a:xfrm>
-            <a:off x="685800" y="4087368"/>
-            <a:ext cx="5394960" cy="228600"/>
-          </a:xfrm>
-          <a:prstGeom prst="rect">
-            <a:avLst/>
-          </a:prstGeom>
-          <a:noFill/>
-        </p:spPr>
-        <p:txBody>
-          <a:bodyPr wrap="square" anchor="t"/>
-          <a:lstStyle/>
-          <a:p>
-            <a:pPr algn="l"/>
-            <a:r>
-              <a:rPr sz="900" b="1" i="0">
-                <a:solidFill>
-                  <a:srgbClr val="5E6E80"/>
-                </a:solidFill>
-                <a:latin typeface="Segoe UI"/>
-              </a:rPr>
-              <a:t>NEAR-TERM FOCUS</a:t>
-            </a:r>
-          </a:p>
-        </p:txBody>
-      </p:sp>
-      <p:sp>
-        <p:nvSpPr>
-          <p:cNvPr id="18" name="TextBox 17"/>
-          <p:cNvSpPr txBox="1"/>
-          <p:nvPr/>
-        </p:nvSpPr>
-        <p:spPr>
-          <a:xfrm>
-            <a:off x="685800" y="4297679"/>
-            <a:ext cx="5394960" cy="365760"/>
-          </a:xfrm>
-          <a:prstGeom prst="rect">
-            <a:avLst/>
-          </a:prstGeom>
-          <a:noFill/>
-        </p:spPr>
-        <p:txBody>
-          <a:bodyPr wrap="square" anchor="t"/>
-          <a:lstStyle/>
-          <a:p>
-            <a:pPr algn="l"/>
-            <a:r>
-              <a:rPr sz="2600" b="1" i="0">
-                <a:solidFill>
-                  <a:srgbClr val="0B1F33"/>
-                </a:solidFill>
-                <a:latin typeface="Georgia"/>
-              </a:rPr>
-              <a:t>US$5B+</a:t>
-            </a:r>
-          </a:p>
-        </p:txBody>
-      </p:sp>
-      <p:sp>
-        <p:nvSpPr>
-          <p:cNvPr id="19" name="TextBox 18"/>
-          <p:cNvSpPr txBox="1"/>
-          <p:nvPr/>
-        </p:nvSpPr>
-        <p:spPr>
-          <a:xfrm>
-            <a:off x="685800" y="4636007"/>
-            <a:ext cx="5394960" cy="256032"/>
-          </a:xfrm>
-          <a:prstGeom prst="rect">
-            <a:avLst/>
-          </a:prstGeom>
-          <a:noFill/>
-        </p:spPr>
-        <p:txBody>
-          <a:bodyPr wrap="square" anchor="t"/>
-          <a:lstStyle/>
-          <a:p>
-            <a:pPr algn="l"/>
-            <a:r>
-              <a:rPr sz="1000" b="0" i="0">
-                <a:solidFill>
-                  <a:srgbClr val="2C3A4B"/>
-                </a:solidFill>
-                <a:latin typeface="Segoe UI"/>
-              </a:rPr>
-              <a:t>Global early-career and mid-career professionals seeking AI prep, résumés, and interview readiness.</a:t>
-            </a:r>
-          </a:p>
-        </p:txBody>
-      </p:sp>
-      <p:sp>
-        <p:nvSpPr>
           <p:cNvPr id="20" name="Rounded Rectangle 19"/>
           <p:cNvSpPr/>
           <p:nvPr/>
         </p:nvSpPr>
         <p:spPr>
           <a:xfrm>
-            <a:off x="6537960" y="1234440"/>
-            <a:ext cx="5120640" cy="4160520"/>
+            <a:off x="6537960" y="1207008"/>
+            <a:ext cx="5120640" cy="4315968"/>
           </a:xfrm>
           <a:prstGeom prst="roundRect">
             <a:avLst>
@@ -15727,8 +15709,8 @@
         </p:nvSpPr>
         <p:spPr>
           <a:xfrm>
-            <a:off x="6720840" y="1371600"/>
-            <a:ext cx="4754880" cy="320040"/>
+            <a:off x="6720840" y="1325880"/>
+            <a:ext cx="4754880" cy="274320"/>
           </a:xfrm>
           <a:prstGeom prst="rect">
             <a:avLst/>
@@ -15761,8 +15743,8 @@
           <p:nvPr/>
         </p:nvGraphicFramePr>
         <p:xfrm>
-          <a:off x="6629400" y="1737360"/>
-          <a:ext cx="4892040" cy="3383280"/>
+          <a:off x="6629400" y="1691640"/>
+          <a:ext cx="4892040" cy="3611880"/>
         </p:xfrm>
         <a:graphic>
           <a:graphicData uri="http://schemas.openxmlformats.org/drawingml/2006/chart">
@@ -16442,7 +16424,7 @@
                 </a:solidFill>
                 <a:latin typeface="Georgia"/>
               </a:rPr>
-              <a:t>100K+ Question Database</a:t>
+              <a:t>100K+ Question Bank</a:t>
             </a:r>
           </a:p>
         </p:txBody>
@@ -17167,8 +17149,8 @@
         </p:nvSpPr>
         <p:spPr>
           <a:xfrm>
-            <a:off x="502920" y="1234440"/>
-            <a:ext cx="6766560" cy="2331720"/>
+            <a:off x="502920" y="1170432"/>
+            <a:ext cx="6766560" cy="2468880"/>
           </a:xfrm>
           <a:prstGeom prst="roundRect">
             <a:avLst>
@@ -17214,8 +17196,8 @@
         </p:nvSpPr>
         <p:spPr>
           <a:xfrm>
-            <a:off x="731520" y="1371600"/>
-            <a:ext cx="6400800" cy="320040"/>
+            <a:off x="731520" y="1280160"/>
+            <a:ext cx="6400800" cy="292608"/>
           </a:xfrm>
           <a:prstGeom prst="rect">
             <a:avLst/>
@@ -17247,8 +17229,8 @@
         </p:nvSpPr>
         <p:spPr>
           <a:xfrm>
-            <a:off x="731520" y="1783080"/>
-            <a:ext cx="6309360" cy="1005840"/>
+            <a:off x="731520" y="1645920"/>
+            <a:ext cx="6309360" cy="868680"/>
           </a:xfrm>
           <a:prstGeom prst="rect">
             <a:avLst/>
@@ -17267,7 +17249,7 @@
                 </a:solidFill>
                 <a:latin typeface="Segoe UI"/>
               </a:rPr>
-              <a:t>A deep collaboration integrating frontier AI capability across the platform — the Tongyi large language model, natural-language processing, LLM inference, intelligent recommendation, and semantic search — on enterprise-grade compute and security infrastructure.</a:t>
+              <a:t>A deep collaboration integrating frontier AI across the platform — Tongyi LLM, NLP, inference, recommendation, and semantic search — on enterprise-grade compute and security infrastructure.</a:t>
             </a:r>
           </a:p>
         </p:txBody>
@@ -17280,8 +17262,8 @@
         </p:nvSpPr>
         <p:spPr>
           <a:xfrm>
-            <a:off x="731520" y="2880360"/>
-            <a:ext cx="6309360" cy="256032"/>
+            <a:off x="731520" y="2606040"/>
+            <a:ext cx="6309360" cy="274320"/>
           </a:xfrm>
           <a:prstGeom prst="rect">
             <a:avLst/>
@@ -17300,7 +17282,7 @@
                 </a:solidFill>
                 <a:latin typeface="Segoe UI"/>
               </a:rPr>
-              <a:t>▸  AI Career Advisor delivering personalized career-path recommendations</a:t>
+              <a:t>▸  AI mock interviews and career advisor with personalized recommendations</a:t>
             </a:r>
           </a:p>
         </p:txBody>
@@ -17313,8 +17295,8 @@
         </p:nvSpPr>
         <p:spPr>
           <a:xfrm>
-            <a:off x="731520" y="3136391"/>
-            <a:ext cx="6309360" cy="256032"/>
+            <a:off x="731520" y="2898648"/>
+            <a:ext cx="6309360" cy="274320"/>
           </a:xfrm>
           <a:prstGeom prst="rect">
             <a:avLst/>
@@ -17333,7 +17315,7 @@
                 </a:solidFill>
                 <a:latin typeface="Segoe UI"/>
               </a:rPr>
-              <a:t>▸  Intelligent matching and screening for precise candidate–role fit</a:t>
+              <a:t>▸  AI résumé builder tuned for real hiring workflows</a:t>
             </a:r>
           </a:p>
         </p:txBody>
@@ -17346,8 +17328,8 @@
         </p:nvSpPr>
         <p:spPr>
           <a:xfrm>
-            <a:off x="731520" y="3392424"/>
-            <a:ext cx="6309360" cy="256032"/>
+            <a:off x="731520" y="3191256"/>
+            <a:ext cx="6309360" cy="274320"/>
           </a:xfrm>
           <a:prstGeom prst="rect">
             <a:avLst/>
@@ -17366,7 +17348,7 @@
                 </a:solidFill>
                 <a:latin typeface="Segoe UI"/>
               </a:rPr>
-              <a:t>▸  Enterprise data-security framework protecting user privacy</a:t>
+              <a:t>▸  Enterprise-grade data security protecting user privacy</a:t>
             </a:r>
           </a:p>
         </p:txBody>
@@ -17379,8 +17361,8 @@
         </p:nvSpPr>
         <p:spPr>
           <a:xfrm>
-            <a:off x="7452360" y="1234440"/>
-            <a:ext cx="4251960" cy="2331720"/>
+            <a:off x="7452360" y="1170432"/>
+            <a:ext cx="4251960" cy="2468880"/>
           </a:xfrm>
           <a:prstGeom prst="roundRect">
             <a:avLst>
@@ -17424,7 +17406,7 @@
         </p:nvSpPr>
         <p:spPr>
           <a:xfrm>
-            <a:off x="7680960" y="1417320"/>
+            <a:off x="7680960" y="1371600"/>
             <a:ext cx="3840480" cy="320040"/>
           </a:xfrm>
           <a:prstGeom prst="rect">
@@ -17438,7 +17420,7 @@
           <a:p>
             <a:pPr algn="l"/>
             <a:r>
-              <a:rPr sz="1400" b="1" i="0">
+              <a:rPr sz="1500" b="1" i="0">
                 <a:solidFill>
                   <a:srgbClr val="FFFFFF"/>
                 </a:solidFill>
@@ -17457,8 +17439,8 @@
         </p:nvSpPr>
         <p:spPr>
           <a:xfrm>
-            <a:off x="7680960" y="1920240"/>
-            <a:ext cx="3840480" cy="1371600"/>
+            <a:off x="7680960" y="1874519"/>
+            <a:ext cx="3840480" cy="1463040"/>
           </a:xfrm>
           <a:prstGeom prst="rect">
             <a:avLst/>
@@ -17490,8 +17472,8 @@
         </p:nvSpPr>
         <p:spPr>
           <a:xfrm>
-            <a:off x="502920" y="3703320"/>
-            <a:ext cx="5486400" cy="274320"/>
+            <a:off x="502920" y="3794760"/>
+            <a:ext cx="7315200" cy="256032"/>
           </a:xfrm>
           <a:prstGeom prst="rect">
             <a:avLst/>
@@ -17523,8 +17505,8 @@
         </p:nvSpPr>
         <p:spPr>
           <a:xfrm>
-            <a:off x="502920" y="3794760"/>
-            <a:ext cx="11201400" cy="640080"/>
+            <a:off x="502920" y="4114800"/>
+            <a:ext cx="11201400" cy="530352"/>
           </a:xfrm>
           <a:prstGeom prst="roundRect">
             <a:avLst>
@@ -17570,8 +17552,8 @@
         </p:nvSpPr>
         <p:spPr>
           <a:xfrm>
-            <a:off x="502920" y="3794760"/>
-            <a:ext cx="109728" cy="640080"/>
+            <a:off x="502920" y="4114800"/>
+            <a:ext cx="109728" cy="530352"/>
           </a:xfrm>
           <a:prstGeom prst="rect">
             <a:avLst/>
@@ -17613,8 +17595,8 @@
         </p:nvSpPr>
         <p:spPr>
           <a:xfrm>
-            <a:off x="822960" y="3867912"/>
-            <a:ext cx="3200400" cy="256032"/>
+            <a:off x="822960" y="4242816"/>
+            <a:ext cx="3200400" cy="274320"/>
           </a:xfrm>
           <a:prstGeom prst="rect">
             <a:avLst/>
@@ -17646,8 +17628,8 @@
         </p:nvSpPr>
         <p:spPr>
           <a:xfrm>
-            <a:off x="4114800" y="3959352"/>
-            <a:ext cx="7315200" cy="320040"/>
+            <a:off x="4114800" y="4242816"/>
+            <a:ext cx="7315200" cy="274320"/>
           </a:xfrm>
           <a:prstGeom prst="rect">
             <a:avLst/>
@@ -17679,8 +17661,8 @@
         </p:nvSpPr>
         <p:spPr>
           <a:xfrm>
-            <a:off x="502920" y="4526280"/>
-            <a:ext cx="11201400" cy="640080"/>
+            <a:off x="502920" y="4709160"/>
+            <a:ext cx="11201400" cy="530352"/>
           </a:xfrm>
           <a:prstGeom prst="roundRect">
             <a:avLst>
@@ -17726,8 +17708,8 @@
         </p:nvSpPr>
         <p:spPr>
           <a:xfrm>
-            <a:off x="502920" y="4526280"/>
-            <a:ext cx="109728" cy="640080"/>
+            <a:off x="502920" y="4709160"/>
+            <a:ext cx="109728" cy="530352"/>
           </a:xfrm>
           <a:prstGeom prst="rect">
             <a:avLst/>
@@ -17769,8 +17751,8 @@
         </p:nvSpPr>
         <p:spPr>
           <a:xfrm>
-            <a:off x="822960" y="4599432"/>
-            <a:ext cx="3200400" cy="256032"/>
+            <a:off x="822960" y="4837176"/>
+            <a:ext cx="3200400" cy="274320"/>
           </a:xfrm>
           <a:prstGeom prst="rect">
             <a:avLst/>
@@ -17802,8 +17784,8 @@
         </p:nvSpPr>
         <p:spPr>
           <a:xfrm>
-            <a:off x="4114800" y="4690872"/>
-            <a:ext cx="7315200" cy="320040"/>
+            <a:off x="4114800" y="4837176"/>
+            <a:ext cx="7315200" cy="274320"/>
           </a:xfrm>
           <a:prstGeom prst="rect">
             <a:avLst/>
@@ -17835,8 +17817,8 @@
         </p:nvSpPr>
         <p:spPr>
           <a:xfrm>
-            <a:off x="502920" y="5257800"/>
-            <a:ext cx="11201400" cy="640080"/>
+            <a:off x="502920" y="5303520"/>
+            <a:ext cx="11201400" cy="530352"/>
           </a:xfrm>
           <a:prstGeom prst="roundRect">
             <a:avLst>
@@ -17882,8 +17864,8 @@
         </p:nvSpPr>
         <p:spPr>
           <a:xfrm>
-            <a:off x="502920" y="5257800"/>
-            <a:ext cx="109728" cy="640080"/>
+            <a:off x="502920" y="5303520"/>
+            <a:ext cx="109728" cy="530352"/>
           </a:xfrm>
           <a:prstGeom prst="rect">
             <a:avLst/>
@@ -17925,8 +17907,8 @@
         </p:nvSpPr>
         <p:spPr>
           <a:xfrm>
-            <a:off x="822960" y="5330952"/>
-            <a:ext cx="3200400" cy="256032"/>
+            <a:off x="822960" y="5431536"/>
+            <a:ext cx="3200400" cy="274320"/>
           </a:xfrm>
           <a:prstGeom prst="rect">
             <a:avLst/>
@@ -17958,8 +17940,8 @@
         </p:nvSpPr>
         <p:spPr>
           <a:xfrm>
-            <a:off x="4114800" y="5422392"/>
-            <a:ext cx="7315200" cy="320040"/>
+            <a:off x="4114800" y="5431536"/>
+            <a:ext cx="7315200" cy="274320"/>
           </a:xfrm>
           <a:prstGeom prst="rect">
             <a:avLst/>
@@ -18992,7 +18974,7 @@
         <p:spPr>
           <a:xfrm>
             <a:off x="685800" y="4160520"/>
-            <a:ext cx="5486400" cy="274320"/>
+            <a:ext cx="6858000" cy="274320"/>
           </a:xfrm>
           <a:prstGeom prst="rect">
             <a:avLst/>
@@ -19025,8 +19007,8 @@
           <p:nvPr/>
         </p:nvGraphicFramePr>
         <p:xfrm>
-          <a:off x="640080" y="4389120"/>
-          <a:ext cx="7498079" cy="1554480"/>
+          <a:off x="640080" y="4434840"/>
+          <a:ext cx="6949440" cy="1463040"/>
         </p:xfrm>
         <a:graphic>
           <a:graphicData uri="http://schemas.openxmlformats.org/drawingml/2006/chart">
@@ -19042,8 +19024,8 @@
         </p:nvSpPr>
         <p:spPr>
           <a:xfrm>
-            <a:off x="8321040" y="4663440"/>
-            <a:ext cx="3108960" cy="1188720"/>
+            <a:off x="7863840" y="4617720"/>
+            <a:ext cx="3566160" cy="1188720"/>
           </a:xfrm>
           <a:prstGeom prst="rect">
             <a:avLst/>
@@ -19056,11 +19038,11 @@
           <a:p>
             <a:pPr algn="l">
               <a:spcAft>
-                <a:spcPts val="600"/>
+                <a:spcPts val="800"/>
               </a:spcAft>
             </a:pPr>
             <a:r>
-              <a:rPr sz="1200" b="1" i="0">
+              <a:rPr sz="1300" b="1" i="0">
                 <a:solidFill>
                   <a:srgbClr val="0B1F33"/>
                 </a:solidFill>
@@ -19072,7 +19054,7 @@
           <a:p>
             <a:pPr algn="l"/>
             <a:r>
-              <a:rPr sz="1100" b="0" i="0">
+              <a:rPr sz="1200" b="0" i="0">
                 <a:solidFill>
                   <a:srgbClr val="2C3A4B"/>
                 </a:solidFill>
@@ -19378,8 +19360,8 @@
         </p:nvSpPr>
         <p:spPr>
           <a:xfrm>
-            <a:off x="502920" y="1188720"/>
-            <a:ext cx="2697480" cy="1143000"/>
+            <a:off x="502920" y="1170432"/>
+            <a:ext cx="2697480" cy="1051560"/>
           </a:xfrm>
           <a:prstGeom prst="roundRect">
             <a:avLst>
@@ -19425,8 +19407,8 @@
         </p:nvSpPr>
         <p:spPr>
           <a:xfrm>
-            <a:off x="640080" y="1280160"/>
-            <a:ext cx="2423160" cy="502920"/>
+            <a:off x="640080" y="1261872"/>
+            <a:ext cx="2423160" cy="457200"/>
           </a:xfrm>
           <a:prstGeom prst="rect">
             <a:avLst/>
@@ -19458,7 +19440,7 @@
         </p:nvSpPr>
         <p:spPr>
           <a:xfrm>
-            <a:off x="640080" y="1874519"/>
+            <a:off x="640080" y="1783080"/>
             <a:ext cx="2423160" cy="320040"/>
           </a:xfrm>
           <a:prstGeom prst="rect">
@@ -19491,8 +19473,8 @@
         </p:nvSpPr>
         <p:spPr>
           <a:xfrm>
-            <a:off x="3383280" y="1188720"/>
-            <a:ext cx="2697480" cy="1143000"/>
+            <a:off x="3383280" y="1170432"/>
+            <a:ext cx="2697480" cy="1051560"/>
           </a:xfrm>
           <a:prstGeom prst="roundRect">
             <a:avLst>
@@ -19538,8 +19520,8 @@
         </p:nvSpPr>
         <p:spPr>
           <a:xfrm>
-            <a:off x="3520440" y="1280160"/>
-            <a:ext cx="2423160" cy="502920"/>
+            <a:off x="3520440" y="1261872"/>
+            <a:ext cx="2423160" cy="457200"/>
           </a:xfrm>
           <a:prstGeom prst="rect">
             <a:avLst/>
@@ -19571,7 +19553,7 @@
         </p:nvSpPr>
         <p:spPr>
           <a:xfrm>
-            <a:off x="3520440" y="1874519"/>
+            <a:off x="3520440" y="1783080"/>
             <a:ext cx="2423160" cy="320040"/>
           </a:xfrm>
           <a:prstGeom prst="rect">
@@ -19604,8 +19586,8 @@
         </p:nvSpPr>
         <p:spPr>
           <a:xfrm>
-            <a:off x="6263640" y="1188720"/>
-            <a:ext cx="2697480" cy="1143000"/>
+            <a:off x="6263640" y="1170432"/>
+            <a:ext cx="2697480" cy="1051560"/>
           </a:xfrm>
           <a:prstGeom prst="roundRect">
             <a:avLst>
@@ -19651,8 +19633,8 @@
         </p:nvSpPr>
         <p:spPr>
           <a:xfrm>
-            <a:off x="6400800" y="1280160"/>
-            <a:ext cx="2423160" cy="502920"/>
+            <a:off x="6400800" y="1261872"/>
+            <a:ext cx="2423160" cy="457200"/>
           </a:xfrm>
           <a:prstGeom prst="rect">
             <a:avLst/>
@@ -19684,7 +19666,7 @@
         </p:nvSpPr>
         <p:spPr>
           <a:xfrm>
-            <a:off x="6400800" y="1874519"/>
+            <a:off x="6400800" y="1783080"/>
             <a:ext cx="2423160" cy="320040"/>
           </a:xfrm>
           <a:prstGeom prst="rect">
@@ -19717,8 +19699,8 @@
         </p:nvSpPr>
         <p:spPr>
           <a:xfrm>
-            <a:off x="9144000" y="1188720"/>
-            <a:ext cx="2697480" cy="1143000"/>
+            <a:off x="9144000" y="1170432"/>
+            <a:ext cx="2697480" cy="1051560"/>
           </a:xfrm>
           <a:prstGeom prst="roundRect">
             <a:avLst>
@@ -19764,8 +19746,8 @@
         </p:nvSpPr>
         <p:spPr>
           <a:xfrm>
-            <a:off x="9281160" y="1280160"/>
-            <a:ext cx="2423160" cy="502920"/>
+            <a:off x="9281160" y="1261872"/>
+            <a:ext cx="2423160" cy="457200"/>
           </a:xfrm>
           <a:prstGeom prst="rect">
             <a:avLst/>
@@ -19797,7 +19779,7 @@
         </p:nvSpPr>
         <p:spPr>
           <a:xfrm>
-            <a:off x="9281160" y="1874519"/>
+            <a:off x="9281160" y="1783080"/>
             <a:ext cx="2423160" cy="320040"/>
           </a:xfrm>
           <a:prstGeom prst="rect">
@@ -19830,7 +19812,7 @@
         </p:nvSpPr>
         <p:spPr>
           <a:xfrm>
-            <a:off x="502920" y="2514600"/>
+            <a:off x="502920" y="2377440"/>
             <a:ext cx="6858000" cy="3246120"/>
           </a:xfrm>
           <a:prstGeom prst="roundRect">
@@ -19877,8 +19859,8 @@
         </p:nvSpPr>
         <p:spPr>
           <a:xfrm>
-            <a:off x="685800" y="2651760"/>
-            <a:ext cx="6400800" cy="274320"/>
+            <a:off x="685800" y="2487168"/>
+            <a:ext cx="6400800" cy="256032"/>
           </a:xfrm>
           <a:prstGeom prst="rect">
             <a:avLst/>
@@ -19910,8 +19892,8 @@
         </p:nvSpPr>
         <p:spPr>
           <a:xfrm>
-            <a:off x="1051560" y="3154680"/>
-            <a:ext cx="36576" cy="2331720"/>
+            <a:off x="1051560" y="2926080"/>
+            <a:ext cx="36576" cy="2468880"/>
           </a:xfrm>
           <a:prstGeom prst="rect">
             <a:avLst/>
@@ -19953,7 +19935,7 @@
         </p:nvSpPr>
         <p:spPr>
           <a:xfrm>
-            <a:off x="960120" y="3136392"/>
+            <a:off x="960120" y="2935224"/>
             <a:ext cx="219456" cy="219456"/>
           </a:xfrm>
           <a:prstGeom prst="ellipse">
@@ -19996,8 +19978,8 @@
         </p:nvSpPr>
         <p:spPr>
           <a:xfrm>
-            <a:off x="1371600" y="3063240"/>
-            <a:ext cx="1097280" cy="274320"/>
+            <a:off x="1371600" y="2880360"/>
+            <a:ext cx="1051560" cy="256032"/>
           </a:xfrm>
           <a:prstGeom prst="rect">
             <a:avLst/>
@@ -20029,8 +20011,8 @@
         </p:nvSpPr>
         <p:spPr>
           <a:xfrm>
-            <a:off x="2514600" y="3063240"/>
-            <a:ext cx="4572000" cy="457200"/>
+            <a:off x="2468880" y="2880360"/>
+            <a:ext cx="4663440" cy="457200"/>
           </a:xfrm>
           <a:prstGeom prst="rect">
             <a:avLst/>
@@ -20049,7 +20031,7 @@
                 </a:solidFill>
                 <a:latin typeface="Segoe UI"/>
               </a:rPr>
-              <a:t>51 Careers founded — premium career development for global professionals</a:t>
+              <a:t>51Careers founded — premium career development for global professionals</a:t>
             </a:r>
           </a:p>
         </p:txBody>
@@ -20062,7 +20044,7 @@
         </p:nvSpPr>
         <p:spPr>
           <a:xfrm>
-            <a:off x="960120" y="3639312"/>
+            <a:off x="960120" y="3438144"/>
             <a:ext cx="219456" cy="219456"/>
           </a:xfrm>
           <a:prstGeom prst="ellipse">
@@ -20105,8 +20087,8 @@
         </p:nvSpPr>
         <p:spPr>
           <a:xfrm>
-            <a:off x="1371600" y="3566160"/>
-            <a:ext cx="1097280" cy="274320"/>
+            <a:off x="1371600" y="3383280"/>
+            <a:ext cx="1051560" cy="256032"/>
           </a:xfrm>
           <a:prstGeom prst="rect">
             <a:avLst/>
@@ -20138,8 +20120,8 @@
         </p:nvSpPr>
         <p:spPr>
           <a:xfrm>
-            <a:off x="2514600" y="3566160"/>
-            <a:ext cx="4572000" cy="457200"/>
+            <a:off x="2468880" y="3383280"/>
+            <a:ext cx="4663440" cy="457200"/>
           </a:xfrm>
           <a:prstGeom prst="rect">
             <a:avLst/>
@@ -20158,7 +20140,7 @@
                 </a:solidFill>
                 <a:latin typeface="Segoe UI"/>
               </a:rPr>
-              <a:t>Helped 10,000+ candidates; built deep interview &amp; résumé expertise</a:t>
+              <a:t>Helped 10,000+ candidates; built deep interview and résumé expertise</a:t>
             </a:r>
           </a:p>
         </p:txBody>
@@ -20171,7 +20153,7 @@
         </p:nvSpPr>
         <p:spPr>
           <a:xfrm>
-            <a:off x="960120" y="4142232"/>
+            <a:off x="960120" y="3941063"/>
             <a:ext cx="219456" cy="219456"/>
           </a:xfrm>
           <a:prstGeom prst="ellipse">
@@ -20214,8 +20196,8 @@
         </p:nvSpPr>
         <p:spPr>
           <a:xfrm>
-            <a:off x="1371600" y="4069080"/>
-            <a:ext cx="1097280" cy="274320"/>
+            <a:off x="1371600" y="3886200"/>
+            <a:ext cx="1051560" cy="256032"/>
           </a:xfrm>
           <a:prstGeom prst="rect">
             <a:avLst/>
@@ -20247,8 +20229,8 @@
         </p:nvSpPr>
         <p:spPr>
           <a:xfrm>
-            <a:off x="2514600" y="4069080"/>
-            <a:ext cx="4572000" cy="457200"/>
+            <a:off x="2468880" y="3886200"/>
+            <a:ext cx="4663440" cy="457200"/>
           </a:xfrm>
           <a:prstGeom prst="rect">
             <a:avLst/>
@@ -20267,7 +20249,7 @@
                 </a:solidFill>
                 <a:latin typeface="Segoe UI"/>
               </a:rPr>
-              <a:t>Launched 51Careers.AI — free AI platform with mock interviews &amp; 100K+ questions</a:t>
+              <a:t>Launched 51Careers.AI — free AI platform with mock interviews and 100K+ questions</a:t>
             </a:r>
           </a:p>
         </p:txBody>
@@ -20280,7 +20262,7 @@
         </p:nvSpPr>
         <p:spPr>
           <a:xfrm>
-            <a:off x="960120" y="4645152"/>
+            <a:off x="960120" y="4443983"/>
             <a:ext cx="219456" cy="219456"/>
           </a:xfrm>
           <a:prstGeom prst="ellipse">
@@ -20323,8 +20305,8 @@
         </p:nvSpPr>
         <p:spPr>
           <a:xfrm>
-            <a:off x="1371600" y="4572000"/>
-            <a:ext cx="1097280" cy="274320"/>
+            <a:off x="1371600" y="4389120"/>
+            <a:ext cx="1051560" cy="256032"/>
           </a:xfrm>
           <a:prstGeom prst="rect">
             <a:avLst/>
@@ -20356,8 +20338,8 @@
         </p:nvSpPr>
         <p:spPr>
           <a:xfrm>
-            <a:off x="2514600" y="4572000"/>
-            <a:ext cx="4572000" cy="457200"/>
+            <a:off x="2468880" y="4389120"/>
+            <a:ext cx="4663440" cy="457200"/>
           </a:xfrm>
           <a:prstGeom prst="rect">
             <a:avLst/>
@@ -20389,7 +20371,7 @@
         </p:nvSpPr>
         <p:spPr>
           <a:xfrm>
-            <a:off x="960120" y="5148072"/>
+            <a:off x="960120" y="4946903"/>
             <a:ext cx="219456" cy="219456"/>
           </a:xfrm>
           <a:prstGeom prst="ellipse">
@@ -20432,8 +20414,8 @@
         </p:nvSpPr>
         <p:spPr>
           <a:xfrm>
-            <a:off x="1371600" y="5074920"/>
-            <a:ext cx="1097280" cy="274320"/>
+            <a:off x="1371600" y="4892040"/>
+            <a:ext cx="1051560" cy="256032"/>
           </a:xfrm>
           <a:prstGeom prst="rect">
             <a:avLst/>
@@ -20465,8 +20447,8 @@
         </p:nvSpPr>
         <p:spPr>
           <a:xfrm>
-            <a:off x="2514600" y="5074920"/>
-            <a:ext cx="4572000" cy="457200"/>
+            <a:off x="2468880" y="4892040"/>
+            <a:ext cx="4663440" cy="457200"/>
           </a:xfrm>
           <a:prstGeom prst="rect">
             <a:avLst/>
@@ -20498,7 +20480,7 @@
         </p:nvSpPr>
         <p:spPr>
           <a:xfrm>
-            <a:off x="7543800" y="2514600"/>
+            <a:off x="7543800" y="2377440"/>
             <a:ext cx="4160520" cy="3246120"/>
           </a:xfrm>
           <a:prstGeom prst="roundRect">
@@ -20545,8 +20527,8 @@
         </p:nvSpPr>
         <p:spPr>
           <a:xfrm>
-            <a:off x="7726679" y="2651760"/>
-            <a:ext cx="3840480" cy="274320"/>
+            <a:off x="7726679" y="2487168"/>
+            <a:ext cx="3840480" cy="256032"/>
           </a:xfrm>
           <a:prstGeom prst="rect">
             <a:avLst/>
@@ -20578,21 +20560,21 @@
         </p:nvSpPr>
         <p:spPr>
           <a:xfrm>
-            <a:off x="7726679" y="3063240"/>
-            <a:ext cx="3794760" cy="548640"/>
-          </a:xfrm>
-          <a:prstGeom prst="rect">
-            <a:avLst/>
-          </a:prstGeom>
-          <a:noFill/>
-        </p:spPr>
-        <p:txBody>
-          <a:bodyPr wrap="square" anchor="t"/>
-          <a:lstStyle/>
-          <a:p>
-            <a:pPr algn="l"/>
-            <a:r>
-              <a:rPr sz="1100" b="0" i="0">
+            <a:off x="7726679" y="2880360"/>
+            <a:ext cx="3794760" cy="594360"/>
+          </a:xfrm>
+          <a:prstGeom prst="rect">
+            <a:avLst/>
+          </a:prstGeom>
+          <a:noFill/>
+        </p:spPr>
+        <p:txBody>
+          <a:bodyPr wrap="square" anchor="t"/>
+          <a:lstStyle/>
+          <a:p>
+            <a:pPr algn="l"/>
+            <a:r>
+              <a:rPr sz="1200" b="0" i="0">
                 <a:solidFill>
                   <a:srgbClr val="2C3A4B"/>
                 </a:solidFill>
@@ -20611,27 +20593,27 @@
         </p:nvSpPr>
         <p:spPr>
           <a:xfrm>
-            <a:off x="7726679" y="3657600"/>
-            <a:ext cx="3794760" cy="548640"/>
-          </a:xfrm>
-          <a:prstGeom prst="rect">
-            <a:avLst/>
-          </a:prstGeom>
-          <a:noFill/>
-        </p:spPr>
-        <p:txBody>
-          <a:bodyPr wrap="square" anchor="t"/>
-          <a:lstStyle/>
-          <a:p>
-            <a:pPr algn="l"/>
-            <a:r>
-              <a:rPr sz="1100" b="0" i="0">
+            <a:off x="7726679" y="3520440"/>
+            <a:ext cx="3794760" cy="594360"/>
+          </a:xfrm>
+          <a:prstGeom prst="rect">
+            <a:avLst/>
+          </a:prstGeom>
+          <a:noFill/>
+        </p:spPr>
+        <p:txBody>
+          <a:bodyPr wrap="square" anchor="t"/>
+          <a:lstStyle/>
+          <a:p>
+            <a:pPr algn="l"/>
+            <a:r>
+              <a:rPr sz="1200" b="0" i="0">
                 <a:solidFill>
                   <a:srgbClr val="2C3A4B"/>
                 </a:solidFill>
                 <a:latin typeface="Segoe UI"/>
               </a:rPr>
-              <a:t>▸  100K+ proprietary questions create a durable data advantage vs. generic LLMs</a:t>
+              <a:t>▸  100K+ proprietary questions create a durable advantage vs. generic LLMs</a:t>
             </a:r>
           </a:p>
         </p:txBody>
@@ -20644,21 +20626,21 @@
         </p:nvSpPr>
         <p:spPr>
           <a:xfrm>
-            <a:off x="7726679" y="4251960"/>
-            <a:ext cx="3794760" cy="548640"/>
-          </a:xfrm>
-          <a:prstGeom prst="rect">
-            <a:avLst/>
-          </a:prstGeom>
-          <a:noFill/>
-        </p:spPr>
-        <p:txBody>
-          <a:bodyPr wrap="square" anchor="t"/>
-          <a:lstStyle/>
-          <a:p>
-            <a:pPr algn="l"/>
-            <a:r>
-              <a:rPr sz="1100" b="0" i="0">
+            <a:off x="7726679" y="4160520"/>
+            <a:ext cx="3794760" cy="594360"/>
+          </a:xfrm>
+          <a:prstGeom prst="rect">
+            <a:avLst/>
+          </a:prstGeom>
+          <a:noFill/>
+        </p:spPr>
+        <p:txBody>
+          <a:bodyPr wrap="square" anchor="t"/>
+          <a:lstStyle/>
+          <a:p>
+            <a:pPr algn="l"/>
+            <a:r>
+              <a:rPr sz="1200" b="0" i="0">
                 <a:solidFill>
                   <a:srgbClr val="2C3A4B"/>
                 </a:solidFill>
@@ -20677,21 +20659,21 @@
         </p:nvSpPr>
         <p:spPr>
           <a:xfrm>
-            <a:off x="7726679" y="4846320"/>
-            <a:ext cx="3794760" cy="548640"/>
-          </a:xfrm>
-          <a:prstGeom prst="rect">
-            <a:avLst/>
-          </a:prstGeom>
-          <a:noFill/>
-        </p:spPr>
-        <p:txBody>
-          <a:bodyPr wrap="square" anchor="t"/>
-          <a:lstStyle/>
-          <a:p>
-            <a:pPr algn="l"/>
-            <a:r>
-              <a:rPr sz="1100" b="0" i="0">
+            <a:off x="7726679" y="4800600"/>
+            <a:ext cx="3794760" cy="594360"/>
+          </a:xfrm>
+          <a:prstGeom prst="rect">
+            <a:avLst/>
+          </a:prstGeom>
+          <a:noFill/>
+        </p:spPr>
+        <p:txBody>
+          <a:bodyPr wrap="square" anchor="t"/>
+          <a:lstStyle/>
+          <a:p>
+            <a:pPr algn="l"/>
+            <a:r>
+              <a:rPr sz="1200" b="0" i="0">
                 <a:solidFill>
                   <a:srgbClr val="2C3A4B"/>
                 </a:solidFill>
@@ -20710,8 +20692,8 @@
         </p:nvSpPr>
         <p:spPr>
           <a:xfrm>
-            <a:off x="502920" y="5852160"/>
-            <a:ext cx="10972800" cy="274320"/>
+            <a:off x="502920" y="5760720"/>
+            <a:ext cx="10972800" cy="256032"/>
           </a:xfrm>
           <a:prstGeom prst="rect">
             <a:avLst/>
@@ -20730,7 +20712,7 @@
                 </a:solidFill>
                 <a:latin typeface="Segoe UI"/>
               </a:rPr>
-              <a:t>Platform revenue is currently US$0 by design (free access). Candidate totals reflect 51 Careers operating history since 2016.</a:t>
+              <a:t>Platform revenue is currently US$0 by design (free access). Candidate totals reflect 51Careers operating history since 2016.</a:t>
             </a:r>
           </a:p>
         </p:txBody>

--- a/51Careers_AI_Investor_Presentation.pptx
+++ b/51Careers_AI_Investor_Presentation.pptx
@@ -718,7 +718,10 @@
       </c:catAx>
       <c:valAx>
         <c:axId val="-2113994440"/>
-        <c:scaling/>
+        <c:scaling>
+          <c:max val="6.0"/>
+          <c:min val="0.0"/>
+        </c:scaling>
         <c:delete val="0"/>
         <c:axPos val="b"/>
         <c:majorGridlines>
@@ -1002,7 +1005,7 @@
               <c:strCache>
                 <c:ptCount val="5"/>
                 <c:pt idx="0">
-                  <c:v>2025A</c:v>
+                  <c:v>2025A ($0)</c:v>
                 </c:pt>
                 <c:pt idx="1">
                   <c:v>2026E</c:v>
@@ -1044,6 +1047,30 @@
             </c:numRef>
           </c:val>
         </c:ser>
+        <c:dLbls>
+          <c:numFmt formatCode="0.0" sourceLinked="0"/>
+          <c:txPr>
+            <a:bodyPr/>
+            <a:lstStyle/>
+            <a:p>
+              <a:pPr>
+                <a:defRPr sz="900">
+                  <a:solidFill>
+                    <a:srgbClr val="0B1F33"/>
+                  </a:solidFill>
+                  <a:latin typeface="Segoe UI"/>
+                </a:defRPr>
+              </a:pPr>
+            </a:p>
+          </c:txPr>
+          <c:showLegendKey val="0"/>
+          <c:showVal val="1"/>
+          <c:showCatName val="0"/>
+          <c:showSerName val="0"/>
+          <c:showPercent val="0"/>
+          <c:showBubbleSize val="0"/>
+          <c:showLeaderLines val="1"/>
+        </c:dLbls>
         <c:axId val="-2068027336"/>
         <c:axId val="-2113994440"/>
       </c:barChart>
@@ -1184,7 +1211,7 @@
               <c:strCache>
                 <c:ptCount val="5"/>
                 <c:pt idx="0">
-                  <c:v>2025A</c:v>
+                  <c:v>2025A ($0)</c:v>
                 </c:pt>
                 <c:pt idx="1">
                   <c:v>2026E</c:v>
@@ -8013,7 +8040,7 @@
                 </a:solidFill>
                 <a:latin typeface="Georgia"/>
               </a:rPr>
-              <a:t>From Free Platform to Paid Scale</a:t>
+              <a:t>Illustrative Five-Year Trajectory — Starting at US$0</a:t>
             </a:r>
           </a:p>
         </p:txBody>
@@ -8073,8 +8100,8 @@
         </p:nvSpPr>
         <p:spPr>
           <a:xfrm>
-            <a:off x="685800" y="1280160"/>
-            <a:ext cx="5486400" cy="256032"/>
+            <a:off x="685800" y="1261872"/>
+            <a:ext cx="6858000" cy="256032"/>
           </a:xfrm>
           <a:prstGeom prst="rect">
             <a:avLst/>
@@ -8093,7 +8120,7 @@
                 </a:solidFill>
                 <a:latin typeface="Segoe UI"/>
               </a:rPr>
-              <a:t>Illustrative platform revenue, US$ millions</a:t>
+              <a:t>Platform revenue, US$ millions  ·  2025A = US$0 (free product today)</a:t>
             </a:r>
           </a:p>
         </p:txBody>
@@ -8565,7 +8592,7 @@
                 </a:solidFill>
                 <a:latin typeface="Segoe UI"/>
               </a:rPr>
-              <a:t>Illustrative management projections only — not a forecast. 2025A platform revenue is US$0 (free product). Actual results will differ.</a:t>
+              <a:t>Illustrative only — not a forecast. 2025A is actual platform revenue of US$0 while the product remains free. Future years assume paid conversion begins.</a:t>
             </a:r>
           </a:p>
         </p:txBody>
